--- a/frontend/Voxen.pptx
+++ b/frontend/Voxen.pptx
@@ -5,22 +5,21 @@
     <p:sldMasterId id="2147483648" r:id="rId1"/>
   </p:sldMasterIdLst>
   <p:notesMasterIdLst>
-    <p:notesMasterId r:id="rId15"/>
+    <p:notesMasterId r:id="rId14"/>
   </p:notesMasterIdLst>
   <p:sldIdLst>
     <p:sldId id="256" r:id="rId2"/>
     <p:sldId id="257" r:id="rId3"/>
-    <p:sldId id="258" r:id="rId4"/>
-    <p:sldId id="264" r:id="rId5"/>
-    <p:sldId id="260" r:id="rId6"/>
-    <p:sldId id="266" r:id="rId7"/>
-    <p:sldId id="270" r:id="rId8"/>
-    <p:sldId id="261" r:id="rId9"/>
-    <p:sldId id="262" r:id="rId10"/>
-    <p:sldId id="263" r:id="rId11"/>
-    <p:sldId id="271" r:id="rId12"/>
+    <p:sldId id="272" r:id="rId4"/>
+    <p:sldId id="273" r:id="rId5"/>
+    <p:sldId id="258" r:id="rId6"/>
+    <p:sldId id="264" r:id="rId7"/>
+    <p:sldId id="266" r:id="rId8"/>
+    <p:sldId id="270" r:id="rId9"/>
+    <p:sldId id="261" r:id="rId10"/>
+    <p:sldId id="262" r:id="rId11"/>
+    <p:sldId id="263" r:id="rId12"/>
     <p:sldId id="268" r:id="rId13"/>
-    <p:sldId id="267" r:id="rId14"/>
   </p:sldIdLst>
   <p:sldSz cx="9144000" cy="5143500" type="screen16x9"/>
   <p:notesSz cx="5143500" cy="9144000"/>
@@ -491,7 +490,7 @@
     </p:spTree>
     <p:extLst>
       <p:ext uri="{BB962C8B-B14F-4D97-AF65-F5344CB8AC3E}">
-        <p14:creationId xmlns:p14="http://schemas.microsoft.com/office/powerpoint/2010/main" val="536087002"/>
+        <p14:creationId xmlns:p14="http://schemas.microsoft.com/office/powerpoint/2010/main" val="1024086991"/>
       </p:ext>
     </p:extLst>
   </p:cSld>
@@ -576,90 +575,6 @@
     <p:extLst>
       <p:ext uri="{BB962C8B-B14F-4D97-AF65-F5344CB8AC3E}">
         <p14:creationId xmlns:p14="http://schemas.microsoft.com/office/powerpoint/2010/main" val="3976206432"/>
-      </p:ext>
-    </p:extLst>
-  </p:cSld>
-  <p:clrMapOvr>
-    <a:masterClrMapping/>
-  </p:clrMapOvr>
-</p:notes>
-</file>
-
-<file path=ppt/notesSlides/notesSlide13.xml><?xml version="1.0" encoding="utf-8"?>
-<p:notes xmlns:a="http://schemas.openxmlformats.org/drawingml/2006/main" xmlns:r="http://schemas.openxmlformats.org/officeDocument/2006/relationships" xmlns:p="http://schemas.openxmlformats.org/presentationml/2006/main">
-  <p:cSld>
-    <p:spTree>
-      <p:nvGrpSpPr>
-        <p:cNvPr id="1" name=""/>
-        <p:cNvGrpSpPr/>
-        <p:nvPr/>
-      </p:nvGrpSpPr>
-      <p:grpSpPr>
-        <a:xfrm>
-          <a:off x="0" y="0"/>
-          <a:ext cx="0" cy="0"/>
-          <a:chOff x="0" y="0"/>
-          <a:chExt cx="0" cy="0"/>
-        </a:xfrm>
-      </p:grpSpPr>
-      <p:sp>
-        <p:nvSpPr>
-          <p:cNvPr id="2" name="Slide Image Placeholder 1"/>
-          <p:cNvSpPr>
-            <a:spLocks noGrp="1" noRot="1" noChangeAspect="1"/>
-          </p:cNvSpPr>
-          <p:nvPr>
-            <p:ph type="sldImg"/>
-          </p:nvPr>
-        </p:nvSpPr>
-        <p:spPr/>
-      </p:sp>
-      <p:sp>
-        <p:nvSpPr>
-          <p:cNvPr id="3" name="Notes Placeholder 2"/>
-          <p:cNvSpPr>
-            <a:spLocks noGrp="1"/>
-          </p:cNvSpPr>
-          <p:nvPr>
-            <p:ph type="body" idx="1"/>
-          </p:nvPr>
-        </p:nvSpPr>
-        <p:spPr/>
-        <p:txBody>
-          <a:bodyPr/>
-          <a:lstStyle/>
-          <a:p>
-            <a:endParaRPr lang="en-US" dirty="0"/>
-          </a:p>
-        </p:txBody>
-      </p:sp>
-      <p:sp>
-        <p:nvSpPr>
-          <p:cNvPr id="4" name="Slide Number Placeholder 3"/>
-          <p:cNvSpPr>
-            <a:spLocks noGrp="1"/>
-          </p:cNvSpPr>
-          <p:nvPr>
-            <p:ph type="sldNum" sz="quarter" idx="10"/>
-          </p:nvPr>
-        </p:nvSpPr>
-        <p:spPr/>
-        <p:txBody>
-          <a:bodyPr/>
-          <a:lstStyle/>
-          <a:p>
-            <a:fld id="{F7021451-1387-4CA6-816F-3879F97B5CBC}" type="slidenum">
-              <a:rPr lang="en-US"/>
-              <a:t>13</a:t>
-            </a:fld>
-            <a:endParaRPr lang="en-US" dirty="0"/>
-          </a:p>
-        </p:txBody>
-      </p:sp>
-    </p:spTree>
-    <p:extLst>
-      <p:ext uri="{BB962C8B-B14F-4D97-AF65-F5344CB8AC3E}">
-        <p14:creationId xmlns:p14="http://schemas.microsoft.com/office/powerpoint/2010/main" val="3498128179"/>
       </p:ext>
     </p:extLst>
   </p:cSld>
@@ -827,7 +742,7 @@
     </p:spTree>
     <p:extLst>
       <p:ext uri="{BB962C8B-B14F-4D97-AF65-F5344CB8AC3E}">
-        <p14:creationId xmlns:p14="http://schemas.microsoft.com/office/powerpoint/2010/main" val="1024086991"/>
+        <p14:creationId xmlns:p14="http://schemas.microsoft.com/office/powerpoint/2010/main" val="3269447806"/>
       </p:ext>
     </p:extLst>
   </p:cSld>
@@ -911,7 +826,7 @@
     </p:spTree>
     <p:extLst>
       <p:ext uri="{BB962C8B-B14F-4D97-AF65-F5344CB8AC3E}">
-        <p14:creationId xmlns:p14="http://schemas.microsoft.com/office/powerpoint/2010/main" val="2278286607"/>
+        <p14:creationId xmlns:p14="http://schemas.microsoft.com/office/powerpoint/2010/main" val="451443542"/>
       </p:ext>
     </p:extLst>
   </p:cSld>
@@ -1079,7 +994,7 @@
     </p:spTree>
     <p:extLst>
       <p:ext uri="{BB962C8B-B14F-4D97-AF65-F5344CB8AC3E}">
-        <p14:creationId xmlns:p14="http://schemas.microsoft.com/office/powerpoint/2010/main" val="2815700981"/>
+        <p14:creationId xmlns:p14="http://schemas.microsoft.com/office/powerpoint/2010/main" val="2278286607"/>
       </p:ext>
     </p:extLst>
   </p:cSld>
@@ -1163,7 +1078,7 @@
     </p:spTree>
     <p:extLst>
       <p:ext uri="{BB962C8B-B14F-4D97-AF65-F5344CB8AC3E}">
-        <p14:creationId xmlns:p14="http://schemas.microsoft.com/office/powerpoint/2010/main" val="1307024917"/>
+        <p14:creationId xmlns:p14="http://schemas.microsoft.com/office/powerpoint/2010/main" val="2815700981"/>
       </p:ext>
     </p:extLst>
   </p:cSld>
@@ -1247,7 +1162,7 @@
     </p:spTree>
     <p:extLst>
       <p:ext uri="{BB962C8B-B14F-4D97-AF65-F5344CB8AC3E}">
-        <p14:creationId xmlns:p14="http://schemas.microsoft.com/office/powerpoint/2010/main" val="1024086991"/>
+        <p14:creationId xmlns:p14="http://schemas.microsoft.com/office/powerpoint/2010/main" val="1307024917"/>
       </p:ext>
     </p:extLst>
   </p:cSld>
@@ -1965,6 +1880,800 @@
 
 <file path=ppt/slides/slide10.xml><?xml version="1.0" encoding="utf-8"?>
 <p:sld xmlns:a="http://schemas.openxmlformats.org/drawingml/2006/main" xmlns:r="http://schemas.openxmlformats.org/officeDocument/2006/relationships" xmlns:p="http://schemas.openxmlformats.org/presentationml/2006/main">
+  <p:cSld name="Slide 7">
+    <p:bg>
+      <p:bgPr>
+        <a:solidFill>
+          <a:srgbClr val="080808"/>
+        </a:solidFill>
+        <a:effectLst/>
+      </p:bgPr>
+    </p:bg>
+    <p:spTree>
+      <p:nvGrpSpPr>
+        <p:cNvPr id="1" name=""/>
+        <p:cNvGrpSpPr/>
+        <p:nvPr/>
+      </p:nvGrpSpPr>
+      <p:grpSpPr>
+        <a:xfrm>
+          <a:off x="0" y="0"/>
+          <a:ext cx="0" cy="0"/>
+          <a:chOff x="0" y="0"/>
+          <a:chExt cx="0" cy="0"/>
+        </a:xfrm>
+      </p:grpSpPr>
+      <p:sp>
+        <p:nvSpPr>
+          <p:cNvPr id="2" name="Text 0"/>
+          <p:cNvSpPr/>
+          <p:nvPr/>
+        </p:nvSpPr>
+        <p:spPr>
+          <a:xfrm>
+            <a:off x="411480" y="256032"/>
+            <a:ext cx="1828800" cy="228600"/>
+          </a:xfrm>
+          <a:prstGeom prst="rect">
+            <a:avLst/>
+          </a:prstGeom>
+          <a:noFill/>
+          <a:ln/>
+        </p:spPr>
+        <p:txBody>
+          <a:bodyPr wrap="square" lIns="0" tIns="0" rIns="0" bIns="0" rtlCol="0" anchor="ctr"/>
+          <a:lstStyle/>
+          <a:p>
+            <a:pPr marL="0" indent="0">
+              <a:buNone/>
+            </a:pPr>
+            <a:r>
+              <a:rPr lang="en-US" sz="900" kern="0" spc="600" dirty="0">
+                <a:solidFill>
+                  <a:srgbClr val="AAAAAA"/>
+                </a:solidFill>
+                <a:latin typeface="Calibri" pitchFamily="34" charset="0"/>
+                <a:ea typeface="Calibri" pitchFamily="34" charset="-122"/>
+                <a:cs typeface="Calibri" pitchFamily="34" charset="-120"/>
+              </a:rPr>
+              <a:t>VOXEN</a:t>
+            </a:r>
+            <a:endParaRPr lang="en-US" sz="900" dirty="0"/>
+          </a:p>
+        </p:txBody>
+      </p:sp>
+      <p:sp>
+        <p:nvSpPr>
+          <p:cNvPr id="3" name="Text 1"/>
+          <p:cNvSpPr/>
+          <p:nvPr/>
+        </p:nvSpPr>
+        <p:spPr>
+          <a:xfrm>
+            <a:off x="457200" y="640080"/>
+            <a:ext cx="8229600" cy="548640"/>
+          </a:xfrm>
+          <a:prstGeom prst="rect">
+            <a:avLst/>
+          </a:prstGeom>
+          <a:noFill/>
+          <a:ln/>
+        </p:spPr>
+        <p:txBody>
+          <a:bodyPr wrap="square" rtlCol="0" anchor="ctr"/>
+          <a:lstStyle/>
+          <a:p>
+            <a:pPr marL="0" indent="0">
+              <a:buNone/>
+            </a:pPr>
+            <a:r>
+              <a:rPr lang="en-US" sz="3200" dirty="0">
+                <a:solidFill>
+                  <a:srgbClr val="FFFFFF"/>
+                </a:solidFill>
+                <a:latin typeface="Calibri Light" pitchFamily="34" charset="0"/>
+                <a:ea typeface="Calibri Light" pitchFamily="34" charset="-122"/>
+                <a:cs typeface="Calibri Light" pitchFamily="34" charset="-120"/>
+              </a:rPr>
+              <a:t>Технологии</a:t>
+            </a:r>
+            <a:endParaRPr lang="en-US" sz="3200" dirty="0"/>
+          </a:p>
+        </p:txBody>
+      </p:sp>
+      <p:sp>
+        <p:nvSpPr>
+          <p:cNvPr id="4" name="Shape 2"/>
+          <p:cNvSpPr/>
+          <p:nvPr/>
+        </p:nvSpPr>
+        <p:spPr>
+          <a:xfrm>
+            <a:off x="365760" y="1508760"/>
+            <a:ext cx="4114800" cy="914400"/>
+          </a:xfrm>
+          <a:prstGeom prst="rect">
+            <a:avLst/>
+          </a:prstGeom>
+          <a:solidFill>
+            <a:srgbClr val="111111"/>
+          </a:solidFill>
+          <a:ln w="6350">
+            <a:solidFill>
+              <a:srgbClr val="333333"/>
+            </a:solidFill>
+            <a:prstDash val="solid"/>
+          </a:ln>
+          <a:effectLst>
+            <a:outerShdw blurRad="254000" dist="50800" dir="8100000" algn="bl" rotWithShape="0">
+              <a:srgbClr val="000000">
+                <a:alpha val="50000"/>
+              </a:srgbClr>
+            </a:outerShdw>
+          </a:effectLst>
+        </p:spPr>
+      </p:sp>
+      <p:sp>
+        <p:nvSpPr>
+          <p:cNvPr id="5" name="Text 3"/>
+          <p:cNvSpPr/>
+          <p:nvPr/>
+        </p:nvSpPr>
+        <p:spPr>
+          <a:xfrm>
+            <a:off x="594360" y="1627632"/>
+            <a:ext cx="3474720" cy="256032"/>
+          </a:xfrm>
+          <a:prstGeom prst="rect">
+            <a:avLst/>
+          </a:prstGeom>
+          <a:noFill/>
+          <a:ln/>
+        </p:spPr>
+        <p:txBody>
+          <a:bodyPr wrap="square" lIns="0" tIns="0" rIns="0" bIns="0" rtlCol="0" anchor="ctr"/>
+          <a:lstStyle/>
+          <a:p>
+            <a:pPr marL="0" indent="0">
+              <a:buNone/>
+            </a:pPr>
+            <a:r>
+              <a:rPr lang="en-US" sz="900" kern="0" spc="200" dirty="0">
+                <a:solidFill>
+                  <a:srgbClr val="666666"/>
+                </a:solidFill>
+                <a:latin typeface="Calibri" pitchFamily="34" charset="0"/>
+                <a:ea typeface="Calibri" pitchFamily="34" charset="-122"/>
+                <a:cs typeface="Calibri" pitchFamily="34" charset="-120"/>
+              </a:rPr>
+              <a:t>HARDWARE</a:t>
+            </a:r>
+            <a:endParaRPr lang="en-US" sz="900" dirty="0"/>
+          </a:p>
+        </p:txBody>
+      </p:sp>
+      <p:sp>
+        <p:nvSpPr>
+          <p:cNvPr id="6" name="Text 4"/>
+          <p:cNvSpPr/>
+          <p:nvPr/>
+        </p:nvSpPr>
+        <p:spPr>
+          <a:xfrm>
+            <a:off x="594360" y="1911096"/>
+            <a:ext cx="3657600" cy="384048"/>
+          </a:xfrm>
+          <a:prstGeom prst="rect">
+            <a:avLst/>
+          </a:prstGeom>
+          <a:noFill/>
+          <a:ln/>
+        </p:spPr>
+        <p:txBody>
+          <a:bodyPr wrap="square" lIns="0" tIns="0" rIns="0" bIns="0" rtlCol="0" anchor="ctr"/>
+          <a:lstStyle/>
+          <a:p>
+            <a:pPr marL="0" indent="0">
+              <a:buNone/>
+            </a:pPr>
+            <a:r>
+              <a:rPr lang="en-US" sz="1200" dirty="0">
+                <a:solidFill>
+                  <a:srgbClr val="FFFFFF"/>
+                </a:solidFill>
+                <a:latin typeface="Calibri Light" pitchFamily="34" charset="0"/>
+                <a:ea typeface="Calibri Light" pitchFamily="34" charset="-122"/>
+                <a:cs typeface="Calibri Light" pitchFamily="34" charset="-120"/>
+              </a:rPr>
+              <a:t>ESP32 · Raspberry Pi · Eye Tracker · </a:t>
+            </a:r>
+            <a:r>
+              <a:rPr lang="bg-BG" sz="1200" dirty="0">
+                <a:solidFill>
+                  <a:srgbClr val="FFFFFF"/>
+                </a:solidFill>
+                <a:latin typeface="Calibri Light" pitchFamily="34" charset="0"/>
+                <a:ea typeface="Calibri Light" pitchFamily="34" charset="-122"/>
+                <a:cs typeface="Calibri Light" pitchFamily="34" charset="-120"/>
+              </a:rPr>
+              <a:t>Акселерометър</a:t>
+            </a:r>
+            <a:endParaRPr lang="en-US" sz="1200" dirty="0"/>
+          </a:p>
+        </p:txBody>
+      </p:sp>
+      <p:sp>
+        <p:nvSpPr>
+          <p:cNvPr id="7" name="Shape 5"/>
+          <p:cNvSpPr/>
+          <p:nvPr/>
+        </p:nvSpPr>
+        <p:spPr>
+          <a:xfrm>
+            <a:off x="4754880" y="1508760"/>
+            <a:ext cx="4114800" cy="914400"/>
+          </a:xfrm>
+          <a:prstGeom prst="rect">
+            <a:avLst/>
+          </a:prstGeom>
+          <a:solidFill>
+            <a:srgbClr val="111111"/>
+          </a:solidFill>
+          <a:ln w="6350">
+            <a:solidFill>
+              <a:srgbClr val="333333"/>
+            </a:solidFill>
+            <a:prstDash val="solid"/>
+          </a:ln>
+          <a:effectLst>
+            <a:outerShdw blurRad="254000" dist="50800" dir="8100000" algn="bl" rotWithShape="0">
+              <a:srgbClr val="000000">
+                <a:alpha val="50000"/>
+              </a:srgbClr>
+            </a:outerShdw>
+          </a:effectLst>
+        </p:spPr>
+      </p:sp>
+      <p:sp>
+        <p:nvSpPr>
+          <p:cNvPr id="8" name="Text 6"/>
+          <p:cNvSpPr/>
+          <p:nvPr/>
+        </p:nvSpPr>
+        <p:spPr>
+          <a:xfrm>
+            <a:off x="4983480" y="1627632"/>
+            <a:ext cx="3474720" cy="256032"/>
+          </a:xfrm>
+          <a:prstGeom prst="rect">
+            <a:avLst/>
+          </a:prstGeom>
+          <a:noFill/>
+          <a:ln/>
+        </p:spPr>
+        <p:txBody>
+          <a:bodyPr wrap="square" lIns="0" tIns="0" rIns="0" bIns="0" rtlCol="0" anchor="ctr"/>
+          <a:lstStyle/>
+          <a:p>
+            <a:pPr marL="0" indent="0">
+              <a:buNone/>
+            </a:pPr>
+            <a:r>
+              <a:rPr lang="en-US" sz="900" kern="0" spc="200" dirty="0">
+                <a:solidFill>
+                  <a:srgbClr val="666666"/>
+                </a:solidFill>
+                <a:latin typeface="Calibri" pitchFamily="34" charset="0"/>
+                <a:ea typeface="Calibri" pitchFamily="34" charset="-122"/>
+                <a:cs typeface="Calibri" pitchFamily="34" charset="-120"/>
+              </a:rPr>
+              <a:t>ИИ / ML</a:t>
+            </a:r>
+            <a:endParaRPr lang="en-US" sz="900" dirty="0"/>
+          </a:p>
+        </p:txBody>
+      </p:sp>
+      <p:sp>
+        <p:nvSpPr>
+          <p:cNvPr id="9" name="Text 7"/>
+          <p:cNvSpPr/>
+          <p:nvPr/>
+        </p:nvSpPr>
+        <p:spPr>
+          <a:xfrm>
+            <a:off x="4983480" y="1911096"/>
+            <a:ext cx="3657600" cy="384048"/>
+          </a:xfrm>
+          <a:prstGeom prst="rect">
+            <a:avLst/>
+          </a:prstGeom>
+          <a:noFill/>
+          <a:ln/>
+        </p:spPr>
+        <p:txBody>
+          <a:bodyPr wrap="square" lIns="0" tIns="0" rIns="0" bIns="0" rtlCol="0" anchor="ctr"/>
+          <a:lstStyle/>
+          <a:p>
+            <a:pPr marL="0" indent="0">
+              <a:buNone/>
+            </a:pPr>
+            <a:r>
+              <a:rPr lang="en-US" sz="1200" dirty="0">
+                <a:solidFill>
+                  <a:srgbClr val="FFFFFF"/>
+                </a:solidFill>
+                <a:latin typeface="Calibri Light" pitchFamily="34" charset="0"/>
+                <a:ea typeface="Calibri Light" pitchFamily="34" charset="-122"/>
+                <a:cs typeface="Calibri Light" pitchFamily="34" charset="-120"/>
+              </a:rPr>
+              <a:t>distilGPT-2 · HuggingFace Transformers · Logit re-ranking</a:t>
+            </a:r>
+            <a:endParaRPr lang="en-US" sz="1200" dirty="0"/>
+          </a:p>
+        </p:txBody>
+      </p:sp>
+      <p:sp>
+        <p:nvSpPr>
+          <p:cNvPr id="10" name="Shape 8"/>
+          <p:cNvSpPr/>
+          <p:nvPr/>
+        </p:nvSpPr>
+        <p:spPr>
+          <a:xfrm>
+            <a:off x="365760" y="2606040"/>
+            <a:ext cx="4114800" cy="914400"/>
+          </a:xfrm>
+          <a:prstGeom prst="rect">
+            <a:avLst/>
+          </a:prstGeom>
+          <a:solidFill>
+            <a:srgbClr val="111111"/>
+          </a:solidFill>
+          <a:ln w="6350">
+            <a:solidFill>
+              <a:srgbClr val="333333"/>
+            </a:solidFill>
+            <a:prstDash val="solid"/>
+          </a:ln>
+          <a:effectLst>
+            <a:outerShdw blurRad="254000" dist="50800" dir="8100000" algn="bl" rotWithShape="0">
+              <a:srgbClr val="000000">
+                <a:alpha val="50000"/>
+              </a:srgbClr>
+            </a:outerShdw>
+          </a:effectLst>
+        </p:spPr>
+      </p:sp>
+      <p:sp>
+        <p:nvSpPr>
+          <p:cNvPr id="11" name="Text 9"/>
+          <p:cNvSpPr/>
+          <p:nvPr/>
+        </p:nvSpPr>
+        <p:spPr>
+          <a:xfrm>
+            <a:off x="594360" y="2724912"/>
+            <a:ext cx="3474720" cy="256032"/>
+          </a:xfrm>
+          <a:prstGeom prst="rect">
+            <a:avLst/>
+          </a:prstGeom>
+          <a:noFill/>
+          <a:ln/>
+        </p:spPr>
+        <p:txBody>
+          <a:bodyPr wrap="square" lIns="0" tIns="0" rIns="0" bIns="0" rtlCol="0" anchor="ctr"/>
+          <a:lstStyle/>
+          <a:p>
+            <a:pPr marL="0" indent="0">
+              <a:buNone/>
+            </a:pPr>
+            <a:r>
+              <a:rPr lang="en-US" sz="900" kern="0" spc="200" dirty="0">
+                <a:solidFill>
+                  <a:srgbClr val="666666"/>
+                </a:solidFill>
+                <a:latin typeface="Calibri" pitchFamily="34" charset="0"/>
+                <a:ea typeface="Calibri" pitchFamily="34" charset="-122"/>
+                <a:cs typeface="Calibri" pitchFamily="34" charset="-120"/>
+              </a:rPr>
+              <a:t>BACKEND</a:t>
+            </a:r>
+            <a:endParaRPr lang="en-US" sz="900" dirty="0"/>
+          </a:p>
+        </p:txBody>
+      </p:sp>
+      <p:sp>
+        <p:nvSpPr>
+          <p:cNvPr id="12" name="Text 10"/>
+          <p:cNvSpPr/>
+          <p:nvPr/>
+        </p:nvSpPr>
+        <p:spPr>
+          <a:xfrm>
+            <a:off x="594360" y="3008376"/>
+            <a:ext cx="3657600" cy="384048"/>
+          </a:xfrm>
+          <a:prstGeom prst="rect">
+            <a:avLst/>
+          </a:prstGeom>
+          <a:noFill/>
+          <a:ln/>
+        </p:spPr>
+        <p:txBody>
+          <a:bodyPr wrap="square" lIns="0" tIns="0" rIns="0" bIns="0" rtlCol="0" anchor="ctr"/>
+          <a:lstStyle/>
+          <a:p>
+            <a:pPr marL="0" indent="0">
+              <a:buNone/>
+            </a:pPr>
+            <a:r>
+              <a:rPr lang="en-US" sz="1200" dirty="0">
+                <a:solidFill>
+                  <a:srgbClr val="FFFFFF"/>
+                </a:solidFill>
+                <a:latin typeface="Calibri Light" pitchFamily="34" charset="0"/>
+                <a:ea typeface="Calibri Light" pitchFamily="34" charset="-122"/>
+                <a:cs typeface="Calibri Light" pitchFamily="34" charset="-120"/>
+              </a:rPr>
+              <a:t>FastAPI · Python · WebSockets · pymongo</a:t>
+            </a:r>
+            <a:endParaRPr lang="en-US" sz="1200" dirty="0"/>
+          </a:p>
+        </p:txBody>
+      </p:sp>
+      <p:sp>
+        <p:nvSpPr>
+          <p:cNvPr id="13" name="Shape 11"/>
+          <p:cNvSpPr/>
+          <p:nvPr/>
+        </p:nvSpPr>
+        <p:spPr>
+          <a:xfrm>
+            <a:off x="4754880" y="2606040"/>
+            <a:ext cx="4114800" cy="914400"/>
+          </a:xfrm>
+          <a:prstGeom prst="rect">
+            <a:avLst/>
+          </a:prstGeom>
+          <a:solidFill>
+            <a:srgbClr val="111111"/>
+          </a:solidFill>
+          <a:ln w="6350">
+            <a:solidFill>
+              <a:srgbClr val="333333"/>
+            </a:solidFill>
+            <a:prstDash val="solid"/>
+          </a:ln>
+          <a:effectLst>
+            <a:outerShdw blurRad="254000" dist="50800" dir="8100000" algn="bl" rotWithShape="0">
+              <a:srgbClr val="000000">
+                <a:alpha val="50000"/>
+              </a:srgbClr>
+            </a:outerShdw>
+          </a:effectLst>
+        </p:spPr>
+      </p:sp>
+      <p:sp>
+        <p:nvSpPr>
+          <p:cNvPr id="14" name="Text 12"/>
+          <p:cNvSpPr/>
+          <p:nvPr/>
+        </p:nvSpPr>
+        <p:spPr>
+          <a:xfrm>
+            <a:off x="4983480" y="2724912"/>
+            <a:ext cx="3474720" cy="256032"/>
+          </a:xfrm>
+          <a:prstGeom prst="rect">
+            <a:avLst/>
+          </a:prstGeom>
+          <a:noFill/>
+          <a:ln/>
+        </p:spPr>
+        <p:txBody>
+          <a:bodyPr wrap="square" lIns="0" tIns="0" rIns="0" bIns="0" rtlCol="0" anchor="ctr"/>
+          <a:lstStyle/>
+          <a:p>
+            <a:pPr marL="0" indent="0">
+              <a:buNone/>
+            </a:pPr>
+            <a:r>
+              <a:rPr lang="en-US" sz="900" kern="0" spc="200" dirty="0">
+                <a:solidFill>
+                  <a:srgbClr val="666666"/>
+                </a:solidFill>
+                <a:latin typeface="Calibri" pitchFamily="34" charset="0"/>
+                <a:ea typeface="Calibri" pitchFamily="34" charset="-122"/>
+                <a:cs typeface="Calibri" pitchFamily="34" charset="-120"/>
+              </a:rPr>
+              <a:t>БАЗА ДАННИ</a:t>
+            </a:r>
+            <a:endParaRPr lang="en-US" sz="900" dirty="0"/>
+          </a:p>
+        </p:txBody>
+      </p:sp>
+      <p:sp>
+        <p:nvSpPr>
+          <p:cNvPr id="15" name="Text 13"/>
+          <p:cNvSpPr/>
+          <p:nvPr/>
+        </p:nvSpPr>
+        <p:spPr>
+          <a:xfrm>
+            <a:off x="4983480" y="3008376"/>
+            <a:ext cx="3657600" cy="384048"/>
+          </a:xfrm>
+          <a:prstGeom prst="rect">
+            <a:avLst/>
+          </a:prstGeom>
+          <a:noFill/>
+          <a:ln/>
+        </p:spPr>
+        <p:txBody>
+          <a:bodyPr wrap="square" lIns="0" tIns="0" rIns="0" bIns="0" rtlCol="0" anchor="ctr"/>
+          <a:lstStyle/>
+          <a:p>
+            <a:pPr marL="0" indent="0">
+              <a:buNone/>
+            </a:pPr>
+            <a:r>
+              <a:rPr lang="en-US" sz="1200" dirty="0">
+                <a:solidFill>
+                  <a:srgbClr val="FFFFFF"/>
+                </a:solidFill>
+                <a:latin typeface="Calibri Light" pitchFamily="34" charset="0"/>
+                <a:ea typeface="Calibri Light" pitchFamily="34" charset="-122"/>
+                <a:cs typeface="Calibri Light" pitchFamily="34" charset="-120"/>
+              </a:rPr>
+              <a:t>MongoDB · Pydantic схеми · JSON персистиране</a:t>
+            </a:r>
+            <a:endParaRPr lang="en-US" sz="1200" dirty="0"/>
+          </a:p>
+        </p:txBody>
+      </p:sp>
+      <p:sp>
+        <p:nvSpPr>
+          <p:cNvPr id="16" name="Shape 14"/>
+          <p:cNvSpPr/>
+          <p:nvPr/>
+        </p:nvSpPr>
+        <p:spPr>
+          <a:xfrm>
+            <a:off x="365760" y="3703320"/>
+            <a:ext cx="4114800" cy="914400"/>
+          </a:xfrm>
+          <a:prstGeom prst="rect">
+            <a:avLst/>
+          </a:prstGeom>
+          <a:solidFill>
+            <a:srgbClr val="111111"/>
+          </a:solidFill>
+          <a:ln w="6350">
+            <a:solidFill>
+              <a:srgbClr val="333333"/>
+            </a:solidFill>
+            <a:prstDash val="solid"/>
+          </a:ln>
+          <a:effectLst>
+            <a:outerShdw blurRad="254000" dist="50800" dir="8100000" algn="bl" rotWithShape="0">
+              <a:srgbClr val="000000">
+                <a:alpha val="50000"/>
+              </a:srgbClr>
+            </a:outerShdw>
+          </a:effectLst>
+        </p:spPr>
+      </p:sp>
+      <p:sp>
+        <p:nvSpPr>
+          <p:cNvPr id="17" name="Text 15"/>
+          <p:cNvSpPr/>
+          <p:nvPr/>
+        </p:nvSpPr>
+        <p:spPr>
+          <a:xfrm>
+            <a:off x="594360" y="3822192"/>
+            <a:ext cx="3474720" cy="256032"/>
+          </a:xfrm>
+          <a:prstGeom prst="rect">
+            <a:avLst/>
+          </a:prstGeom>
+          <a:noFill/>
+          <a:ln/>
+        </p:spPr>
+        <p:txBody>
+          <a:bodyPr wrap="square" lIns="0" tIns="0" rIns="0" bIns="0" rtlCol="0" anchor="ctr"/>
+          <a:lstStyle/>
+          <a:p>
+            <a:pPr marL="0" indent="0">
+              <a:buNone/>
+            </a:pPr>
+            <a:r>
+              <a:rPr lang="en-US" sz="900" kern="0" spc="200" dirty="0">
+                <a:solidFill>
+                  <a:srgbClr val="666666"/>
+                </a:solidFill>
+                <a:latin typeface="Calibri" pitchFamily="34" charset="0"/>
+                <a:ea typeface="Calibri" pitchFamily="34" charset="-122"/>
+                <a:cs typeface="Calibri" pitchFamily="34" charset="-120"/>
+              </a:rPr>
+              <a:t>FRONTEND</a:t>
+            </a:r>
+            <a:endParaRPr lang="en-US" sz="900" dirty="0"/>
+          </a:p>
+        </p:txBody>
+      </p:sp>
+      <p:sp>
+        <p:nvSpPr>
+          <p:cNvPr id="18" name="Text 16"/>
+          <p:cNvSpPr/>
+          <p:nvPr/>
+        </p:nvSpPr>
+        <p:spPr>
+          <a:xfrm>
+            <a:off x="594360" y="4105656"/>
+            <a:ext cx="3657600" cy="384048"/>
+          </a:xfrm>
+          <a:prstGeom prst="rect">
+            <a:avLst/>
+          </a:prstGeom>
+          <a:noFill/>
+          <a:ln/>
+        </p:spPr>
+        <p:txBody>
+          <a:bodyPr wrap="square" lIns="0" tIns="0" rIns="0" bIns="0" rtlCol="0" anchor="ctr"/>
+          <a:lstStyle/>
+          <a:p>
+            <a:pPr marL="0" indent="0">
+              <a:buNone/>
+            </a:pPr>
+            <a:r>
+              <a:rPr lang="en-US" sz="1200" dirty="0">
+                <a:solidFill>
+                  <a:srgbClr val="FFFFFF"/>
+                </a:solidFill>
+                <a:latin typeface="Calibri Light" pitchFamily="34" charset="0"/>
+                <a:ea typeface="Calibri Light" pitchFamily="34" charset="-122"/>
+                <a:cs typeface="Calibri Light" pitchFamily="34" charset="-120"/>
+              </a:rPr>
+              <a:t>React · Vite · WebSocket hook</a:t>
+            </a:r>
+            <a:endParaRPr lang="en-US" sz="1200" dirty="0"/>
+          </a:p>
+        </p:txBody>
+      </p:sp>
+      <p:sp>
+        <p:nvSpPr>
+          <p:cNvPr id="19" name="Shape 17"/>
+          <p:cNvSpPr/>
+          <p:nvPr/>
+        </p:nvSpPr>
+        <p:spPr>
+          <a:xfrm>
+            <a:off x="4754880" y="3703320"/>
+            <a:ext cx="4114800" cy="914400"/>
+          </a:xfrm>
+          <a:prstGeom prst="rect">
+            <a:avLst/>
+          </a:prstGeom>
+          <a:solidFill>
+            <a:srgbClr val="111111"/>
+          </a:solidFill>
+          <a:ln w="6350">
+            <a:solidFill>
+              <a:srgbClr val="333333"/>
+            </a:solidFill>
+            <a:prstDash val="solid"/>
+          </a:ln>
+          <a:effectLst>
+            <a:outerShdw blurRad="254000" dist="50800" dir="8100000" algn="bl" rotWithShape="0">
+              <a:srgbClr val="000000">
+                <a:alpha val="50000"/>
+              </a:srgbClr>
+            </a:outerShdw>
+          </a:effectLst>
+        </p:spPr>
+      </p:sp>
+      <p:sp>
+        <p:nvSpPr>
+          <p:cNvPr id="20" name="Text 18"/>
+          <p:cNvSpPr/>
+          <p:nvPr/>
+        </p:nvSpPr>
+        <p:spPr>
+          <a:xfrm>
+            <a:off x="4983480" y="3822192"/>
+            <a:ext cx="3474720" cy="256032"/>
+          </a:xfrm>
+          <a:prstGeom prst="rect">
+            <a:avLst/>
+          </a:prstGeom>
+          <a:noFill/>
+          <a:ln/>
+        </p:spPr>
+        <p:txBody>
+          <a:bodyPr wrap="square" lIns="0" tIns="0" rIns="0" bIns="0" rtlCol="0" anchor="ctr"/>
+          <a:lstStyle/>
+          <a:p>
+            <a:pPr marL="0" indent="0">
+              <a:buNone/>
+            </a:pPr>
+            <a:r>
+              <a:rPr lang="en-US" sz="900" kern="0" spc="200" dirty="0">
+                <a:solidFill>
+                  <a:srgbClr val="666666"/>
+                </a:solidFill>
+                <a:latin typeface="Calibri" pitchFamily="34" charset="0"/>
+                <a:ea typeface="Calibri" pitchFamily="34" charset="-122"/>
+                <a:cs typeface="Calibri" pitchFamily="34" charset="-120"/>
+              </a:rPr>
+              <a:t>КОМУНИКАЦИЯ</a:t>
+            </a:r>
+            <a:endParaRPr lang="en-US" sz="900" dirty="0"/>
+          </a:p>
+        </p:txBody>
+      </p:sp>
+      <p:sp>
+        <p:nvSpPr>
+          <p:cNvPr id="21" name="Text 19"/>
+          <p:cNvSpPr/>
+          <p:nvPr/>
+        </p:nvSpPr>
+        <p:spPr>
+          <a:xfrm>
+            <a:off x="4983480" y="4105656"/>
+            <a:ext cx="3657600" cy="384048"/>
+          </a:xfrm>
+          <a:prstGeom prst="rect">
+            <a:avLst/>
+          </a:prstGeom>
+          <a:noFill/>
+          <a:ln/>
+        </p:spPr>
+        <p:txBody>
+          <a:bodyPr wrap="square" lIns="0" tIns="0" rIns="0" bIns="0" rtlCol="0" anchor="ctr"/>
+          <a:lstStyle/>
+          <a:p>
+            <a:pPr marL="0" indent="0">
+              <a:buNone/>
+            </a:pPr>
+            <a:r>
+              <a:rPr lang="en-US" sz="1200" dirty="0">
+                <a:solidFill>
+                  <a:srgbClr val="FFFFFF"/>
+                </a:solidFill>
+                <a:latin typeface="Calibri Light" pitchFamily="34" charset="0"/>
+                <a:ea typeface="Calibri Light" pitchFamily="34" charset="-122"/>
+                <a:cs typeface="Calibri Light" pitchFamily="34" charset="-120"/>
+              </a:rPr>
+              <a:t>ESP32 WebSocket сървър · Serial / WiFi</a:t>
+            </a:r>
+            <a:endParaRPr lang="en-US" sz="1200" dirty="0"/>
+          </a:p>
+        </p:txBody>
+      </p:sp>
+    </p:spTree>
+  </p:cSld>
+  <p:clrMapOvr>
+    <a:masterClrMapping/>
+  </p:clrMapOvr>
+  <mc:AlternateContent xmlns:mc="http://schemas.openxmlformats.org/markup-compatibility/2006" xmlns:p159="http://schemas.microsoft.com/office/powerpoint/2015/09/main">
+    <mc:Choice Requires="p159">
+      <p:transition xmlns:p14="http://schemas.microsoft.com/office/powerpoint/2010/main" spd="slow" p14:dur="2000">
+        <p159:morph option="byObject"/>
+      </p:transition>
+    </mc:Choice>
+    <mc:Fallback xmlns="">
+      <p:transition spd="slow">
+        <p:fade/>
+      </p:transition>
+    </mc:Fallback>
+  </mc:AlternateContent>
+</p:sld>
+</file>
+
+<file path=ppt/slides/slide11.xml><?xml version="1.0" encoding="utf-8"?>
+<p:sld xmlns:a="http://schemas.openxmlformats.org/drawingml/2006/main" xmlns:r="http://schemas.openxmlformats.org/officeDocument/2006/relationships" xmlns:p="http://schemas.openxmlformats.org/presentationml/2006/main">
   <p:cSld name="Slide 8">
     <p:bg>
       <p:bgPr>
@@ -3045,134 +3754,6 @@
       </p:transition>
     </mc:Choice>
     <mc:Fallback xmlns="">
-      <p:transition spd="slow">
-        <p:fade/>
-      </p:transition>
-    </mc:Fallback>
-  </mc:AlternateContent>
-</p:sld>
-</file>
-
-<file path=ppt/slides/slide11.xml><?xml version="1.0" encoding="utf-8"?>
-<p:sld xmlns:a="http://schemas.openxmlformats.org/drawingml/2006/main" xmlns:r="http://schemas.openxmlformats.org/officeDocument/2006/relationships" xmlns:p="http://schemas.openxmlformats.org/presentationml/2006/main">
-  <p:cSld>
-    <p:bg>
-      <p:bgPr>
-        <a:solidFill>
-          <a:srgbClr val="080808"/>
-        </a:solidFill>
-        <a:effectLst/>
-      </p:bgPr>
-    </p:bg>
-    <p:spTree>
-      <p:nvGrpSpPr>
-        <p:cNvPr id="1" name=""/>
-        <p:cNvGrpSpPr/>
-        <p:nvPr/>
-      </p:nvGrpSpPr>
-      <p:grpSpPr>
-        <a:xfrm>
-          <a:off x="0" y="0"/>
-          <a:ext cx="0" cy="0"/>
-          <a:chOff x="0" y="0"/>
-          <a:chExt cx="0" cy="0"/>
-        </a:xfrm>
-      </p:grpSpPr>
-      <p:sp>
-        <p:nvSpPr>
-          <p:cNvPr id="2" name="Text 0"/>
-          <p:cNvSpPr/>
-          <p:nvPr/>
-        </p:nvSpPr>
-        <p:spPr>
-          <a:xfrm>
-            <a:off x="411480" y="256032"/>
-            <a:ext cx="1828800" cy="228600"/>
-          </a:xfrm>
-          <a:prstGeom prst="rect">
-            <a:avLst/>
-          </a:prstGeom>
-          <a:noFill/>
-          <a:ln/>
-        </p:spPr>
-        <p:txBody>
-          <a:bodyPr wrap="square" lIns="0" tIns="0" rIns="0" bIns="0" rtlCol="0" anchor="ctr"/>
-          <a:lstStyle/>
-          <a:p>
-            <a:pPr marL="0" indent="0">
-              <a:buNone/>
-            </a:pPr>
-            <a:r>
-              <a:rPr lang="en-US" sz="900" kern="0" spc="600" dirty="0">
-                <a:solidFill>
-                  <a:srgbClr val="AAAAAA"/>
-                </a:solidFill>
-                <a:latin typeface="Calibri" pitchFamily="34" charset="0"/>
-                <a:ea typeface="Calibri" pitchFamily="34" charset="-122"/>
-                <a:cs typeface="Calibri" pitchFamily="34" charset="-120"/>
-              </a:rPr>
-              <a:t>VOXEN</a:t>
-            </a:r>
-            <a:endParaRPr lang="en-US" sz="900" dirty="0"/>
-          </a:p>
-        </p:txBody>
-      </p:sp>
-      <p:sp>
-        <p:nvSpPr>
-          <p:cNvPr id="3" name="Text 1"/>
-          <p:cNvSpPr/>
-          <p:nvPr/>
-        </p:nvSpPr>
-        <p:spPr>
-          <a:xfrm>
-            <a:off x="115200" y="2068830"/>
-            <a:ext cx="9144000" cy="1005840"/>
-          </a:xfrm>
-          <a:prstGeom prst="rect">
-            <a:avLst/>
-          </a:prstGeom>
-          <a:noFill/>
-          <a:ln/>
-        </p:spPr>
-        <p:txBody>
-          <a:bodyPr wrap="square" rtlCol="0" anchor="ctr"/>
-          <a:lstStyle/>
-          <a:p>
-            <a:pPr marL="0" indent="0" algn="ctr">
-              <a:buNone/>
-            </a:pPr>
-            <a:r>
-              <a:rPr lang="ru-RU" sz="4800" kern="0" spc="1200" dirty="0">
-                <a:solidFill>
-                  <a:srgbClr val="FFFFFF"/>
-                </a:solidFill>
-                <a:latin typeface="Calibri Light" pitchFamily="34" charset="0"/>
-                <a:ea typeface="Calibri Light" pitchFamily="34" charset="-122"/>
-                <a:cs typeface="Calibri Light" pitchFamily="34" charset="-120"/>
-              </a:rPr>
-              <a:t>Какви проблеми срещнахме?</a:t>
-            </a:r>
-            <a:endParaRPr lang="en-US" sz="4800" dirty="0"/>
-          </a:p>
-        </p:txBody>
-      </p:sp>
-    </p:spTree>
-    <p:extLst>
-      <p:ext uri="{BB962C8B-B14F-4D97-AF65-F5344CB8AC3E}">
-        <p14:creationId xmlns:p14="http://schemas.microsoft.com/office/powerpoint/2010/main" val="1121998241"/>
-      </p:ext>
-    </p:extLst>
-  </p:cSld>
-  <p:clrMapOvr>
-    <a:masterClrMapping/>
-  </p:clrMapOvr>
-  <mc:AlternateContent xmlns:mc="http://schemas.openxmlformats.org/markup-compatibility/2006">
-    <mc:Choice xmlns:p159="http://schemas.microsoft.com/office/powerpoint/2015/09/main" Requires="p159">
-      <p:transition xmlns:p14="http://schemas.microsoft.com/office/powerpoint/2010/main" spd="slow" p14:dur="2000">
-        <p159:morph option="byObject"/>
-      </p:transition>
-    </mc:Choice>
-    <mc:Fallback>
       <p:transition spd="slow">
         <p:fade/>
       </p:transition>
@@ -3617,402 +4198,6 @@
     <p:extLst>
       <p:ext uri="{BB962C8B-B14F-4D97-AF65-F5344CB8AC3E}">
         <p14:creationId xmlns:p14="http://schemas.microsoft.com/office/powerpoint/2010/main" val="47465724"/>
-      </p:ext>
-    </p:extLst>
-  </p:cSld>
-  <p:clrMapOvr>
-    <a:masterClrMapping/>
-  </p:clrMapOvr>
-  <mc:AlternateContent xmlns:mc="http://schemas.openxmlformats.org/markup-compatibility/2006" xmlns:p159="http://schemas.microsoft.com/office/powerpoint/2015/09/main">
-    <mc:Choice Requires="p159">
-      <p:transition xmlns:p14="http://schemas.microsoft.com/office/powerpoint/2010/main" spd="slow" p14:dur="2000">
-        <p159:morph option="byObject"/>
-      </p:transition>
-    </mc:Choice>
-    <mc:Fallback xmlns="">
-      <p:transition spd="slow">
-        <p:fade/>
-      </p:transition>
-    </mc:Fallback>
-  </mc:AlternateContent>
-</p:sld>
-</file>
-
-<file path=ppt/slides/slide13.xml><?xml version="1.0" encoding="utf-8"?>
-<p:sld xmlns:a="http://schemas.openxmlformats.org/drawingml/2006/main" xmlns:r="http://schemas.openxmlformats.org/officeDocument/2006/relationships" xmlns:p="http://schemas.openxmlformats.org/presentationml/2006/main">
-  <p:cSld>
-    <p:bg>
-      <p:bgPr>
-        <a:solidFill>
-          <a:srgbClr val="080808"/>
-        </a:solidFill>
-        <a:effectLst/>
-      </p:bgPr>
-    </p:bg>
-    <p:spTree>
-      <p:nvGrpSpPr>
-        <p:cNvPr id="1" name=""/>
-        <p:cNvGrpSpPr/>
-        <p:nvPr/>
-      </p:nvGrpSpPr>
-      <p:grpSpPr>
-        <a:xfrm>
-          <a:off x="0" y="0"/>
-          <a:ext cx="0" cy="0"/>
-          <a:chOff x="0" y="0"/>
-          <a:chExt cx="0" cy="0"/>
-        </a:xfrm>
-      </p:grpSpPr>
-      <p:sp>
-        <p:nvSpPr>
-          <p:cNvPr id="2" name="Text 0"/>
-          <p:cNvSpPr/>
-          <p:nvPr/>
-        </p:nvSpPr>
-        <p:spPr>
-          <a:xfrm>
-            <a:off x="411480" y="256032"/>
-            <a:ext cx="1828800" cy="228600"/>
-          </a:xfrm>
-          <a:prstGeom prst="rect">
-            <a:avLst/>
-          </a:prstGeom>
-          <a:noFill/>
-          <a:ln/>
-        </p:spPr>
-        <p:txBody>
-          <a:bodyPr wrap="square" lIns="0" tIns="0" rIns="0" bIns="0" rtlCol="0" anchor="ctr"/>
-          <a:lstStyle/>
-          <a:p>
-            <a:pPr marL="0" indent="0">
-              <a:buNone/>
-            </a:pPr>
-            <a:r>
-              <a:rPr lang="en-US" sz="900" kern="0" spc="600" dirty="0">
-                <a:solidFill>
-                  <a:srgbClr val="AAAAAA"/>
-                </a:solidFill>
-                <a:latin typeface="Calibri" pitchFamily="34" charset="0"/>
-                <a:ea typeface="Calibri" pitchFamily="34" charset="-122"/>
-                <a:cs typeface="Calibri" pitchFamily="34" charset="-120"/>
-              </a:rPr>
-              <a:t>VOXEN</a:t>
-            </a:r>
-            <a:endParaRPr lang="en-US" sz="900" dirty="0"/>
-          </a:p>
-        </p:txBody>
-      </p:sp>
-      <p:sp>
-        <p:nvSpPr>
-          <p:cNvPr id="3" name="Text 1"/>
-          <p:cNvSpPr/>
-          <p:nvPr/>
-        </p:nvSpPr>
-        <p:spPr>
-          <a:xfrm>
-            <a:off x="457200" y="640080"/>
-            <a:ext cx="8229600" cy="548640"/>
-          </a:xfrm>
-          <a:prstGeom prst="rect">
-            <a:avLst/>
-          </a:prstGeom>
-          <a:noFill/>
-          <a:ln/>
-        </p:spPr>
-        <p:txBody>
-          <a:bodyPr wrap="square" rtlCol="0" anchor="ctr"/>
-          <a:lstStyle/>
-          <a:p>
-            <a:pPr marL="0" indent="0">
-              <a:buNone/>
-            </a:pPr>
-            <a:r>
-              <a:rPr lang="bg-BG" sz="3200" dirty="0">
-                <a:solidFill>
-                  <a:srgbClr val="FFFFFF"/>
-                </a:solidFill>
-                <a:latin typeface="Calibri Light" pitchFamily="34" charset="0"/>
-                <a:ea typeface="Calibri Light" pitchFamily="34" charset="-122"/>
-                <a:cs typeface="Calibri Light" pitchFamily="34" charset="-120"/>
-              </a:rPr>
-              <a:t>Нашето преживяване</a:t>
-            </a:r>
-            <a:endParaRPr lang="en-US" sz="3200" dirty="0"/>
-          </a:p>
-        </p:txBody>
-      </p:sp>
-      <p:sp>
-        <p:nvSpPr>
-          <p:cNvPr id="4" name="Shape 2"/>
-          <p:cNvSpPr/>
-          <p:nvPr/>
-        </p:nvSpPr>
-        <p:spPr>
-          <a:xfrm>
-            <a:off x="365760" y="1508760"/>
-            <a:ext cx="7604640" cy="914400"/>
-          </a:xfrm>
-          <a:prstGeom prst="rect">
-            <a:avLst/>
-          </a:prstGeom>
-          <a:solidFill>
-            <a:srgbClr val="111111"/>
-          </a:solidFill>
-          <a:ln w="6350">
-            <a:solidFill>
-              <a:srgbClr val="333333"/>
-            </a:solidFill>
-            <a:prstDash val="solid"/>
-          </a:ln>
-          <a:effectLst>
-            <a:outerShdw blurRad="254000" dist="50800" dir="8100000" algn="bl" rotWithShape="0">
-              <a:srgbClr val="000000">
-                <a:alpha val="50000"/>
-              </a:srgbClr>
-            </a:outerShdw>
-          </a:effectLst>
-        </p:spPr>
-      </p:sp>
-      <p:sp>
-        <p:nvSpPr>
-          <p:cNvPr id="6" name="Text 4"/>
-          <p:cNvSpPr/>
-          <p:nvPr/>
-        </p:nvSpPr>
-        <p:spPr>
-          <a:xfrm>
-            <a:off x="594360" y="1773936"/>
-            <a:ext cx="3657600" cy="384048"/>
-          </a:xfrm>
-          <a:prstGeom prst="rect">
-            <a:avLst/>
-          </a:prstGeom>
-          <a:noFill/>
-          <a:ln/>
-        </p:spPr>
-        <p:txBody>
-          <a:bodyPr wrap="square" lIns="0" tIns="0" rIns="0" bIns="0" rtlCol="0" anchor="ctr"/>
-          <a:lstStyle/>
-          <a:p>
-            <a:pPr marL="0" indent="0">
-              <a:buNone/>
-            </a:pPr>
-            <a:r>
-              <a:rPr lang="bg-BG" sz="1600" dirty="0">
-                <a:solidFill>
-                  <a:srgbClr val="FFFFFF"/>
-                </a:solidFill>
-                <a:latin typeface="Calibri Light" pitchFamily="34" charset="0"/>
-                <a:ea typeface="Calibri Light" pitchFamily="34" charset="-122"/>
-                <a:cs typeface="Calibri Light" pitchFamily="34" charset="-120"/>
-              </a:rPr>
-              <a:t>Нашият</a:t>
-            </a:r>
-            <a:r>
-              <a:rPr lang="bg-BG" sz="1200" dirty="0">
-                <a:solidFill>
-                  <a:srgbClr val="FFFFFF"/>
-                </a:solidFill>
-                <a:latin typeface="Calibri Light" pitchFamily="34" charset="0"/>
-                <a:ea typeface="Calibri Light" pitchFamily="34" charset="-122"/>
-                <a:cs typeface="Calibri Light" pitchFamily="34" charset="-120"/>
-              </a:rPr>
-              <a:t> </a:t>
-            </a:r>
-            <a:r>
-              <a:rPr lang="bg-BG" sz="1600" dirty="0">
-                <a:solidFill>
-                  <a:srgbClr val="FFFFFF"/>
-                </a:solidFill>
-                <a:latin typeface="Calibri Light" pitchFamily="34" charset="0"/>
-                <a:ea typeface="Calibri Light" pitchFamily="34" charset="-122"/>
-                <a:cs typeface="Calibri Light" pitchFamily="34" charset="-120"/>
-              </a:rPr>
-              <a:t>екип</a:t>
-            </a:r>
-            <a:endParaRPr lang="en-US" sz="1200" dirty="0"/>
-          </a:p>
-        </p:txBody>
-      </p:sp>
-      <p:sp>
-        <p:nvSpPr>
-          <p:cNvPr id="10" name="Shape 8"/>
-          <p:cNvSpPr/>
-          <p:nvPr/>
-        </p:nvSpPr>
-        <p:spPr>
-          <a:xfrm>
-            <a:off x="365760" y="2606040"/>
-            <a:ext cx="7604640" cy="914400"/>
-          </a:xfrm>
-          <a:prstGeom prst="rect">
-            <a:avLst/>
-          </a:prstGeom>
-          <a:solidFill>
-            <a:srgbClr val="111111"/>
-          </a:solidFill>
-          <a:ln w="6350">
-            <a:solidFill>
-              <a:srgbClr val="333333"/>
-            </a:solidFill>
-            <a:prstDash val="solid"/>
-          </a:ln>
-          <a:effectLst>
-            <a:outerShdw blurRad="254000" dist="50800" dir="8100000" algn="bl" rotWithShape="0">
-              <a:srgbClr val="000000">
-                <a:alpha val="50000"/>
-              </a:srgbClr>
-            </a:outerShdw>
-          </a:effectLst>
-        </p:spPr>
-      </p:sp>
-      <p:sp>
-        <p:nvSpPr>
-          <p:cNvPr id="16" name="Shape 14"/>
-          <p:cNvSpPr/>
-          <p:nvPr/>
-        </p:nvSpPr>
-        <p:spPr>
-          <a:xfrm>
-            <a:off x="365760" y="3703320"/>
-            <a:ext cx="7604640" cy="914400"/>
-          </a:xfrm>
-          <a:prstGeom prst="rect">
-            <a:avLst/>
-          </a:prstGeom>
-          <a:solidFill>
-            <a:srgbClr val="111111"/>
-          </a:solidFill>
-          <a:ln w="6350">
-            <a:solidFill>
-              <a:srgbClr val="333333"/>
-            </a:solidFill>
-            <a:prstDash val="solid"/>
-          </a:ln>
-          <a:effectLst>
-            <a:outerShdw blurRad="254000" dist="50800" dir="8100000" algn="bl" rotWithShape="0">
-              <a:srgbClr val="000000">
-                <a:alpha val="50000"/>
-              </a:srgbClr>
-            </a:outerShdw>
-          </a:effectLst>
-        </p:spPr>
-      </p:sp>
-      <p:sp>
-        <p:nvSpPr>
-          <p:cNvPr id="24" name="Text 4">
-            <a:extLst>
-              <a:ext uri="{FF2B5EF4-FFF2-40B4-BE49-F238E27FC236}">
-                <a16:creationId xmlns:a16="http://schemas.microsoft.com/office/drawing/2014/main" id="{41B73BD6-4770-47B1-9DF2-B93FA451A3D8}"/>
-              </a:ext>
-            </a:extLst>
-          </p:cNvPr>
-          <p:cNvSpPr/>
-          <p:nvPr/>
-        </p:nvSpPr>
-        <p:spPr>
-          <a:xfrm>
-            <a:off x="595440" y="2871216"/>
-            <a:ext cx="3657600" cy="384048"/>
-          </a:xfrm>
-          <a:prstGeom prst="rect">
-            <a:avLst/>
-          </a:prstGeom>
-          <a:noFill/>
-          <a:ln/>
-        </p:spPr>
-        <p:txBody>
-          <a:bodyPr wrap="square" lIns="0" tIns="0" rIns="0" bIns="0" rtlCol="0" anchor="ctr"/>
-          <a:lstStyle/>
-          <a:p>
-            <a:pPr marL="0" indent="0">
-              <a:buNone/>
-            </a:pPr>
-            <a:r>
-              <a:rPr lang="bg-BG" sz="1600" dirty="0">
-                <a:solidFill>
-                  <a:srgbClr val="FFFFFF"/>
-                </a:solidFill>
-                <a:latin typeface="Calibri Light" pitchFamily="34" charset="0"/>
-                <a:ea typeface="Calibri Light" pitchFamily="34" charset="-122"/>
-                <a:cs typeface="Calibri Light" pitchFamily="34" charset="-120"/>
-              </a:rPr>
-              <a:t>Нашият</a:t>
-            </a:r>
-            <a:r>
-              <a:rPr lang="bg-BG" sz="1200" dirty="0">
-                <a:solidFill>
-                  <a:srgbClr val="FFFFFF"/>
-                </a:solidFill>
-                <a:latin typeface="Calibri Light" pitchFamily="34" charset="0"/>
-                <a:ea typeface="Calibri Light" pitchFamily="34" charset="-122"/>
-                <a:cs typeface="Calibri Light" pitchFamily="34" charset="-120"/>
-              </a:rPr>
-              <a:t> </a:t>
-            </a:r>
-            <a:r>
-              <a:rPr lang="bg-BG" sz="1600" dirty="0">
-                <a:solidFill>
-                  <a:srgbClr val="FFFFFF"/>
-                </a:solidFill>
-                <a:latin typeface="Calibri Light" pitchFamily="34" charset="0"/>
-                <a:ea typeface="Calibri Light" pitchFamily="34" charset="-122"/>
-                <a:cs typeface="Calibri Light" pitchFamily="34" charset="-120"/>
-              </a:rPr>
-              <a:t>ментор</a:t>
-            </a:r>
-            <a:endParaRPr lang="en-US" sz="1200" dirty="0"/>
-          </a:p>
-        </p:txBody>
-      </p:sp>
-      <p:sp>
-        <p:nvSpPr>
-          <p:cNvPr id="25" name="Text 4">
-            <a:extLst>
-              <a:ext uri="{FF2B5EF4-FFF2-40B4-BE49-F238E27FC236}">
-                <a16:creationId xmlns:a16="http://schemas.microsoft.com/office/drawing/2014/main" id="{D8E4D1EB-1760-4AE8-9AA1-7242B1DD8B1F}"/>
-              </a:ext>
-            </a:extLst>
-          </p:cNvPr>
-          <p:cNvSpPr/>
-          <p:nvPr/>
-        </p:nvSpPr>
-        <p:spPr>
-          <a:xfrm>
-            <a:off x="595440" y="3968496"/>
-            <a:ext cx="3657600" cy="384048"/>
-          </a:xfrm>
-          <a:prstGeom prst="rect">
-            <a:avLst/>
-          </a:prstGeom>
-          <a:noFill/>
-          <a:ln/>
-        </p:spPr>
-        <p:txBody>
-          <a:bodyPr wrap="square" lIns="0" tIns="0" rIns="0" bIns="0" rtlCol="0" anchor="ctr"/>
-          <a:lstStyle/>
-          <a:p>
-            <a:pPr marL="0" indent="0">
-              <a:buNone/>
-            </a:pPr>
-            <a:r>
-              <a:rPr lang="bg-BG" sz="1600" dirty="0">
-                <a:solidFill>
-                  <a:srgbClr val="FFFFFF"/>
-                </a:solidFill>
-                <a:latin typeface="Calibri Light" pitchFamily="34" charset="0"/>
-                <a:ea typeface="Calibri Light" pitchFamily="34" charset="-122"/>
-                <a:cs typeface="Calibri Light" pitchFamily="34" charset="-120"/>
-              </a:rPr>
-              <a:t>Какво научихме от Хакатона</a:t>
-            </a:r>
-          </a:p>
-        </p:txBody>
-      </p:sp>
-    </p:spTree>
-    <p:extLst>
-      <p:ext uri="{BB962C8B-B14F-4D97-AF65-F5344CB8AC3E}">
-        <p14:creationId xmlns:p14="http://schemas.microsoft.com/office/powerpoint/2010/main" val="3273361211"/>
       </p:ext>
     </p:extLst>
   </p:cSld>
@@ -4255,7 +4440,7 @@
         </p:nvSpPr>
         <p:spPr>
           <a:xfrm>
-            <a:off x="658368" y="2404872"/>
+            <a:off x="658368" y="2512872"/>
             <a:ext cx="64008" cy="64008"/>
           </a:xfrm>
           <a:prstGeom prst="ellipse">
@@ -4280,7 +4465,7 @@
         </p:nvSpPr>
         <p:spPr>
           <a:xfrm>
-            <a:off x="822960" y="2252232"/>
+            <a:off x="822960" y="2425032"/>
             <a:ext cx="3200400" cy="411480"/>
           </a:xfrm>
           <a:prstGeom prst="rect">
@@ -4352,7 +4537,7 @@
         </p:nvSpPr>
         <p:spPr>
           <a:xfrm>
-            <a:off x="658368" y="2916936"/>
+            <a:off x="658368" y="3039336"/>
             <a:ext cx="64008" cy="64008"/>
           </a:xfrm>
           <a:prstGeom prst="ellipse">
@@ -4377,7 +4562,7 @@
         </p:nvSpPr>
         <p:spPr>
           <a:xfrm>
-            <a:off x="822960" y="2775204"/>
+            <a:off x="822960" y="2948004"/>
             <a:ext cx="3200400" cy="411480"/>
           </a:xfrm>
           <a:prstGeom prst="rect">
@@ -4410,13 +4595,13 @@
       </p:sp>
       <p:sp>
         <p:nvSpPr>
-          <p:cNvPr id="11" name="Shape 9"/>
-          <p:cNvSpPr/>
-          <p:nvPr/>
-        </p:nvSpPr>
-        <p:spPr>
-          <a:xfrm>
-            <a:off x="658368" y="3429000"/>
+          <p:cNvPr id="13" name="Shape 11"/>
+          <p:cNvSpPr/>
+          <p:nvPr/>
+        </p:nvSpPr>
+        <p:spPr>
+          <a:xfrm>
+            <a:off x="658368" y="3617064"/>
             <a:ext cx="64008" cy="64008"/>
           </a:xfrm>
           <a:prstGeom prst="ellipse">
@@ -4435,77 +4620,13 @@
       </p:sp>
       <p:sp>
         <p:nvSpPr>
-          <p:cNvPr id="12" name="Text 10"/>
-          <p:cNvSpPr/>
-          <p:nvPr/>
-        </p:nvSpPr>
-        <p:spPr>
-          <a:xfrm>
-            <a:off x="822960" y="3265092"/>
-            <a:ext cx="3200400" cy="411480"/>
-          </a:xfrm>
-          <a:prstGeom prst="rect">
-            <a:avLst/>
-          </a:prstGeom>
-          <a:noFill/>
-          <a:ln/>
-        </p:spPr>
-        <p:txBody>
-          <a:bodyPr wrap="square" rtlCol="0" anchor="ctr"/>
-          <a:lstStyle/>
-          <a:p>
-            <a:pPr marL="0" indent="0">
-              <a:buNone/>
-            </a:pPr>
-            <a:r>
-              <a:rPr lang="en-US" sz="1200" dirty="0">
-                <a:solidFill>
-                  <a:srgbClr val="E8E8E8"/>
-                </a:solidFill>
-                <a:latin typeface="Calibri Light" pitchFamily="34" charset="0"/>
-                <a:ea typeface="Calibri Light" pitchFamily="34" charset="-122"/>
-                <a:cs typeface="Calibri Light" pitchFamily="34" charset="-120"/>
-              </a:rPr>
-              <a:t>Цената на AAC устройствата достига 8,000+ €</a:t>
-            </a:r>
-            <a:endParaRPr lang="en-US" sz="1200" dirty="0"/>
-          </a:p>
-        </p:txBody>
-      </p:sp>
-      <p:sp>
-        <p:nvSpPr>
-          <p:cNvPr id="13" name="Shape 11"/>
-          <p:cNvSpPr/>
-          <p:nvPr/>
-        </p:nvSpPr>
-        <p:spPr>
-          <a:xfrm>
-            <a:off x="658368" y="3941064"/>
-            <a:ext cx="64008" cy="64008"/>
-          </a:xfrm>
-          <a:prstGeom prst="ellipse">
-            <a:avLst/>
-          </a:prstGeom>
-          <a:solidFill>
-            <a:srgbClr val="444444"/>
-          </a:solidFill>
-          <a:ln w="12700">
-            <a:solidFill>
-              <a:srgbClr val="444444"/>
-            </a:solidFill>
-            <a:prstDash val="solid"/>
-          </a:ln>
-        </p:spPr>
-      </p:sp>
-      <p:sp>
-        <p:nvSpPr>
           <p:cNvPr id="14" name="Text 12"/>
           <p:cNvSpPr/>
           <p:nvPr/>
         </p:nvSpPr>
         <p:spPr>
           <a:xfrm>
-            <a:off x="828108" y="3780360"/>
+            <a:off x="828108" y="3434760"/>
             <a:ext cx="3200400" cy="411480"/>
           </a:xfrm>
           <a:prstGeom prst="rect">
@@ -4672,7 +4793,7 @@
                 <a:ea typeface="Calibri" pitchFamily="34" charset="-122"/>
                 <a:cs typeface="Calibri" pitchFamily="34" charset="-120"/>
               </a:rPr>
-              <a:t>Tobii Dynavox</a:t>
+              <a:t>EZ Keys</a:t>
             </a:r>
             <a:endParaRPr lang="en-US" sz="1200" dirty="0"/>
           </a:p>
@@ -4703,7 +4824,7 @@
               <a:buNone/>
             </a:pPr>
             <a:r>
-              <a:rPr lang="en-US" sz="1000" dirty="0">
+              <a:rPr lang="bg-BG" sz="1000" dirty="0">
                 <a:solidFill>
                   <a:srgbClr val="666666"/>
                 </a:solidFill>
@@ -4711,7 +4832,7 @@
                 <a:ea typeface="Calibri Light" pitchFamily="34" charset="-122"/>
                 <a:cs typeface="Calibri Light" pitchFamily="34" charset="-120"/>
               </a:rPr>
-              <a:t>Скъпо, тромаво, без ИИ</a:t>
+              <a:t>Старо и базово</a:t>
             </a:r>
             <a:endParaRPr lang="en-US" sz="1000" dirty="0"/>
           </a:p>
@@ -4782,7 +4903,7 @@
                 <a:ea typeface="Calibri" pitchFamily="34" charset="-122"/>
                 <a:cs typeface="Calibri" pitchFamily="34" charset="-120"/>
               </a:rPr>
-              <a:t>Eye Gaze Tech</a:t>
+              <a:t>ACAT</a:t>
             </a:r>
             <a:endParaRPr lang="en-US" sz="1200" dirty="0"/>
           </a:p>
@@ -4813,7 +4934,7 @@
               <a:buNone/>
             </a:pPr>
             <a:r>
-              <a:rPr lang="en-US" sz="1000" dirty="0">
+              <a:rPr lang="bg-BG" sz="1000" dirty="0">
                 <a:solidFill>
                   <a:srgbClr val="666666"/>
                 </a:solidFill>
@@ -4821,7 +4942,18 @@
                 <a:ea typeface="Calibri Light" pitchFamily="34" charset="-122"/>
                 <a:cs typeface="Calibri Light" pitchFamily="34" charset="-120"/>
               </a:rPr>
-              <a:t>Само следи поглед</a:t>
+              <a:t>Сложен </a:t>
+            </a:r>
+            <a:r>
+              <a:rPr lang="en-US" sz="1000" dirty="0">
+                <a:solidFill>
+                  <a:srgbClr val="666666"/>
+                </a:solidFill>
+                <a:latin typeface="Calibri Light" pitchFamily="34" charset="0"/>
+                <a:ea typeface="Calibri Light" pitchFamily="34" charset="-122"/>
+                <a:cs typeface="Calibri Light" pitchFamily="34" charset="-120"/>
+              </a:rPr>
+              <a:t>UI</a:t>
             </a:r>
             <a:endParaRPr lang="en-US" sz="1000" dirty="0"/>
           </a:p>
@@ -4892,7 +5024,7 @@
                 <a:ea typeface="Calibri" pitchFamily="34" charset="-122"/>
                 <a:cs typeface="Calibri" pitchFamily="34" charset="-120"/>
               </a:rPr>
-              <a:t>Grid 3 Software</a:t>
+              <a:t>Eye Gaze Tech</a:t>
             </a:r>
             <a:endParaRPr lang="en-US" sz="1200" dirty="0"/>
           </a:p>
@@ -4923,7 +5055,7 @@
               <a:buNone/>
             </a:pPr>
             <a:r>
-              <a:rPr lang="en-US" sz="1000" dirty="0">
+              <a:rPr lang="en-US" sz="1000" dirty="0" err="1">
                 <a:solidFill>
                   <a:srgbClr val="666666"/>
                 </a:solidFill>
@@ -4931,7 +5063,51 @@
                 <a:ea typeface="Calibri Light" pitchFamily="34" charset="-122"/>
                 <a:cs typeface="Calibri Light" pitchFamily="34" charset="-120"/>
               </a:rPr>
-              <a:t>Статични решетки</a:t>
+              <a:t>Само</a:t>
+            </a:r>
+            <a:r>
+              <a:rPr lang="en-US" sz="1000" dirty="0">
+                <a:solidFill>
+                  <a:srgbClr val="666666"/>
+                </a:solidFill>
+                <a:latin typeface="Calibri Light" pitchFamily="34" charset="0"/>
+                <a:ea typeface="Calibri Light" pitchFamily="34" charset="-122"/>
+                <a:cs typeface="Calibri Light" pitchFamily="34" charset="-120"/>
+              </a:rPr>
+              <a:t> </a:t>
+            </a:r>
+            <a:r>
+              <a:rPr lang="en-US" sz="1000" dirty="0" err="1">
+                <a:solidFill>
+                  <a:srgbClr val="666666"/>
+                </a:solidFill>
+                <a:latin typeface="Calibri Light" pitchFamily="34" charset="0"/>
+                <a:ea typeface="Calibri Light" pitchFamily="34" charset="-122"/>
+                <a:cs typeface="Calibri Light" pitchFamily="34" charset="-120"/>
+              </a:rPr>
+              <a:t>следи</a:t>
+            </a:r>
+            <a:r>
+              <a:rPr lang="en-US" sz="1000" dirty="0">
+                <a:solidFill>
+                  <a:srgbClr val="666666"/>
+                </a:solidFill>
+                <a:latin typeface="Calibri Light" pitchFamily="34" charset="0"/>
+                <a:ea typeface="Calibri Light" pitchFamily="34" charset="-122"/>
+                <a:cs typeface="Calibri Light" pitchFamily="34" charset="-120"/>
+              </a:rPr>
+              <a:t> </a:t>
+            </a:r>
+            <a:r>
+              <a:rPr lang="en-US" sz="1000" dirty="0" err="1">
+                <a:solidFill>
+                  <a:srgbClr val="666666"/>
+                </a:solidFill>
+                <a:latin typeface="Calibri Light" pitchFamily="34" charset="0"/>
+                <a:ea typeface="Calibri Light" pitchFamily="34" charset="-122"/>
+                <a:cs typeface="Calibri Light" pitchFamily="34" charset="-120"/>
+              </a:rPr>
+              <a:t>поглед</a:t>
             </a:r>
             <a:endParaRPr lang="en-US" sz="1000" dirty="0"/>
           </a:p>
@@ -4959,7 +5135,7 @@
 
 <file path=ppt/slides/slide3.xml><?xml version="1.0" encoding="utf-8"?>
 <p:sld xmlns:a="http://schemas.openxmlformats.org/drawingml/2006/main" xmlns:r="http://schemas.openxmlformats.org/officeDocument/2006/relationships" xmlns:p="http://schemas.openxmlformats.org/presentationml/2006/main">
-  <p:cSld name="Slide 3">
+  <p:cSld>
     <p:bg>
       <p:bgPr>
         <a:solidFill>
@@ -5021,526 +5197,53 @@
           </a:p>
         </p:txBody>
       </p:sp>
-      <p:sp>
-        <p:nvSpPr>
-          <p:cNvPr id="3" name="Text 1"/>
-          <p:cNvSpPr/>
-          <p:nvPr/>
-        </p:nvSpPr>
-        <p:spPr>
-          <a:xfrm>
-            <a:off x="457200" y="640080"/>
-            <a:ext cx="8229600" cy="640080"/>
-          </a:xfrm>
-          <a:prstGeom prst="rect">
-            <a:avLst/>
-          </a:prstGeom>
-          <a:noFill/>
-          <a:ln/>
-        </p:spPr>
-        <p:txBody>
-          <a:bodyPr wrap="square" rtlCol="0" anchor="ctr"/>
-          <a:lstStyle/>
-          <a:p>
-            <a:pPr marL="0" indent="0">
-              <a:buNone/>
-            </a:pPr>
-            <a:r>
-              <a:rPr lang="en-US" sz="3200" dirty="0">
-                <a:solidFill>
-                  <a:srgbClr val="FFFFFF"/>
-                </a:solidFill>
-                <a:latin typeface="Calibri Light" pitchFamily="34" charset="0"/>
-                <a:ea typeface="Calibri Light" pitchFamily="34" charset="-122"/>
-                <a:cs typeface="Calibri Light" pitchFamily="34" charset="-120"/>
-              </a:rPr>
-              <a:t>Цел на проекта</a:t>
-            </a:r>
-            <a:endParaRPr lang="en-US" sz="3200" dirty="0"/>
-          </a:p>
-        </p:txBody>
-      </p:sp>
-      <p:sp>
-        <p:nvSpPr>
-          <p:cNvPr id="4" name="Shape 2"/>
-          <p:cNvSpPr/>
-          <p:nvPr/>
-        </p:nvSpPr>
-        <p:spPr>
-          <a:xfrm>
-            <a:off x="365760" y="1463040"/>
-            <a:ext cx="8412480" cy="1371600"/>
-          </a:xfrm>
-          <a:prstGeom prst="rect">
-            <a:avLst/>
-          </a:prstGeom>
-          <a:solidFill>
-            <a:srgbClr val="111111"/>
-          </a:solidFill>
-          <a:ln w="6350">
-            <a:solidFill>
-              <a:srgbClr val="333333"/>
-            </a:solidFill>
-            <a:prstDash val="solid"/>
-          </a:ln>
-          <a:effectLst>
-            <a:outerShdw blurRad="254000" dist="50800" dir="8100000" algn="bl" rotWithShape="0">
-              <a:srgbClr val="000000">
-                <a:alpha val="50000"/>
-              </a:srgbClr>
-            </a:outerShdw>
-          </a:effectLst>
-        </p:spPr>
-      </p:sp>
-      <p:sp>
-        <p:nvSpPr>
-          <p:cNvPr id="5" name="Text 3"/>
-          <p:cNvSpPr/>
-          <p:nvPr/>
-        </p:nvSpPr>
-        <p:spPr>
-          <a:xfrm>
-            <a:off x="731520" y="1600200"/>
-            <a:ext cx="7680960" cy="1097280"/>
-          </a:xfrm>
-          <a:prstGeom prst="rect">
-            <a:avLst/>
-          </a:prstGeom>
-          <a:noFill/>
-          <a:ln/>
-        </p:spPr>
-        <p:txBody>
-          <a:bodyPr wrap="square" rtlCol="0" anchor="ctr"/>
-          <a:lstStyle/>
-          <a:p>
-            <a:pPr marL="0" indent="0" algn="ctr">
-              <a:buNone/>
-            </a:pPr>
-            <a:r>
-              <a:rPr lang="en-US" sz="1800" dirty="0">
-                <a:solidFill>
-                  <a:srgbClr val="FFFFFF"/>
-                </a:solidFill>
-                <a:latin typeface="Calibri Light" pitchFamily="34" charset="0"/>
-                <a:ea typeface="Calibri Light" pitchFamily="34" charset="-122"/>
-                <a:cs typeface="Calibri Light" pitchFamily="34" charset="-120"/>
-              </a:rPr>
-              <a:t>Достъпна, бърза и персонализирана комуникация</a:t>
-            </a:r>
-            <a:endParaRPr lang="en-US" sz="1800" dirty="0"/>
-          </a:p>
-          <a:p>
-            <a:pPr marL="0" indent="0" algn="ctr">
-              <a:buNone/>
-            </a:pPr>
-            <a:r>
-              <a:rPr lang="en-US" sz="1800" dirty="0">
-                <a:solidFill>
-                  <a:srgbClr val="FFFFFF"/>
-                </a:solidFill>
-                <a:latin typeface="Calibri Light" pitchFamily="34" charset="0"/>
-                <a:ea typeface="Calibri Light" pitchFamily="34" charset="-122"/>
-                <a:cs typeface="Calibri Light" pitchFamily="34" charset="-120"/>
-              </a:rPr>
-              <a:t>за хора с двигателни увреждания - навсякъде.</a:t>
-            </a:r>
-            <a:endParaRPr lang="en-US" sz="1800" dirty="0"/>
-          </a:p>
-        </p:txBody>
-      </p:sp>
-      <p:sp>
-        <p:nvSpPr>
-          <p:cNvPr id="6" name="Shape 4"/>
-          <p:cNvSpPr/>
-          <p:nvPr/>
-        </p:nvSpPr>
-        <p:spPr>
-          <a:xfrm>
-            <a:off x="365760" y="3017520"/>
-            <a:ext cx="2651760" cy="1737360"/>
-          </a:xfrm>
-          <a:prstGeom prst="rect">
-            <a:avLst/>
-          </a:prstGeom>
-          <a:solidFill>
-            <a:srgbClr val="111111"/>
-          </a:solidFill>
-          <a:ln w="6350">
-            <a:solidFill>
-              <a:srgbClr val="333333"/>
-            </a:solidFill>
-            <a:prstDash val="solid"/>
-          </a:ln>
-          <a:effectLst>
-            <a:outerShdw blurRad="254000" dist="50800" dir="8100000" algn="bl" rotWithShape="0">
-              <a:srgbClr val="000000">
-                <a:alpha val="50000"/>
-              </a:srgbClr>
-            </a:outerShdw>
-          </a:effectLst>
-        </p:spPr>
-      </p:sp>
-      <p:sp>
-        <p:nvSpPr>
-          <p:cNvPr id="7" name="Text 5"/>
-          <p:cNvSpPr/>
-          <p:nvPr/>
-        </p:nvSpPr>
-        <p:spPr>
-          <a:xfrm>
-            <a:off x="548640" y="3200400"/>
-            <a:ext cx="2286000" cy="365760"/>
-          </a:xfrm>
-          <a:prstGeom prst="rect">
-            <a:avLst/>
-          </a:prstGeom>
-          <a:noFill/>
-          <a:ln/>
-        </p:spPr>
-        <p:txBody>
-          <a:bodyPr wrap="square" lIns="0" tIns="0" rIns="0" bIns="0" rtlCol="0" anchor="ctr"/>
-          <a:lstStyle/>
-          <a:p>
-            <a:pPr marL="0" indent="0">
-              <a:buNone/>
-            </a:pPr>
-            <a:r>
-              <a:rPr lang="en-US" sz="1400" b="1" dirty="0">
-                <a:solidFill>
-                  <a:srgbClr val="FFFFFF"/>
-                </a:solidFill>
-                <a:latin typeface="Calibri" pitchFamily="34" charset="0"/>
-                <a:ea typeface="Calibri" pitchFamily="34" charset="-122"/>
-                <a:cs typeface="Calibri" pitchFamily="34" charset="-120"/>
-              </a:rPr>
-              <a:t>Достъпност</a:t>
-            </a:r>
-            <a:endParaRPr lang="en-US" sz="1400" dirty="0"/>
-          </a:p>
-        </p:txBody>
-      </p:sp>
-      <p:sp>
-        <p:nvSpPr>
-          <p:cNvPr id="8" name="Text 6"/>
-          <p:cNvSpPr/>
-          <p:nvPr/>
-        </p:nvSpPr>
-        <p:spPr>
-          <a:xfrm>
-            <a:off x="548640" y="3657600"/>
-            <a:ext cx="2286000" cy="822960"/>
-          </a:xfrm>
-          <a:prstGeom prst="rect">
-            <a:avLst/>
-          </a:prstGeom>
-          <a:noFill/>
-          <a:ln/>
-        </p:spPr>
-        <p:txBody>
-          <a:bodyPr wrap="square" lIns="0" tIns="0" rIns="0" bIns="0" rtlCol="0" anchor="ctr"/>
-          <a:lstStyle/>
-          <a:p>
-            <a:pPr marL="0" indent="0">
-              <a:buNone/>
-            </a:pPr>
-            <a:r>
-              <a:rPr lang="en-US" sz="1100" dirty="0">
-                <a:solidFill>
-                  <a:srgbClr val="666666"/>
-                </a:solidFill>
-                <a:latin typeface="Calibri Light" pitchFamily="34" charset="0"/>
-                <a:ea typeface="Calibri Light" pitchFamily="34" charset="-122"/>
-                <a:cs typeface="Calibri Light" pitchFamily="34" charset="-120"/>
-              </a:rPr>
-              <a:t>Low-cost hardware,</a:t>
-            </a:r>
-            <a:endParaRPr lang="en-US" sz="1100" dirty="0"/>
-          </a:p>
-          <a:p>
-            <a:pPr marL="0" indent="0">
-              <a:buNone/>
-            </a:pPr>
-            <a:r>
-              <a:rPr lang="en-US" sz="1100" dirty="0">
-                <a:solidFill>
-                  <a:srgbClr val="666666"/>
-                </a:solidFill>
-                <a:latin typeface="Calibri Light" pitchFamily="34" charset="0"/>
-                <a:ea typeface="Calibri Light" pitchFamily="34" charset="-122"/>
-                <a:cs typeface="Calibri Light" pitchFamily="34" charset="-120"/>
-              </a:rPr>
-              <a:t>open source software</a:t>
-            </a:r>
-            <a:endParaRPr lang="en-US" sz="1100" dirty="0"/>
-          </a:p>
-        </p:txBody>
-      </p:sp>
-      <p:sp>
-        <p:nvSpPr>
-          <p:cNvPr id="9" name="Shape 7"/>
-          <p:cNvSpPr/>
-          <p:nvPr/>
-        </p:nvSpPr>
-        <p:spPr>
-          <a:xfrm>
-            <a:off x="3227832" y="3017520"/>
-            <a:ext cx="2651760" cy="1737360"/>
-          </a:xfrm>
-          <a:prstGeom prst="rect">
-            <a:avLst/>
-          </a:prstGeom>
-          <a:solidFill>
-            <a:srgbClr val="111111"/>
-          </a:solidFill>
-          <a:ln w="6350">
-            <a:solidFill>
-              <a:srgbClr val="333333"/>
-            </a:solidFill>
-            <a:prstDash val="solid"/>
-          </a:ln>
-          <a:effectLst>
-            <a:outerShdw blurRad="254000" dist="50800" dir="8100000" algn="bl" rotWithShape="0">
-              <a:srgbClr val="000000">
-                <a:alpha val="50000"/>
-              </a:srgbClr>
-            </a:outerShdw>
-          </a:effectLst>
-        </p:spPr>
-      </p:sp>
-      <p:sp>
-        <p:nvSpPr>
-          <p:cNvPr id="10" name="Text 8"/>
-          <p:cNvSpPr/>
-          <p:nvPr/>
-        </p:nvSpPr>
-        <p:spPr>
-          <a:xfrm>
-            <a:off x="3410712" y="3200400"/>
-            <a:ext cx="2286000" cy="365760"/>
-          </a:xfrm>
-          <a:prstGeom prst="rect">
-            <a:avLst/>
-          </a:prstGeom>
-          <a:noFill/>
-          <a:ln/>
-        </p:spPr>
-        <p:txBody>
-          <a:bodyPr wrap="square" lIns="0" tIns="0" rIns="0" bIns="0" rtlCol="0" anchor="ctr"/>
-          <a:lstStyle/>
-          <a:p>
-            <a:pPr marL="0" indent="0">
-              <a:buNone/>
-            </a:pPr>
-            <a:r>
-              <a:rPr lang="en-US" sz="1400" b="1" dirty="0">
-                <a:solidFill>
-                  <a:srgbClr val="FFFFFF"/>
-                </a:solidFill>
-                <a:latin typeface="Calibri" pitchFamily="34" charset="0"/>
-                <a:ea typeface="Calibri" pitchFamily="34" charset="-122"/>
-                <a:cs typeface="Calibri" pitchFamily="34" charset="-120"/>
-              </a:rPr>
-              <a:t>Скорост</a:t>
-            </a:r>
-            <a:endParaRPr lang="en-US" sz="1400" dirty="0"/>
-          </a:p>
-        </p:txBody>
-      </p:sp>
-      <p:sp>
-        <p:nvSpPr>
-          <p:cNvPr id="11" name="Text 9"/>
-          <p:cNvSpPr/>
-          <p:nvPr/>
-        </p:nvSpPr>
-        <p:spPr>
-          <a:xfrm>
-            <a:off x="3410712" y="3657600"/>
-            <a:ext cx="2286000" cy="822960"/>
-          </a:xfrm>
-          <a:prstGeom prst="rect">
-            <a:avLst/>
-          </a:prstGeom>
-          <a:noFill/>
-          <a:ln/>
-        </p:spPr>
-        <p:txBody>
-          <a:bodyPr wrap="square" lIns="0" tIns="0" rIns="0" bIns="0" rtlCol="0" anchor="ctr"/>
-          <a:lstStyle/>
-          <a:p>
-            <a:pPr marL="0" indent="0">
-              <a:buNone/>
-            </a:pPr>
-            <a:r>
-              <a:rPr lang="en-US" sz="1100" dirty="0">
-                <a:solidFill>
-                  <a:srgbClr val="666666"/>
-                </a:solidFill>
-                <a:latin typeface="Calibri Light" pitchFamily="34" charset="0"/>
-                <a:ea typeface="Calibri Light" pitchFamily="34" charset="-122"/>
-                <a:cs typeface="Calibri Light" pitchFamily="34" charset="-120"/>
-              </a:rPr>
-              <a:t>&lt; 50ms от сигнал</a:t>
-            </a:r>
-            <a:endParaRPr lang="en-US" sz="1100" dirty="0"/>
-          </a:p>
-          <a:p>
-            <a:pPr marL="0" indent="0">
-              <a:buNone/>
-            </a:pPr>
-            <a:r>
-              <a:rPr lang="en-US" sz="1100" dirty="0">
-                <a:solidFill>
-                  <a:srgbClr val="666666"/>
-                </a:solidFill>
-                <a:latin typeface="Calibri Light" pitchFamily="34" charset="0"/>
-                <a:ea typeface="Calibri Light" pitchFamily="34" charset="-122"/>
-                <a:cs typeface="Calibri Light" pitchFamily="34" charset="-120"/>
-              </a:rPr>
-              <a:t>до предложение</a:t>
-            </a:r>
-            <a:endParaRPr lang="en-US" sz="1100" dirty="0"/>
-          </a:p>
-        </p:txBody>
-      </p:sp>
-      <p:sp>
-        <p:nvSpPr>
-          <p:cNvPr id="12" name="Shape 10"/>
-          <p:cNvSpPr/>
-          <p:nvPr/>
-        </p:nvSpPr>
-        <p:spPr>
-          <a:xfrm>
-            <a:off x="6089904" y="3017520"/>
-            <a:ext cx="2651760" cy="1737360"/>
-          </a:xfrm>
-          <a:prstGeom prst="rect">
-            <a:avLst/>
-          </a:prstGeom>
-          <a:solidFill>
-            <a:srgbClr val="111111"/>
-          </a:solidFill>
-          <a:ln w="6350">
-            <a:solidFill>
-              <a:srgbClr val="333333"/>
-            </a:solidFill>
-            <a:prstDash val="solid"/>
-          </a:ln>
-          <a:effectLst>
-            <a:outerShdw blurRad="254000" dist="50800" dir="8100000" algn="bl" rotWithShape="0">
-              <a:srgbClr val="000000">
-                <a:alpha val="50000"/>
-              </a:srgbClr>
-            </a:outerShdw>
-          </a:effectLst>
-        </p:spPr>
-      </p:sp>
-      <p:sp>
-        <p:nvSpPr>
-          <p:cNvPr id="13" name="Text 11"/>
-          <p:cNvSpPr/>
-          <p:nvPr/>
-        </p:nvSpPr>
-        <p:spPr>
-          <a:xfrm>
-            <a:off x="6272784" y="3200400"/>
-            <a:ext cx="2286000" cy="365760"/>
-          </a:xfrm>
-          <a:prstGeom prst="rect">
-            <a:avLst/>
-          </a:prstGeom>
-          <a:noFill/>
-          <a:ln/>
-        </p:spPr>
-        <p:txBody>
-          <a:bodyPr wrap="square" lIns="0" tIns="0" rIns="0" bIns="0" rtlCol="0" anchor="ctr"/>
-          <a:lstStyle/>
-          <a:p>
-            <a:pPr marL="0" indent="0">
-              <a:buNone/>
-            </a:pPr>
-            <a:r>
-              <a:rPr lang="en-US" sz="1400" b="1" dirty="0">
-                <a:solidFill>
-                  <a:srgbClr val="FFFFFF"/>
-                </a:solidFill>
-                <a:latin typeface="Calibri" pitchFamily="34" charset="0"/>
-                <a:ea typeface="Calibri" pitchFamily="34" charset="-122"/>
-                <a:cs typeface="Calibri" pitchFamily="34" charset="-120"/>
-              </a:rPr>
-              <a:t>Персонализация</a:t>
-            </a:r>
-            <a:endParaRPr lang="en-US" sz="1400" dirty="0"/>
-          </a:p>
-        </p:txBody>
-      </p:sp>
-      <p:sp>
-        <p:nvSpPr>
-          <p:cNvPr id="14" name="Text 12"/>
-          <p:cNvSpPr/>
-          <p:nvPr/>
-        </p:nvSpPr>
-        <p:spPr>
-          <a:xfrm>
-            <a:off x="6272784" y="3657600"/>
-            <a:ext cx="2286000" cy="822960"/>
-          </a:xfrm>
-          <a:prstGeom prst="rect">
-            <a:avLst/>
-          </a:prstGeom>
-          <a:noFill/>
-          <a:ln/>
-        </p:spPr>
-        <p:txBody>
-          <a:bodyPr wrap="square" lIns="0" tIns="0" rIns="0" bIns="0" rtlCol="0" anchor="ctr"/>
-          <a:lstStyle/>
-          <a:p>
-            <a:pPr marL="0" indent="0">
-              <a:buNone/>
-            </a:pPr>
-            <a:r>
-              <a:rPr lang="en-US" sz="1100" dirty="0">
-                <a:solidFill>
-                  <a:srgbClr val="666666"/>
-                </a:solidFill>
-                <a:latin typeface="Calibri Light" pitchFamily="34" charset="0"/>
-                <a:ea typeface="Calibri Light" pitchFamily="34" charset="-122"/>
-                <a:cs typeface="Calibri Light" pitchFamily="34" charset="-120"/>
-              </a:rPr>
-              <a:t>Учи се от потребителя</a:t>
-            </a:r>
-            <a:endParaRPr lang="en-US" sz="1100" dirty="0"/>
-          </a:p>
-          <a:p>
-            <a:pPr marL="0" indent="0">
-              <a:buNone/>
-            </a:pPr>
-            <a:r>
-              <a:rPr lang="en-US" sz="1100" dirty="0">
-                <a:solidFill>
-                  <a:srgbClr val="666666"/>
-                </a:solidFill>
-                <a:latin typeface="Calibri Light" pitchFamily="34" charset="0"/>
-                <a:ea typeface="Calibri Light" pitchFamily="34" charset="-122"/>
-                <a:cs typeface="Calibri Light" pitchFamily="34" charset="-120"/>
-              </a:rPr>
-              <a:t>автоматично</a:t>
-            </a:r>
-            <a:endParaRPr lang="en-US" sz="1100" dirty="0"/>
-          </a:p>
-        </p:txBody>
-      </p:sp>
+      <p:pic>
+        <p:nvPicPr>
+          <p:cNvPr id="29" name="Picture 28">
+            <a:extLst>
+              <a:ext uri="{FF2B5EF4-FFF2-40B4-BE49-F238E27FC236}">
+                <a16:creationId xmlns:a16="http://schemas.microsoft.com/office/drawing/2014/main" id="{26AD5BAD-A220-44C4-92F0-18BEA267C648}"/>
+              </a:ext>
+            </a:extLst>
+          </p:cNvPr>
+          <p:cNvPicPr>
+            <a:picLocks noChangeAspect="1"/>
+          </p:cNvPicPr>
+          <p:nvPr/>
+        </p:nvPicPr>
+        <p:blipFill>
+          <a:blip r:embed="rId3"/>
+          <a:stretch>
+            <a:fillRect/>
+          </a:stretch>
+        </p:blipFill>
+        <p:spPr>
+          <a:xfrm>
+            <a:off x="1782230" y="484632"/>
+            <a:ext cx="5579540" cy="4182601"/>
+          </a:xfrm>
+          <a:prstGeom prst="rect">
+            <a:avLst/>
+          </a:prstGeom>
+        </p:spPr>
+      </p:pic>
     </p:spTree>
+    <p:extLst>
+      <p:ext uri="{BB962C8B-B14F-4D97-AF65-F5344CB8AC3E}">
+        <p14:creationId xmlns:p14="http://schemas.microsoft.com/office/powerpoint/2010/main" val="3935652466"/>
+      </p:ext>
+    </p:extLst>
   </p:cSld>
   <p:clrMapOvr>
     <a:masterClrMapping/>
   </p:clrMapOvr>
-  <mc:AlternateContent xmlns:mc="http://schemas.openxmlformats.org/markup-compatibility/2006" xmlns:p159="http://schemas.microsoft.com/office/powerpoint/2015/09/main">
-    <mc:Choice Requires="p159">
+  <mc:AlternateContent xmlns:mc="http://schemas.openxmlformats.org/markup-compatibility/2006">
+    <mc:Choice xmlns:p159="http://schemas.microsoft.com/office/powerpoint/2015/09/main" Requires="p159">
       <p:transition xmlns:p14="http://schemas.microsoft.com/office/powerpoint/2010/main" spd="slow" p14:dur="2000">
         <p159:morph option="byObject"/>
       </p:transition>
     </mc:Choice>
-    <mc:Fallback xmlns="">
+    <mc:Fallback>
       <p:transition spd="slow">
         <p:fade/>
       </p:transition>
@@ -5613,551 +5316,53 @@
           </a:p>
         </p:txBody>
       </p:sp>
-      <p:sp>
-        <p:nvSpPr>
-          <p:cNvPr id="3" name="Text 1"/>
-          <p:cNvSpPr/>
-          <p:nvPr/>
-        </p:nvSpPr>
-        <p:spPr>
-          <a:xfrm>
-            <a:off x="457200" y="640080"/>
-            <a:ext cx="4572000" cy="548640"/>
-          </a:xfrm>
-          <a:prstGeom prst="rect">
-            <a:avLst/>
-          </a:prstGeom>
-          <a:noFill/>
-          <a:ln/>
-        </p:spPr>
-        <p:txBody>
-          <a:bodyPr wrap="square" rtlCol="0" anchor="ctr"/>
-          <a:lstStyle/>
-          <a:p>
-            <a:pPr marL="0" indent="0">
-              <a:buNone/>
-            </a:pPr>
-            <a:r>
-              <a:rPr lang="bg-BG" sz="3200" dirty="0">
-                <a:solidFill>
-                  <a:srgbClr val="FFFFFF"/>
-                </a:solidFill>
-                <a:latin typeface="Calibri Light" pitchFamily="34" charset="0"/>
-                <a:ea typeface="Calibri Light" pitchFamily="34" charset="-122"/>
-                <a:cs typeface="Calibri Light" pitchFamily="34" charset="-120"/>
-              </a:rPr>
-              <a:t>С какво се отличаваме</a:t>
-            </a:r>
-            <a:endParaRPr lang="en-US" sz="3200" dirty="0"/>
-          </a:p>
-        </p:txBody>
-      </p:sp>
-      <p:sp>
-        <p:nvSpPr>
-          <p:cNvPr id="5" name="Shape 3"/>
-          <p:cNvSpPr/>
-          <p:nvPr/>
-        </p:nvSpPr>
-        <p:spPr>
-          <a:xfrm>
-            <a:off x="377280" y="2462535"/>
-            <a:ext cx="8389440" cy="2197413"/>
-          </a:xfrm>
-          <a:prstGeom prst="rect">
-            <a:avLst/>
-          </a:prstGeom>
-          <a:solidFill>
-            <a:srgbClr val="111111"/>
-          </a:solidFill>
-          <a:ln w="6350">
-            <a:solidFill>
-              <a:srgbClr val="333333"/>
-            </a:solidFill>
-            <a:prstDash val="solid"/>
-          </a:ln>
-          <a:effectLst>
-            <a:outerShdw blurRad="254000" dist="50800" dir="8100000" algn="bl" rotWithShape="0">
-              <a:srgbClr val="000000">
-                <a:alpha val="50000"/>
-              </a:srgbClr>
-            </a:outerShdw>
-          </a:effectLst>
-        </p:spPr>
-      </p:sp>
-      <p:sp>
-        <p:nvSpPr>
-          <p:cNvPr id="6" name="Text 4"/>
-          <p:cNvSpPr/>
-          <p:nvPr/>
-        </p:nvSpPr>
-        <p:spPr>
-          <a:xfrm>
-            <a:off x="637200" y="2603268"/>
-            <a:ext cx="3291840" cy="320040"/>
-          </a:xfrm>
-          <a:prstGeom prst="rect">
-            <a:avLst/>
-          </a:prstGeom>
-          <a:noFill/>
-          <a:ln/>
-        </p:spPr>
-        <p:txBody>
-          <a:bodyPr wrap="square" lIns="0" tIns="0" rIns="0" bIns="0" rtlCol="0" anchor="ctr"/>
-          <a:lstStyle/>
-          <a:p>
-            <a:pPr marL="0" indent="0">
-              <a:buNone/>
-            </a:pPr>
-            <a:r>
-              <a:rPr lang="bg-BG" sz="1100" kern="0" spc="200" dirty="0">
-                <a:solidFill>
-                  <a:srgbClr val="666666"/>
-                </a:solidFill>
-                <a:latin typeface="Calibri" pitchFamily="34" charset="0"/>
-                <a:ea typeface="Calibri" pitchFamily="34" charset="-122"/>
-                <a:cs typeface="Calibri" pitchFamily="34" charset="-120"/>
-              </a:rPr>
-              <a:t>С какво се отличаваме</a:t>
-            </a:r>
-            <a:endParaRPr lang="en-US" sz="1100" dirty="0"/>
-          </a:p>
-        </p:txBody>
-      </p:sp>
-      <p:sp>
-        <p:nvSpPr>
-          <p:cNvPr id="7" name="Shape 5"/>
-          <p:cNvSpPr/>
-          <p:nvPr/>
-        </p:nvSpPr>
-        <p:spPr>
-          <a:xfrm>
-            <a:off x="662688" y="3198420"/>
-            <a:ext cx="64008" cy="64008"/>
-          </a:xfrm>
-          <a:prstGeom prst="ellipse">
-            <a:avLst/>
-          </a:prstGeom>
-          <a:solidFill>
-            <a:srgbClr val="444444"/>
-          </a:solidFill>
-          <a:ln w="12700">
-            <a:solidFill>
-              <a:srgbClr val="444444"/>
-            </a:solidFill>
-            <a:prstDash val="solid"/>
-          </a:ln>
-        </p:spPr>
-      </p:sp>
-      <p:sp>
-        <p:nvSpPr>
-          <p:cNvPr id="10" name="Text 8"/>
-          <p:cNvSpPr/>
-          <p:nvPr/>
-        </p:nvSpPr>
-        <p:spPr>
-          <a:xfrm>
-            <a:off x="820080" y="2851686"/>
-            <a:ext cx="7199541" cy="739647"/>
-          </a:xfrm>
-          <a:prstGeom prst="rect">
-            <a:avLst/>
-          </a:prstGeom>
-          <a:noFill/>
-          <a:ln/>
-        </p:spPr>
-        <p:txBody>
-          <a:bodyPr wrap="square" rtlCol="0" anchor="ctr"/>
-          <a:lstStyle/>
-          <a:p>
-            <a:pPr marL="0" indent="0">
-              <a:buNone/>
-            </a:pPr>
-            <a:r>
-              <a:rPr lang="ru-RU" sz="1200" dirty="0">
-                <a:solidFill>
-                  <a:srgbClr val="E8E8E8"/>
-                </a:solidFill>
-                <a:latin typeface="Calibri Light" pitchFamily="34" charset="0"/>
-                <a:ea typeface="Calibri Light" pitchFamily="34" charset="-122"/>
-                <a:cs typeface="Calibri Light" pitchFamily="34" charset="-120"/>
-              </a:rPr>
-              <a:t>Нашата система е като мултиизмерен език</a:t>
-            </a:r>
-            <a:r>
-              <a:rPr lang="en-US" sz="1200" dirty="0">
-                <a:solidFill>
-                  <a:srgbClr val="E8E8E8"/>
-                </a:solidFill>
-                <a:latin typeface="Calibri Light" pitchFamily="34" charset="0"/>
-                <a:ea typeface="Calibri Light" pitchFamily="34" charset="-122"/>
-                <a:cs typeface="Calibri Light" pitchFamily="34" charset="-120"/>
-              </a:rPr>
-              <a:t> </a:t>
-            </a:r>
-            <a:r>
-              <a:rPr lang="bg-BG" sz="1200" dirty="0">
-                <a:solidFill>
-                  <a:srgbClr val="E8E8E8"/>
-                </a:solidFill>
-                <a:latin typeface="Calibri Light" pitchFamily="34" charset="0"/>
-                <a:ea typeface="Calibri Light" pitchFamily="34" charset="-122"/>
-                <a:cs typeface="Calibri Light" pitchFamily="34" charset="-120"/>
-              </a:rPr>
-              <a:t>и в същото време е </a:t>
-            </a:r>
-            <a:r>
-              <a:rPr lang="ru-RU" sz="1200" dirty="0">
-                <a:solidFill>
-                  <a:srgbClr val="E8E8E8"/>
-                </a:solidFill>
-                <a:latin typeface="Calibri Light" pitchFamily="34" charset="0"/>
-                <a:ea typeface="Calibri Light" pitchFamily="34" charset="-122"/>
-                <a:cs typeface="Calibri Light" pitchFamily="34" charset="-120"/>
-              </a:rPr>
-              <a:t>адаптивна, гъвкава и достъпна</a:t>
-            </a:r>
-            <a:r>
-              <a:rPr lang="en-US" sz="1200" dirty="0">
-                <a:solidFill>
-                  <a:srgbClr val="E8E8E8"/>
-                </a:solidFill>
-                <a:latin typeface="Calibri Light" pitchFamily="34" charset="0"/>
-                <a:ea typeface="Calibri Light" pitchFamily="34" charset="-122"/>
-                <a:cs typeface="Calibri Light" pitchFamily="34" charset="-120"/>
-              </a:rPr>
-              <a:t>.</a:t>
-            </a:r>
-            <a:endParaRPr lang="en-US" sz="1200" dirty="0"/>
-          </a:p>
-        </p:txBody>
-      </p:sp>
-      <p:sp>
-        <p:nvSpPr>
-          <p:cNvPr id="11" name="Shape 9"/>
-          <p:cNvSpPr/>
-          <p:nvPr/>
-        </p:nvSpPr>
-        <p:spPr>
-          <a:xfrm>
-            <a:off x="662688" y="3668148"/>
-            <a:ext cx="64008" cy="64008"/>
-          </a:xfrm>
-          <a:prstGeom prst="ellipse">
-            <a:avLst/>
-          </a:prstGeom>
-          <a:solidFill>
-            <a:srgbClr val="444444"/>
-          </a:solidFill>
-          <a:ln w="12700">
-            <a:solidFill>
-              <a:srgbClr val="444444"/>
-            </a:solidFill>
-            <a:prstDash val="solid"/>
-          </a:ln>
-        </p:spPr>
-      </p:sp>
-      <p:sp>
-        <p:nvSpPr>
-          <p:cNvPr id="12" name="Text 10"/>
-          <p:cNvSpPr/>
-          <p:nvPr/>
-        </p:nvSpPr>
-        <p:spPr>
-          <a:xfrm>
-            <a:off x="805680" y="3396663"/>
-            <a:ext cx="7128332" cy="597609"/>
-          </a:xfrm>
-          <a:prstGeom prst="rect">
-            <a:avLst/>
-          </a:prstGeom>
-          <a:noFill/>
-          <a:ln/>
-        </p:spPr>
-        <p:txBody>
-          <a:bodyPr wrap="square" rtlCol="0" anchor="ctr"/>
-          <a:lstStyle/>
-          <a:p>
-            <a:pPr marL="0" indent="0">
-              <a:buNone/>
-            </a:pPr>
-            <a:r>
-              <a:rPr lang="ru-RU" sz="1200" dirty="0">
-                <a:solidFill>
-                  <a:srgbClr val="E8E8E8"/>
-                </a:solidFill>
-                <a:latin typeface="Calibri Light" pitchFamily="34" charset="0"/>
-                <a:ea typeface="Calibri Light" pitchFamily="34" charset="-122"/>
-                <a:cs typeface="Calibri Light" pitchFamily="34" charset="-120"/>
-              </a:rPr>
-              <a:t>Системата е модулна, което позволява лесна замяна на входните методи</a:t>
-            </a:r>
-            <a:r>
-              <a:rPr lang="en-US" sz="1200" dirty="0">
-                <a:solidFill>
-                  <a:srgbClr val="E8E8E8"/>
-                </a:solidFill>
-                <a:latin typeface="Calibri Light" pitchFamily="34" charset="0"/>
-                <a:ea typeface="Calibri Light" pitchFamily="34" charset="-122"/>
-                <a:cs typeface="Calibri Light" pitchFamily="34" charset="-120"/>
-              </a:rPr>
-              <a:t> (EEG, EMG).</a:t>
-            </a:r>
-            <a:endParaRPr lang="en-US" sz="1200" dirty="0"/>
-          </a:p>
-        </p:txBody>
-      </p:sp>
-      <p:sp>
-        <p:nvSpPr>
-          <p:cNvPr id="26" name="Shape 3">
+      <p:pic>
+        <p:nvPicPr>
+          <p:cNvPr id="4" name="Picture 3">
             <a:extLst>
               <a:ext uri="{FF2B5EF4-FFF2-40B4-BE49-F238E27FC236}">
-                <a16:creationId xmlns:a16="http://schemas.microsoft.com/office/drawing/2014/main" id="{CCD066B9-DECD-49FA-84C5-297B514556A4}"/>
+                <a16:creationId xmlns:a16="http://schemas.microsoft.com/office/drawing/2014/main" id="{C10AF473-C6CB-401D-BBE0-C51D646C7C00}"/>
               </a:ext>
             </a:extLst>
           </p:cNvPr>
-          <p:cNvSpPr/>
-          <p:nvPr/>
-        </p:nvSpPr>
-        <p:spPr>
-          <a:xfrm>
-            <a:off x="370080" y="1601847"/>
-            <a:ext cx="8389440" cy="757512"/>
-          </a:xfrm>
-          <a:prstGeom prst="rect">
-            <a:avLst/>
-          </a:prstGeom>
-          <a:solidFill>
-            <a:srgbClr val="111111"/>
-          </a:solidFill>
-          <a:ln w="6350">
-            <a:solidFill>
-              <a:srgbClr val="333333"/>
-            </a:solidFill>
-            <a:prstDash val="solid"/>
-          </a:ln>
-          <a:effectLst>
-            <a:outerShdw blurRad="254000" dist="50800" dir="8100000" algn="bl" rotWithShape="0">
-              <a:srgbClr val="000000">
-                <a:alpha val="50000"/>
-              </a:srgbClr>
-            </a:outerShdw>
-          </a:effectLst>
-        </p:spPr>
-      </p:sp>
-      <p:sp>
-        <p:nvSpPr>
-          <p:cNvPr id="27" name="Shape 5">
-            <a:extLst>
-              <a:ext uri="{FF2B5EF4-FFF2-40B4-BE49-F238E27FC236}">
-                <a16:creationId xmlns:a16="http://schemas.microsoft.com/office/drawing/2014/main" id="{D485E91F-615A-45C8-9A19-A82A7767FE84}"/>
-              </a:ext>
-            </a:extLst>
-          </p:cNvPr>
-          <p:cNvSpPr/>
-          <p:nvPr/>
-        </p:nvSpPr>
-        <p:spPr>
-          <a:xfrm>
-            <a:off x="638675" y="2027016"/>
-            <a:ext cx="76731" cy="64008"/>
-          </a:xfrm>
-          <a:prstGeom prst="ellipse">
-            <a:avLst/>
-          </a:prstGeom>
-          <a:solidFill>
-            <a:srgbClr val="444444"/>
-          </a:solidFill>
-          <a:ln w="12700">
-            <a:solidFill>
-              <a:srgbClr val="444444"/>
-            </a:solidFill>
-            <a:prstDash val="solid"/>
-          </a:ln>
-        </p:spPr>
-      </p:sp>
-      <p:sp>
-        <p:nvSpPr>
-          <p:cNvPr id="28" name="Text 4">
-            <a:extLst>
-              <a:ext uri="{FF2B5EF4-FFF2-40B4-BE49-F238E27FC236}">
-                <a16:creationId xmlns:a16="http://schemas.microsoft.com/office/drawing/2014/main" id="{09485891-9319-44AA-AFF7-13FAF9191BBE}"/>
-              </a:ext>
-            </a:extLst>
-          </p:cNvPr>
-          <p:cNvSpPr/>
-          <p:nvPr/>
-        </p:nvSpPr>
-        <p:spPr>
-          <a:xfrm>
-            <a:off x="610560" y="1653372"/>
-            <a:ext cx="3946144" cy="320040"/>
-          </a:xfrm>
-          <a:prstGeom prst="rect">
-            <a:avLst/>
-          </a:prstGeom>
-          <a:noFill/>
-          <a:ln/>
-        </p:spPr>
-        <p:txBody>
-          <a:bodyPr wrap="square" lIns="0" tIns="0" rIns="0" bIns="0" rtlCol="0" anchor="ctr"/>
-          <a:lstStyle/>
-          <a:p>
-            <a:pPr marL="0" indent="0">
-              <a:buNone/>
-            </a:pPr>
-            <a:r>
-              <a:rPr lang="bg-BG" sz="1100" kern="0" spc="200" dirty="0">
-                <a:solidFill>
-                  <a:srgbClr val="666666"/>
-                </a:solidFill>
-                <a:latin typeface="Calibri" pitchFamily="34" charset="0"/>
-                <a:ea typeface="Calibri" pitchFamily="34" charset="-122"/>
-                <a:cs typeface="Calibri" pitchFamily="34" charset="-120"/>
-              </a:rPr>
-              <a:t>Ключова идея</a:t>
-            </a:r>
-            <a:endParaRPr lang="en-US" sz="1100" dirty="0"/>
-          </a:p>
-        </p:txBody>
-      </p:sp>
-      <p:sp>
-        <p:nvSpPr>
-          <p:cNvPr id="29" name="Text 6">
-            <a:extLst>
-              <a:ext uri="{FF2B5EF4-FFF2-40B4-BE49-F238E27FC236}">
-                <a16:creationId xmlns:a16="http://schemas.microsoft.com/office/drawing/2014/main" id="{4832CADF-66A1-48DA-9911-2AF167CAD2A6}"/>
-              </a:ext>
-            </a:extLst>
-          </p:cNvPr>
-          <p:cNvSpPr/>
-          <p:nvPr/>
-        </p:nvSpPr>
-        <p:spPr>
-          <a:xfrm>
-            <a:off x="809892" y="1857348"/>
-            <a:ext cx="7332129" cy="411480"/>
-          </a:xfrm>
-          <a:prstGeom prst="rect">
-            <a:avLst/>
-          </a:prstGeom>
-          <a:noFill/>
-          <a:ln/>
-        </p:spPr>
-        <p:txBody>
-          <a:bodyPr wrap="square" rtlCol="0" anchor="ctr"/>
-          <a:lstStyle/>
-          <a:p>
-            <a:pPr marL="0" indent="0">
-              <a:buNone/>
-            </a:pPr>
-            <a:r>
-              <a:rPr lang="ru-RU" sz="1200" dirty="0">
-                <a:solidFill>
-                  <a:srgbClr val="E8E8E8"/>
-                </a:solidFill>
-                <a:latin typeface="Calibri Light" pitchFamily="34" charset="0"/>
-                <a:ea typeface="Calibri Light" pitchFamily="34" charset="-122"/>
-                <a:cs typeface="Calibri Light" pitchFamily="34" charset="-120"/>
-              </a:rPr>
-              <a:t>Технологията трябва да се адаптира към потребителя, вместо потребителят да се адаптира към технологията.</a:t>
-            </a:r>
-            <a:endParaRPr lang="en-US" sz="1200" dirty="0"/>
-          </a:p>
-        </p:txBody>
-      </p:sp>
-      <p:sp>
-        <p:nvSpPr>
-          <p:cNvPr id="30" name="Shape 9">
-            <a:extLst>
-              <a:ext uri="{FF2B5EF4-FFF2-40B4-BE49-F238E27FC236}">
-                <a16:creationId xmlns:a16="http://schemas.microsoft.com/office/drawing/2014/main" id="{9E352E93-9E22-4611-9A30-6B0009F4A3F4}"/>
-              </a:ext>
-            </a:extLst>
-          </p:cNvPr>
-          <p:cNvSpPr/>
-          <p:nvPr/>
-        </p:nvSpPr>
-        <p:spPr>
-          <a:xfrm>
-            <a:off x="671088" y="4158948"/>
-            <a:ext cx="64008" cy="64008"/>
-          </a:xfrm>
-          <a:prstGeom prst="ellipse">
-            <a:avLst/>
-          </a:prstGeom>
-          <a:solidFill>
-            <a:srgbClr val="444444"/>
-          </a:solidFill>
-          <a:ln w="12700">
-            <a:solidFill>
-              <a:srgbClr val="444444"/>
-            </a:solidFill>
-            <a:prstDash val="solid"/>
-          </a:ln>
-        </p:spPr>
-      </p:sp>
-      <p:sp>
-        <p:nvSpPr>
-          <p:cNvPr id="35" name="Text 10">
-            <a:extLst>
-              <a:ext uri="{FF2B5EF4-FFF2-40B4-BE49-F238E27FC236}">
-                <a16:creationId xmlns:a16="http://schemas.microsoft.com/office/drawing/2014/main" id="{6AAE4E18-6555-4889-AAFF-555B8C32EA96}"/>
-              </a:ext>
-            </a:extLst>
-          </p:cNvPr>
-          <p:cNvSpPr/>
-          <p:nvPr/>
-        </p:nvSpPr>
-        <p:spPr>
-          <a:xfrm>
-            <a:off x="805680" y="3923474"/>
-            <a:ext cx="7128332" cy="597609"/>
-          </a:xfrm>
-          <a:prstGeom prst="rect">
-            <a:avLst/>
-          </a:prstGeom>
-          <a:noFill/>
-          <a:ln/>
-        </p:spPr>
-        <p:txBody>
-          <a:bodyPr wrap="square" rtlCol="0" anchor="ctr"/>
-          <a:lstStyle/>
-          <a:p>
-            <a:pPr marL="0" indent="0">
-              <a:buNone/>
-            </a:pPr>
-            <a:r>
-              <a:rPr lang="ru-RU" sz="1200" dirty="0">
-                <a:solidFill>
-                  <a:srgbClr val="E8E8E8"/>
-                </a:solidFill>
-                <a:latin typeface="Calibri Light" pitchFamily="34" charset="0"/>
-                <a:ea typeface="Calibri Light" pitchFamily="34" charset="-122"/>
-                <a:cs typeface="Calibri Light" pitchFamily="34" charset="-120"/>
-              </a:rPr>
-              <a:t>Основното ни предимство е, че системата се персонализира за всеки човек, вместо да предлага еднакво решение за всички.</a:t>
-            </a:r>
-            <a:endParaRPr lang="en-US" sz="1200" dirty="0"/>
-          </a:p>
-        </p:txBody>
-      </p:sp>
+          <p:cNvPicPr>
+            <a:picLocks noChangeAspect="1"/>
+          </p:cNvPicPr>
+          <p:nvPr/>
+        </p:nvPicPr>
+        <p:blipFill>
+          <a:blip r:embed="rId3"/>
+          <a:stretch>
+            <a:fillRect/>
+          </a:stretch>
+        </p:blipFill>
+        <p:spPr>
+          <a:xfrm>
+            <a:off x="950892" y="587829"/>
+            <a:ext cx="7242216" cy="3967842"/>
+          </a:xfrm>
+          <a:prstGeom prst="rect">
+            <a:avLst/>
+          </a:prstGeom>
+        </p:spPr>
+      </p:pic>
     </p:spTree>
     <p:extLst>
       <p:ext uri="{BB962C8B-B14F-4D97-AF65-F5344CB8AC3E}">
-        <p14:creationId xmlns:p14="http://schemas.microsoft.com/office/powerpoint/2010/main" val="1342048130"/>
+        <p14:creationId xmlns:p14="http://schemas.microsoft.com/office/powerpoint/2010/main" val="3352621981"/>
       </p:ext>
     </p:extLst>
   </p:cSld>
   <p:clrMapOvr>
     <a:masterClrMapping/>
   </p:clrMapOvr>
-  <mc:AlternateContent xmlns:mc="http://schemas.openxmlformats.org/markup-compatibility/2006" xmlns:p159="http://schemas.microsoft.com/office/powerpoint/2015/09/main">
-    <mc:Choice Requires="p159">
+  <mc:AlternateContent xmlns:mc="http://schemas.openxmlformats.org/markup-compatibility/2006">
+    <mc:Choice xmlns:p159="http://schemas.microsoft.com/office/powerpoint/2015/09/main" Requires="p159">
       <p:transition xmlns:p14="http://schemas.microsoft.com/office/powerpoint/2010/main" spd="slow" p14:dur="2000">
         <p159:morph option="byObject"/>
       </p:transition>
     </mc:Choice>
-    <mc:Fallback xmlns="">
+    <mc:Fallback>
       <p:transition spd="slow">
         <p:fade/>
       </p:transition>
@@ -6168,7 +5373,7 @@
 
 <file path=ppt/slides/slide5.xml><?xml version="1.0" encoding="utf-8"?>
 <p:sld xmlns:a="http://schemas.openxmlformats.org/drawingml/2006/main" xmlns:r="http://schemas.openxmlformats.org/officeDocument/2006/relationships" xmlns:p="http://schemas.openxmlformats.org/presentationml/2006/main">
-  <p:cSld name="Slide 5">
+  <p:cSld name="Slide 3">
     <p:bg>
       <p:bgPr>
         <a:solidFill>
@@ -6239,7 +5444,7 @@
         <p:spPr>
           <a:xfrm>
             <a:off x="457200" y="640080"/>
-            <a:ext cx="8229600" cy="548640"/>
+            <a:ext cx="8229600" cy="640080"/>
           </a:xfrm>
           <a:prstGeom prst="rect">
             <a:avLst/>
@@ -6263,7 +5468,7 @@
                 <a:ea typeface="Calibri Light" pitchFamily="34" charset="-122"/>
                 <a:cs typeface="Calibri Light" pitchFamily="34" charset="-120"/>
               </a:rPr>
-              <a:t>Как работи Voxen?</a:t>
+              <a:t>Цел на проекта</a:t>
             </a:r>
             <a:endParaRPr lang="en-US" sz="3200" dirty="0"/>
           </a:p>
@@ -6277,8 +5482,8 @@
         </p:nvSpPr>
         <p:spPr>
           <a:xfrm>
-            <a:off x="274320" y="1828800"/>
-            <a:ext cx="1463040" cy="1463040"/>
+            <a:off x="365760" y="1463040"/>
+            <a:ext cx="8412480" cy="1371600"/>
           </a:xfrm>
           <a:prstGeom prst="rect">
             <a:avLst/>
@@ -6309,190 +5514,64 @@
         </p:nvSpPr>
         <p:spPr>
           <a:xfrm>
-            <a:off x="411480" y="1938528"/>
-            <a:ext cx="365760" cy="320040"/>
-          </a:xfrm>
-          <a:prstGeom prst="rect">
-            <a:avLst/>
-          </a:prstGeom>
-          <a:noFill/>
-          <a:ln/>
-        </p:spPr>
-        <p:txBody>
-          <a:bodyPr wrap="square" lIns="0" tIns="0" rIns="0" bIns="0" rtlCol="0" anchor="ctr"/>
-          <a:lstStyle/>
-          <a:p>
-            <a:pPr marL="0" indent="0">
-              <a:buNone/>
-            </a:pPr>
-            <a:r>
-              <a:rPr lang="en-US" sz="1100" dirty="0">
-                <a:solidFill>
-                  <a:srgbClr val="292929"/>
-                </a:solidFill>
-                <a:latin typeface="Calibri" pitchFamily="34" charset="0"/>
-                <a:ea typeface="Calibri" pitchFamily="34" charset="-122"/>
-                <a:cs typeface="Calibri" pitchFamily="34" charset="-120"/>
-              </a:rPr>
-              <a:t>1</a:t>
-            </a:r>
-            <a:endParaRPr lang="en-US" sz="1100" dirty="0"/>
-          </a:p>
-        </p:txBody>
-      </p:sp>
-      <p:sp>
-        <p:nvSpPr>
-          <p:cNvPr id="6" name="Text 4"/>
-          <p:cNvSpPr/>
-          <p:nvPr/>
-        </p:nvSpPr>
-        <p:spPr>
-          <a:xfrm>
-            <a:off x="384048" y="2304288"/>
-            <a:ext cx="1280160" cy="347472"/>
-          </a:xfrm>
-          <a:prstGeom prst="rect">
-            <a:avLst/>
-          </a:prstGeom>
-          <a:noFill/>
-          <a:ln/>
-        </p:spPr>
-        <p:txBody>
-          <a:bodyPr wrap="square" lIns="0" tIns="0" rIns="0" bIns="0" rtlCol="0" anchor="ctr"/>
-          <a:lstStyle/>
-          <a:p>
-            <a:pPr marL="0" indent="0">
-              <a:buNone/>
-            </a:pPr>
-            <a:r>
-              <a:rPr lang="bg-BG" sz="1300" b="1" dirty="0">
+            <a:off x="731520" y="1600200"/>
+            <a:ext cx="7680960" cy="1097280"/>
+          </a:xfrm>
+          <a:prstGeom prst="rect">
+            <a:avLst/>
+          </a:prstGeom>
+          <a:noFill/>
+          <a:ln/>
+        </p:spPr>
+        <p:txBody>
+          <a:bodyPr wrap="square" rtlCol="0" anchor="ctr"/>
+          <a:lstStyle/>
+          <a:p>
+            <a:pPr marL="0" indent="0" algn="ctr">
+              <a:buNone/>
+            </a:pPr>
+            <a:r>
+              <a:rPr lang="en-US" sz="1800" dirty="0">
                 <a:solidFill>
                   <a:srgbClr val="FFFFFF"/>
-                </a:solidFill>
-                <a:latin typeface="Calibri" pitchFamily="34" charset="0"/>
-                <a:ea typeface="Calibri" pitchFamily="34" charset="-122"/>
-                <a:cs typeface="Calibri" pitchFamily="34" charset="-120"/>
-              </a:rPr>
-              <a:t>Входни данни</a:t>
-            </a:r>
-            <a:endParaRPr lang="en-US" sz="1300" dirty="0"/>
-          </a:p>
-        </p:txBody>
-      </p:sp>
-      <p:sp>
-        <p:nvSpPr>
-          <p:cNvPr id="7" name="Text 5"/>
-          <p:cNvSpPr/>
-          <p:nvPr/>
-        </p:nvSpPr>
-        <p:spPr>
-          <a:xfrm>
-            <a:off x="384048" y="2679192"/>
-            <a:ext cx="1280160" cy="548640"/>
-          </a:xfrm>
-          <a:prstGeom prst="rect">
-            <a:avLst/>
-          </a:prstGeom>
-          <a:noFill/>
-          <a:ln/>
-        </p:spPr>
-        <p:txBody>
-          <a:bodyPr wrap="square" lIns="0" tIns="0" rIns="0" bIns="0" rtlCol="0" anchor="ctr"/>
-          <a:lstStyle/>
-          <a:p>
-            <a:pPr marL="0" indent="0">
-              <a:buNone/>
-            </a:pPr>
-            <a:r>
-              <a:rPr lang="en-US" sz="950" dirty="0">
-                <a:solidFill>
-                  <a:srgbClr val="666666"/>
                 </a:solidFill>
                 <a:latin typeface="Calibri Light" pitchFamily="34" charset="0"/>
                 <a:ea typeface="Calibri Light" pitchFamily="34" charset="-122"/>
                 <a:cs typeface="Calibri Light" pitchFamily="34" charset="-120"/>
               </a:rPr>
-              <a:t>ESP32 </a:t>
-            </a:r>
-            <a:r>
-              <a:rPr lang="bg-BG" sz="950" dirty="0">
-                <a:solidFill>
-                  <a:srgbClr val="666666"/>
+              <a:t>Достъпна, бърза и персонализирана комуникация</a:t>
+            </a:r>
+            <a:endParaRPr lang="en-US" sz="1800" dirty="0"/>
+          </a:p>
+          <a:p>
+            <a:pPr marL="0" indent="0" algn="ctr">
+              <a:buNone/>
+            </a:pPr>
+            <a:r>
+              <a:rPr lang="en-US" sz="1800" dirty="0">
+                <a:solidFill>
+                  <a:srgbClr val="FFFFFF"/>
                 </a:solidFill>
                 <a:latin typeface="Calibri Light" pitchFamily="34" charset="0"/>
                 <a:ea typeface="Calibri Light" pitchFamily="34" charset="-122"/>
                 <a:cs typeface="Calibri Light" pitchFamily="34" charset="-120"/>
               </a:rPr>
-              <a:t>- </a:t>
-            </a:r>
-            <a:r>
-              <a:rPr lang="en-US" sz="950" dirty="0">
-                <a:solidFill>
-                  <a:srgbClr val="666666"/>
-                </a:solidFill>
-                <a:latin typeface="Calibri Light" pitchFamily="34" charset="0"/>
-                <a:ea typeface="Calibri Light" pitchFamily="34" charset="-122"/>
-                <a:cs typeface="Calibri Light" pitchFamily="34" charset="-120"/>
-              </a:rPr>
-              <a:t>акселерометър</a:t>
-            </a:r>
-            <a:br>
-              <a:rPr lang="en-US" sz="950" dirty="0">
-                <a:solidFill>
-                  <a:srgbClr val="666666"/>
-                </a:solidFill>
-                <a:latin typeface="Calibri Light" pitchFamily="34" charset="0"/>
-                <a:ea typeface="Calibri Light" pitchFamily="34" charset="-122"/>
-                <a:cs typeface="Calibri Light" pitchFamily="34" charset="-120"/>
-              </a:rPr>
-            </a:br>
-            <a:r>
-              <a:rPr lang="en-US" sz="950" dirty="0">
-                <a:solidFill>
-                  <a:srgbClr val="666666"/>
-                </a:solidFill>
-                <a:latin typeface="Calibri Light" pitchFamily="34" charset="0"/>
-                <a:ea typeface="Calibri Light" pitchFamily="34" charset="-122"/>
-                <a:cs typeface="Calibri Light" pitchFamily="34" charset="-120"/>
-              </a:rPr>
-              <a:t>Raspberry Pi, laptop camera - eye tracking</a:t>
-            </a:r>
-          </a:p>
-        </p:txBody>
-      </p:sp>
-      <p:sp>
-        <p:nvSpPr>
-          <p:cNvPr id="8" name="Shape 6"/>
-          <p:cNvSpPr/>
-          <p:nvPr/>
-        </p:nvSpPr>
-        <p:spPr>
-          <a:xfrm>
-            <a:off x="1773936" y="2560320"/>
-            <a:ext cx="182880" cy="0"/>
-          </a:xfrm>
-          <a:prstGeom prst="line">
-            <a:avLst/>
-          </a:prstGeom>
-          <a:noFill/>
-          <a:ln w="12700">
-            <a:solidFill>
-              <a:srgbClr val="282828"/>
-            </a:solidFill>
-            <a:prstDash val="solid"/>
-          </a:ln>
-        </p:spPr>
-      </p:sp>
-      <p:sp>
-        <p:nvSpPr>
-          <p:cNvPr id="9" name="Shape 7"/>
-          <p:cNvSpPr/>
-          <p:nvPr/>
-        </p:nvSpPr>
-        <p:spPr>
-          <a:xfrm>
-            <a:off x="1993392" y="1828800"/>
-            <a:ext cx="1463040" cy="1463040"/>
+              <a:t>за хора с двигателни увреждания - навсякъде.</a:t>
+            </a:r>
+            <a:endParaRPr lang="en-US" sz="1800" dirty="0"/>
+          </a:p>
+        </p:txBody>
+      </p:sp>
+      <p:sp>
+        <p:nvSpPr>
+          <p:cNvPr id="6" name="Shape 4"/>
+          <p:cNvSpPr/>
+          <p:nvPr/>
+        </p:nvSpPr>
+        <p:spPr>
+          <a:xfrm>
+            <a:off x="365760" y="3017520"/>
+            <a:ext cx="2651760" cy="1737360"/>
           </a:xfrm>
           <a:prstGeom prst="rect">
             <a:avLst/>
@@ -6517,14 +5596,14 @@
       </p:sp>
       <p:sp>
         <p:nvSpPr>
-          <p:cNvPr id="10" name="Text 8"/>
-          <p:cNvSpPr/>
-          <p:nvPr/>
-        </p:nvSpPr>
-        <p:spPr>
-          <a:xfrm>
-            <a:off x="2130552" y="1938528"/>
-            <a:ext cx="365760" cy="320040"/>
+          <p:cNvPr id="7" name="Text 5"/>
+          <p:cNvSpPr/>
+          <p:nvPr/>
+        </p:nvSpPr>
+        <p:spPr>
+          <a:xfrm>
+            <a:off x="548640" y="3200400"/>
+            <a:ext cx="2286000" cy="365760"/>
           </a:xfrm>
           <a:prstGeom prst="rect">
             <a:avLst/>
@@ -6540,30 +5619,30 @@
               <a:buNone/>
             </a:pPr>
             <a:r>
-              <a:rPr lang="en-US" sz="1100" dirty="0">
-                <a:solidFill>
-                  <a:srgbClr val="292929"/>
+              <a:rPr lang="en-US" sz="1400" b="1" dirty="0">
+                <a:solidFill>
+                  <a:srgbClr val="FFFFFF"/>
                 </a:solidFill>
                 <a:latin typeface="Calibri" pitchFamily="34" charset="0"/>
                 <a:ea typeface="Calibri" pitchFamily="34" charset="-122"/>
                 <a:cs typeface="Calibri" pitchFamily="34" charset="-120"/>
               </a:rPr>
-              <a:t>2</a:t>
-            </a:r>
-            <a:endParaRPr lang="en-US" sz="1100" dirty="0"/>
-          </a:p>
-        </p:txBody>
-      </p:sp>
-      <p:sp>
-        <p:nvSpPr>
-          <p:cNvPr id="11" name="Text 9"/>
-          <p:cNvSpPr/>
-          <p:nvPr/>
-        </p:nvSpPr>
-        <p:spPr>
-          <a:xfrm>
-            <a:off x="2103120" y="2304288"/>
-            <a:ext cx="1280160" cy="347472"/>
+              <a:t>Достъпност</a:t>
+            </a:r>
+            <a:endParaRPr lang="en-US" sz="1400" dirty="0"/>
+          </a:p>
+        </p:txBody>
+      </p:sp>
+      <p:sp>
+        <p:nvSpPr>
+          <p:cNvPr id="8" name="Text 6"/>
+          <p:cNvSpPr/>
+          <p:nvPr/>
+        </p:nvSpPr>
+        <p:spPr>
+          <a:xfrm>
+            <a:off x="548640" y="3657600"/>
+            <a:ext cx="2286000" cy="822960"/>
           </a:xfrm>
           <a:prstGeom prst="rect">
             <a:avLst/>
@@ -6579,46 +5658,7 @@
               <a:buNone/>
             </a:pPr>
             <a:r>
-              <a:rPr lang="en-US" sz="1300" b="1" dirty="0">
-                <a:solidFill>
-                  <a:srgbClr val="FFFFFF"/>
-                </a:solidFill>
-                <a:latin typeface="Calibri" pitchFamily="34" charset="0"/>
-                <a:ea typeface="Calibri" pitchFamily="34" charset="-122"/>
-                <a:cs typeface="Calibri" pitchFamily="34" charset="-120"/>
-              </a:rPr>
-              <a:t>Интерфейс</a:t>
-            </a:r>
-            <a:endParaRPr lang="en-US" sz="1300" dirty="0"/>
-          </a:p>
-        </p:txBody>
-      </p:sp>
-      <p:sp>
-        <p:nvSpPr>
-          <p:cNvPr id="12" name="Text 10"/>
-          <p:cNvSpPr/>
-          <p:nvPr/>
-        </p:nvSpPr>
-        <p:spPr>
-          <a:xfrm>
-            <a:off x="2103120" y="2679192"/>
-            <a:ext cx="1280160" cy="548640"/>
-          </a:xfrm>
-          <a:prstGeom prst="rect">
-            <a:avLst/>
-          </a:prstGeom>
-          <a:noFill/>
-          <a:ln/>
-        </p:spPr>
-        <p:txBody>
-          <a:bodyPr wrap="square" lIns="0" tIns="0" rIns="0" bIns="0" rtlCol="0" anchor="ctr"/>
-          <a:lstStyle/>
-          <a:p>
-            <a:pPr marL="0" indent="0">
-              <a:buNone/>
-            </a:pPr>
-            <a:r>
-              <a:rPr lang="en-US" sz="950" dirty="0">
+              <a:rPr lang="en-US" sz="1100" dirty="0">
                 <a:solidFill>
                   <a:srgbClr val="666666"/>
                 </a:solidFill>
@@ -6626,16 +5666,16 @@
                 <a:ea typeface="Calibri Light" pitchFamily="34" charset="-122"/>
                 <a:cs typeface="Calibri Light" pitchFamily="34" charset="-120"/>
               </a:rPr>
-              <a:t>React показва думи,</a:t>
-            </a:r>
-            <a:endParaRPr lang="en-US" sz="950" dirty="0"/>
-          </a:p>
-          <a:p>
-            <a:pPr marL="0" indent="0">
-              <a:buNone/>
-            </a:pPr>
-            <a:r>
-              <a:rPr lang="en-US" sz="950" dirty="0">
+              <a:t>Low-cost hardware,</a:t>
+            </a:r>
+            <a:endParaRPr lang="en-US" sz="1100" dirty="0"/>
+          </a:p>
+          <a:p>
+            <a:pPr marL="0" indent="0">
+              <a:buNone/>
+            </a:pPr>
+            <a:r>
+              <a:rPr lang="en-US" sz="1100" dirty="0">
                 <a:solidFill>
                   <a:srgbClr val="666666"/>
                 </a:solidFill>
@@ -6643,45 +5683,22 @@
                 <a:ea typeface="Calibri Light" pitchFamily="34" charset="-122"/>
                 <a:cs typeface="Calibri Light" pitchFamily="34" charset="-120"/>
               </a:rPr>
-              <a:t>потребителят избира</a:t>
-            </a:r>
-            <a:endParaRPr lang="en-US" sz="950" dirty="0"/>
-          </a:p>
-        </p:txBody>
-      </p:sp>
-      <p:sp>
-        <p:nvSpPr>
-          <p:cNvPr id="13" name="Shape 11"/>
-          <p:cNvSpPr/>
-          <p:nvPr/>
-        </p:nvSpPr>
-        <p:spPr>
-          <a:xfrm>
-            <a:off x="3493008" y="2560320"/>
-            <a:ext cx="182880" cy="0"/>
-          </a:xfrm>
-          <a:prstGeom prst="line">
-            <a:avLst/>
-          </a:prstGeom>
-          <a:noFill/>
-          <a:ln w="12700">
-            <a:solidFill>
-              <a:srgbClr val="282828"/>
-            </a:solidFill>
-            <a:prstDash val="solid"/>
-          </a:ln>
-        </p:spPr>
-      </p:sp>
-      <p:sp>
-        <p:nvSpPr>
-          <p:cNvPr id="14" name="Shape 12"/>
-          <p:cNvSpPr/>
-          <p:nvPr/>
-        </p:nvSpPr>
-        <p:spPr>
-          <a:xfrm>
-            <a:off x="3712464" y="1828800"/>
-            <a:ext cx="1463040" cy="1463040"/>
+              <a:t>open source software</a:t>
+            </a:r>
+            <a:endParaRPr lang="en-US" sz="1100" dirty="0"/>
+          </a:p>
+        </p:txBody>
+      </p:sp>
+      <p:sp>
+        <p:nvSpPr>
+          <p:cNvPr id="9" name="Shape 7"/>
+          <p:cNvSpPr/>
+          <p:nvPr/>
+        </p:nvSpPr>
+        <p:spPr>
+          <a:xfrm>
+            <a:off x="3227832" y="3017520"/>
+            <a:ext cx="2651760" cy="1737360"/>
           </a:xfrm>
           <a:prstGeom prst="rect">
             <a:avLst/>
@@ -6706,14 +5723,14 @@
       </p:sp>
       <p:sp>
         <p:nvSpPr>
-          <p:cNvPr id="15" name="Text 13"/>
-          <p:cNvSpPr/>
-          <p:nvPr/>
-        </p:nvSpPr>
-        <p:spPr>
-          <a:xfrm>
-            <a:off x="3849624" y="1938528"/>
-            <a:ext cx="365760" cy="320040"/>
+          <p:cNvPr id="10" name="Text 8"/>
+          <p:cNvSpPr/>
+          <p:nvPr/>
+        </p:nvSpPr>
+        <p:spPr>
+          <a:xfrm>
+            <a:off x="3410712" y="3200400"/>
+            <a:ext cx="2286000" cy="365760"/>
           </a:xfrm>
           <a:prstGeom prst="rect">
             <a:avLst/>
@@ -6729,30 +5746,30 @@
               <a:buNone/>
             </a:pPr>
             <a:r>
-              <a:rPr lang="en-US" sz="1100" dirty="0">
-                <a:solidFill>
-                  <a:srgbClr val="292929"/>
+              <a:rPr lang="en-US" sz="1400" b="1" dirty="0">
+                <a:solidFill>
+                  <a:srgbClr val="FFFFFF"/>
                 </a:solidFill>
                 <a:latin typeface="Calibri" pitchFamily="34" charset="0"/>
                 <a:ea typeface="Calibri" pitchFamily="34" charset="-122"/>
                 <a:cs typeface="Calibri" pitchFamily="34" charset="-120"/>
               </a:rPr>
-              <a:t>3</a:t>
-            </a:r>
-            <a:endParaRPr lang="en-US" sz="1100" dirty="0"/>
-          </a:p>
-        </p:txBody>
-      </p:sp>
-      <p:sp>
-        <p:nvSpPr>
-          <p:cNvPr id="16" name="Text 14"/>
-          <p:cNvSpPr/>
-          <p:nvPr/>
-        </p:nvSpPr>
-        <p:spPr>
-          <a:xfrm>
-            <a:off x="3822192" y="2304288"/>
-            <a:ext cx="1280160" cy="347472"/>
+              <a:t>Скорост</a:t>
+            </a:r>
+            <a:endParaRPr lang="en-US" sz="1400" dirty="0"/>
+          </a:p>
+        </p:txBody>
+      </p:sp>
+      <p:sp>
+        <p:nvSpPr>
+          <p:cNvPr id="11" name="Text 9"/>
+          <p:cNvSpPr/>
+          <p:nvPr/>
+        </p:nvSpPr>
+        <p:spPr>
+          <a:xfrm>
+            <a:off x="3410712" y="3657600"/>
+            <a:ext cx="2286000" cy="822960"/>
           </a:xfrm>
           <a:prstGeom prst="rect">
             <a:avLst/>
@@ -6768,46 +5785,7 @@
               <a:buNone/>
             </a:pPr>
             <a:r>
-              <a:rPr lang="en-US" sz="1300" b="1" dirty="0">
-                <a:solidFill>
-                  <a:srgbClr val="FFFFFF"/>
-                </a:solidFill>
-                <a:latin typeface="Calibri" pitchFamily="34" charset="0"/>
-                <a:ea typeface="Calibri" pitchFamily="34" charset="-122"/>
-                <a:cs typeface="Calibri" pitchFamily="34" charset="-120"/>
-              </a:rPr>
-              <a:t>AI модел</a:t>
-            </a:r>
-            <a:endParaRPr lang="en-US" sz="1300" dirty="0"/>
-          </a:p>
-        </p:txBody>
-      </p:sp>
-      <p:sp>
-        <p:nvSpPr>
-          <p:cNvPr id="17" name="Text 15"/>
-          <p:cNvSpPr/>
-          <p:nvPr/>
-        </p:nvSpPr>
-        <p:spPr>
-          <a:xfrm>
-            <a:off x="3822192" y="2679192"/>
-            <a:ext cx="1280160" cy="548640"/>
-          </a:xfrm>
-          <a:prstGeom prst="rect">
-            <a:avLst/>
-          </a:prstGeom>
-          <a:noFill/>
-          <a:ln/>
-        </p:spPr>
-        <p:txBody>
-          <a:bodyPr wrap="square" lIns="0" tIns="0" rIns="0" bIns="0" rtlCol="0" anchor="ctr"/>
-          <a:lstStyle/>
-          <a:p>
-            <a:pPr marL="0" indent="0">
-              <a:buNone/>
-            </a:pPr>
-            <a:r>
-              <a:rPr lang="en-US" sz="950" dirty="0">
+              <a:rPr lang="en-US" sz="1100" dirty="0">
                 <a:solidFill>
                   <a:srgbClr val="666666"/>
                 </a:solidFill>
@@ -6815,10 +5793,16 @@
                 <a:ea typeface="Calibri Light" pitchFamily="34" charset="-122"/>
                 <a:cs typeface="Calibri Light" pitchFamily="34" charset="-120"/>
               </a:rPr>
-              <a:t>distilGPT-2 дава </a:t>
-            </a:r>
-            <a:r>
-              <a:rPr lang="bg-BG" sz="950" dirty="0">
+              <a:t>&lt; 50ms от сигнал</a:t>
+            </a:r>
+            <a:endParaRPr lang="en-US" sz="1100" dirty="0"/>
+          </a:p>
+          <a:p>
+            <a:pPr marL="0" indent="0">
+              <a:buNone/>
+            </a:pPr>
+            <a:r>
+              <a:rPr lang="en-US" sz="1100" dirty="0">
                 <a:solidFill>
                   <a:srgbClr val="666666"/>
                 </a:solidFill>
@@ -6826,84 +5810,22 @@
                 <a:ea typeface="Calibri Light" pitchFamily="34" charset="-122"/>
                 <a:cs typeface="Calibri Light" pitchFamily="34" charset="-120"/>
               </a:rPr>
-              <a:t>предложения</a:t>
-            </a:r>
-            <a:endParaRPr lang="bg-BG" sz="950" dirty="0"/>
-          </a:p>
-          <a:p>
-            <a:pPr marL="0" indent="0">
-              <a:buNone/>
-            </a:pPr>
-            <a:r>
-              <a:rPr lang="ru-RU" sz="950" dirty="0">
-                <a:solidFill>
-                  <a:srgbClr val="666666"/>
-                </a:solidFill>
-                <a:latin typeface="Calibri Light" pitchFamily="34" charset="0"/>
-                <a:ea typeface="Calibri Light" pitchFamily="34" charset="-122"/>
-                <a:cs typeface="Calibri Light" pitchFamily="34" charset="-120"/>
-              </a:rPr>
-              <a:t>Engram - управл</a:t>
-            </a:r>
-            <a:r>
-              <a:rPr lang="bg-BG" sz="950" dirty="0">
-                <a:solidFill>
-                  <a:srgbClr val="666666"/>
-                </a:solidFill>
-                <a:latin typeface="Calibri Light" pitchFamily="34" charset="0"/>
-                <a:ea typeface="Calibri Light" pitchFamily="34" charset="-122"/>
-                <a:cs typeface="Calibri Light" pitchFamily="34" charset="-120"/>
-              </a:rPr>
-              <a:t>ява</a:t>
-            </a:r>
-            <a:r>
-              <a:rPr lang="ru-RU" sz="950" dirty="0">
-                <a:solidFill>
-                  <a:srgbClr val="666666"/>
-                </a:solidFill>
-                <a:latin typeface="Calibri Light" pitchFamily="34" charset="0"/>
-                <a:ea typeface="Calibri Light" pitchFamily="34" charset="-122"/>
-                <a:cs typeface="Calibri Light" pitchFamily="34" charset="-120"/>
-              </a:rPr>
-              <a:t> информацията</a:t>
-            </a:r>
-            <a:endParaRPr lang="en-US" sz="950" dirty="0"/>
-          </a:p>
-        </p:txBody>
-      </p:sp>
-      <p:sp>
-        <p:nvSpPr>
-          <p:cNvPr id="18" name="Shape 16"/>
-          <p:cNvSpPr/>
-          <p:nvPr/>
-        </p:nvSpPr>
-        <p:spPr>
-          <a:xfrm>
-            <a:off x="5212080" y="2560320"/>
-            <a:ext cx="182880" cy="0"/>
-          </a:xfrm>
-          <a:prstGeom prst="line">
-            <a:avLst/>
-          </a:prstGeom>
-          <a:noFill/>
-          <a:ln w="12700">
-            <a:solidFill>
-              <a:srgbClr val="282828"/>
-            </a:solidFill>
-            <a:prstDash val="solid"/>
-          </a:ln>
-        </p:spPr>
-      </p:sp>
-      <p:sp>
-        <p:nvSpPr>
-          <p:cNvPr id="19" name="Shape 17"/>
-          <p:cNvSpPr/>
-          <p:nvPr/>
-        </p:nvSpPr>
-        <p:spPr>
-          <a:xfrm>
-            <a:off x="5431536" y="1828800"/>
-            <a:ext cx="1463040" cy="1463040"/>
+              <a:t>до предложение</a:t>
+            </a:r>
+            <a:endParaRPr lang="en-US" sz="1100" dirty="0"/>
+          </a:p>
+        </p:txBody>
+      </p:sp>
+      <p:sp>
+        <p:nvSpPr>
+          <p:cNvPr id="12" name="Shape 10"/>
+          <p:cNvSpPr/>
+          <p:nvPr/>
+        </p:nvSpPr>
+        <p:spPr>
+          <a:xfrm>
+            <a:off x="6089904" y="3017520"/>
+            <a:ext cx="2651760" cy="1737360"/>
           </a:xfrm>
           <a:prstGeom prst="rect">
             <a:avLst/>
@@ -6928,14 +5850,14 @@
       </p:sp>
       <p:sp>
         <p:nvSpPr>
-          <p:cNvPr id="20" name="Text 18"/>
-          <p:cNvSpPr/>
-          <p:nvPr/>
-        </p:nvSpPr>
-        <p:spPr>
-          <a:xfrm>
-            <a:off x="5568696" y="1938528"/>
-            <a:ext cx="365760" cy="320040"/>
+          <p:cNvPr id="13" name="Text 11"/>
+          <p:cNvSpPr/>
+          <p:nvPr/>
+        </p:nvSpPr>
+        <p:spPr>
+          <a:xfrm>
+            <a:off x="6272784" y="3200400"/>
+            <a:ext cx="2286000" cy="365760"/>
           </a:xfrm>
           <a:prstGeom prst="rect">
             <a:avLst/>
@@ -6951,30 +5873,30 @@
               <a:buNone/>
             </a:pPr>
             <a:r>
-              <a:rPr lang="en-US" sz="1100" dirty="0">
-                <a:solidFill>
-                  <a:srgbClr val="292929"/>
+              <a:rPr lang="en-US" sz="1400" b="1" dirty="0">
+                <a:solidFill>
+                  <a:srgbClr val="FFFFFF"/>
                 </a:solidFill>
                 <a:latin typeface="Calibri" pitchFamily="34" charset="0"/>
                 <a:ea typeface="Calibri" pitchFamily="34" charset="-122"/>
                 <a:cs typeface="Calibri" pitchFamily="34" charset="-120"/>
               </a:rPr>
-              <a:t>4</a:t>
-            </a:r>
-            <a:endParaRPr lang="en-US" sz="1100" dirty="0"/>
-          </a:p>
-        </p:txBody>
-      </p:sp>
-      <p:sp>
-        <p:nvSpPr>
-          <p:cNvPr id="21" name="Text 19"/>
-          <p:cNvSpPr/>
-          <p:nvPr/>
-        </p:nvSpPr>
-        <p:spPr>
-          <a:xfrm>
-            <a:off x="5541264" y="2304288"/>
-            <a:ext cx="1280160" cy="347472"/>
+              <a:t>Персонализация</a:t>
+            </a:r>
+            <a:endParaRPr lang="en-US" sz="1400" dirty="0"/>
+          </a:p>
+        </p:txBody>
+      </p:sp>
+      <p:sp>
+        <p:nvSpPr>
+          <p:cNvPr id="14" name="Text 12"/>
+          <p:cNvSpPr/>
+          <p:nvPr/>
+        </p:nvSpPr>
+        <p:spPr>
+          <a:xfrm>
+            <a:off x="6272784" y="3657600"/>
+            <a:ext cx="2286000" cy="822960"/>
           </a:xfrm>
           <a:prstGeom prst="rect">
             <a:avLst/>
@@ -6990,46 +5912,7 @@
               <a:buNone/>
             </a:pPr>
             <a:r>
-              <a:rPr lang="en-US" sz="1300" b="1" dirty="0">
-                <a:solidFill>
-                  <a:srgbClr val="FFFFFF"/>
-                </a:solidFill>
-                <a:latin typeface="Calibri" pitchFamily="34" charset="0"/>
-                <a:ea typeface="Calibri" pitchFamily="34" charset="-122"/>
-                <a:cs typeface="Calibri" pitchFamily="34" charset="-120"/>
-              </a:rPr>
-              <a:t>MongoDB</a:t>
-            </a:r>
-            <a:endParaRPr lang="en-US" sz="1300" dirty="0"/>
-          </a:p>
-        </p:txBody>
-      </p:sp>
-      <p:sp>
-        <p:nvSpPr>
-          <p:cNvPr id="22" name="Text 20"/>
-          <p:cNvSpPr/>
-          <p:nvPr/>
-        </p:nvSpPr>
-        <p:spPr>
-          <a:xfrm>
-            <a:off x="5541264" y="2679192"/>
-            <a:ext cx="1280160" cy="548640"/>
-          </a:xfrm>
-          <a:prstGeom prst="rect">
-            <a:avLst/>
-          </a:prstGeom>
-          <a:noFill/>
-          <a:ln/>
-        </p:spPr>
-        <p:txBody>
-          <a:bodyPr wrap="square" lIns="0" tIns="0" rIns="0" bIns="0" rtlCol="0" anchor="ctr"/>
-          <a:lstStyle/>
-          <a:p>
-            <a:pPr marL="0" indent="0">
-              <a:buNone/>
-            </a:pPr>
-            <a:r>
-              <a:rPr lang="en-US" sz="950" dirty="0">
+              <a:rPr lang="en-US" sz="1100" dirty="0">
                 <a:solidFill>
                   <a:srgbClr val="666666"/>
                 </a:solidFill>
@@ -7037,16 +5920,16 @@
                 <a:ea typeface="Calibri Light" pitchFamily="34" charset="-122"/>
                 <a:cs typeface="Calibri Light" pitchFamily="34" charset="-120"/>
               </a:rPr>
-              <a:t>Лична база данни</a:t>
-            </a:r>
-            <a:endParaRPr lang="en-US" sz="950" dirty="0"/>
-          </a:p>
-          <a:p>
-            <a:pPr marL="0" indent="0">
-              <a:buNone/>
-            </a:pPr>
-            <a:r>
-              <a:rPr lang="en-US" sz="950" dirty="0">
+              <a:t>Учи се от потребителя</a:t>
+            </a:r>
+            <a:endParaRPr lang="en-US" sz="1100" dirty="0"/>
+          </a:p>
+          <a:p>
+            <a:pPr marL="0" indent="0">
+              <a:buNone/>
+            </a:pPr>
+            <a:r>
+              <a:rPr lang="en-US" sz="1100" dirty="0">
                 <a:solidFill>
                   <a:srgbClr val="666666"/>
                 </a:solidFill>
@@ -7054,425 +5937,9 @@
                 <a:ea typeface="Calibri Light" pitchFamily="34" charset="-122"/>
                 <a:cs typeface="Calibri Light" pitchFamily="34" charset="-120"/>
               </a:rPr>
-              <a:t>филтрира</a:t>
-            </a:r>
-            <a:endParaRPr lang="en-US" sz="950" dirty="0"/>
-          </a:p>
-        </p:txBody>
-      </p:sp>
-      <p:sp>
-        <p:nvSpPr>
-          <p:cNvPr id="23" name="Shape 21"/>
-          <p:cNvSpPr/>
-          <p:nvPr/>
-        </p:nvSpPr>
-        <p:spPr>
-          <a:xfrm>
-            <a:off x="6931152" y="2560320"/>
-            <a:ext cx="182880" cy="0"/>
-          </a:xfrm>
-          <a:prstGeom prst="line">
-            <a:avLst/>
-          </a:prstGeom>
-          <a:noFill/>
-          <a:ln w="12700">
-            <a:solidFill>
-              <a:srgbClr val="282828"/>
-            </a:solidFill>
-            <a:prstDash val="solid"/>
-          </a:ln>
-        </p:spPr>
-      </p:sp>
-      <p:sp>
-        <p:nvSpPr>
-          <p:cNvPr id="24" name="Shape 22"/>
-          <p:cNvSpPr/>
-          <p:nvPr/>
-        </p:nvSpPr>
-        <p:spPr>
-          <a:xfrm>
-            <a:off x="7150608" y="1828800"/>
-            <a:ext cx="1463040" cy="1463040"/>
-          </a:xfrm>
-          <a:prstGeom prst="rect">
-            <a:avLst/>
-          </a:prstGeom>
-          <a:solidFill>
-            <a:srgbClr val="111111"/>
-          </a:solidFill>
-          <a:ln w="6350">
-            <a:solidFill>
-              <a:srgbClr val="333333"/>
-            </a:solidFill>
-            <a:prstDash val="solid"/>
-          </a:ln>
-          <a:effectLst>
-            <a:outerShdw blurRad="254000" dist="50800" dir="8100000" algn="bl" rotWithShape="0">
-              <a:srgbClr val="000000">
-                <a:alpha val="50000"/>
-              </a:srgbClr>
-            </a:outerShdw>
-          </a:effectLst>
-        </p:spPr>
-      </p:sp>
-      <p:sp>
-        <p:nvSpPr>
-          <p:cNvPr id="25" name="Text 23"/>
-          <p:cNvSpPr/>
-          <p:nvPr/>
-        </p:nvSpPr>
-        <p:spPr>
-          <a:xfrm>
-            <a:off x="7287768" y="1938528"/>
-            <a:ext cx="365760" cy="320040"/>
-          </a:xfrm>
-          <a:prstGeom prst="rect">
-            <a:avLst/>
-          </a:prstGeom>
-          <a:noFill/>
-          <a:ln/>
-        </p:spPr>
-        <p:txBody>
-          <a:bodyPr wrap="square" lIns="0" tIns="0" rIns="0" bIns="0" rtlCol="0" anchor="ctr"/>
-          <a:lstStyle/>
-          <a:p>
-            <a:pPr marL="0" indent="0">
-              <a:buNone/>
-            </a:pPr>
-            <a:r>
-              <a:rPr lang="en-US" sz="1100" dirty="0">
-                <a:solidFill>
-                  <a:srgbClr val="292929"/>
-                </a:solidFill>
-                <a:latin typeface="Calibri" pitchFamily="34" charset="0"/>
-                <a:ea typeface="Calibri" pitchFamily="34" charset="-122"/>
-                <a:cs typeface="Calibri" pitchFamily="34" charset="-120"/>
-              </a:rPr>
-              <a:t>5</a:t>
+              <a:t>автоматично</a:t>
             </a:r>
             <a:endParaRPr lang="en-US" sz="1100" dirty="0"/>
-          </a:p>
-        </p:txBody>
-      </p:sp>
-      <p:sp>
-        <p:nvSpPr>
-          <p:cNvPr id="26" name="Text 24"/>
-          <p:cNvSpPr/>
-          <p:nvPr/>
-        </p:nvSpPr>
-        <p:spPr>
-          <a:xfrm>
-            <a:off x="7260336" y="2304288"/>
-            <a:ext cx="1280160" cy="347472"/>
-          </a:xfrm>
-          <a:prstGeom prst="rect">
-            <a:avLst/>
-          </a:prstGeom>
-          <a:noFill/>
-          <a:ln/>
-        </p:spPr>
-        <p:txBody>
-          <a:bodyPr wrap="square" lIns="0" tIns="0" rIns="0" bIns="0" rtlCol="0" anchor="ctr"/>
-          <a:lstStyle/>
-          <a:p>
-            <a:pPr marL="0" indent="0">
-              <a:buNone/>
-            </a:pPr>
-            <a:r>
-              <a:rPr lang="en-US" sz="1300" b="1" dirty="0">
-                <a:solidFill>
-                  <a:srgbClr val="FFFFFF"/>
-                </a:solidFill>
-                <a:latin typeface="Calibri" pitchFamily="34" charset="0"/>
-                <a:ea typeface="Calibri" pitchFamily="34" charset="-122"/>
-                <a:cs typeface="Calibri" pitchFamily="34" charset="-120"/>
-              </a:rPr>
-              <a:t>Изход</a:t>
-            </a:r>
-            <a:endParaRPr lang="en-US" sz="1300" dirty="0"/>
-          </a:p>
-        </p:txBody>
-      </p:sp>
-      <p:sp>
-        <p:nvSpPr>
-          <p:cNvPr id="27" name="Text 25"/>
-          <p:cNvSpPr/>
-          <p:nvPr/>
-        </p:nvSpPr>
-        <p:spPr>
-          <a:xfrm>
-            <a:off x="7260336" y="2679192"/>
-            <a:ext cx="1280160" cy="548640"/>
-          </a:xfrm>
-          <a:prstGeom prst="rect">
-            <a:avLst/>
-          </a:prstGeom>
-          <a:noFill/>
-          <a:ln/>
-        </p:spPr>
-        <p:txBody>
-          <a:bodyPr wrap="square" lIns="0" tIns="0" rIns="0" bIns="0" rtlCol="0" anchor="ctr"/>
-          <a:lstStyle/>
-          <a:p>
-            <a:pPr marL="0" indent="0">
-              <a:buNone/>
-            </a:pPr>
-            <a:r>
-              <a:rPr lang="en-US" sz="950" dirty="0">
-                <a:solidFill>
-                  <a:srgbClr val="666666"/>
-                </a:solidFill>
-                <a:latin typeface="Calibri Light" pitchFamily="34" charset="0"/>
-                <a:ea typeface="Calibri Light" pitchFamily="34" charset="-122"/>
-                <a:cs typeface="Calibri Light" pitchFamily="34" charset="-120"/>
-              </a:rPr>
-              <a:t>TTS или действие</a:t>
-            </a:r>
-            <a:endParaRPr lang="en-US" sz="950" dirty="0"/>
-          </a:p>
-          <a:p>
-            <a:pPr marL="0" indent="0">
-              <a:buNone/>
-            </a:pPr>
-            <a:r>
-              <a:rPr lang="en-US" sz="950" dirty="0">
-                <a:solidFill>
-                  <a:srgbClr val="666666"/>
-                </a:solidFill>
-                <a:latin typeface="Calibri Light" pitchFamily="34" charset="0"/>
-                <a:ea typeface="Calibri Light" pitchFamily="34" charset="-122"/>
-                <a:cs typeface="Calibri Light" pitchFamily="34" charset="-120"/>
-              </a:rPr>
-              <a:t>се изпълнява</a:t>
-            </a:r>
-            <a:endParaRPr lang="en-US" sz="950" dirty="0"/>
-          </a:p>
-        </p:txBody>
-      </p:sp>
-      <p:sp>
-        <p:nvSpPr>
-          <p:cNvPr id="28" name="Text 26"/>
-          <p:cNvSpPr/>
-          <p:nvPr/>
-        </p:nvSpPr>
-        <p:spPr>
-          <a:xfrm>
-            <a:off x="2856204" y="3520440"/>
-            <a:ext cx="1463040" cy="256032"/>
-          </a:xfrm>
-          <a:prstGeom prst="rect">
-            <a:avLst/>
-          </a:prstGeom>
-          <a:noFill/>
-          <a:ln/>
-        </p:spPr>
-        <p:txBody>
-          <a:bodyPr wrap="square" rtlCol="0" anchor="ctr"/>
-          <a:lstStyle/>
-          <a:p>
-            <a:pPr marL="0" indent="0" algn="ctr">
-              <a:buNone/>
-            </a:pPr>
-            <a:r>
-              <a:rPr lang="en-US" sz="900" kern="0" spc="100" dirty="0">
-                <a:solidFill>
-                  <a:schemeClr val="bg1">
-                    <a:lumMod val="50000"/>
-                  </a:schemeClr>
-                </a:solidFill>
-                <a:latin typeface="Calibri" pitchFamily="34" charset="0"/>
-                <a:ea typeface="Calibri" pitchFamily="34" charset="-122"/>
-                <a:cs typeface="Calibri" pitchFamily="34" charset="-120"/>
-              </a:rPr>
-              <a:t>WebSocket</a:t>
-            </a:r>
-            <a:endParaRPr lang="en-US" sz="900" dirty="0">
-              <a:solidFill>
-                <a:schemeClr val="bg1">
-                  <a:lumMod val="50000"/>
-                </a:schemeClr>
-              </a:solidFill>
-            </a:endParaRPr>
-          </a:p>
-        </p:txBody>
-      </p:sp>
-      <p:sp>
-        <p:nvSpPr>
-          <p:cNvPr id="29" name="Shape 27"/>
-          <p:cNvSpPr/>
-          <p:nvPr/>
-        </p:nvSpPr>
-        <p:spPr>
-          <a:xfrm>
-            <a:off x="1463040" y="3749040"/>
-            <a:ext cx="2926080" cy="0"/>
-          </a:xfrm>
-          <a:prstGeom prst="line">
-            <a:avLst/>
-          </a:prstGeom>
-          <a:noFill/>
-          <a:ln w="6350">
-            <a:solidFill>
-              <a:schemeClr val="bg1">
-                <a:lumMod val="50000"/>
-              </a:schemeClr>
-            </a:solidFill>
-            <a:prstDash val="dash"/>
-          </a:ln>
-        </p:spPr>
-      </p:sp>
-      <p:sp>
-        <p:nvSpPr>
-          <p:cNvPr id="30" name="Text 28"/>
-          <p:cNvSpPr/>
-          <p:nvPr/>
-        </p:nvSpPr>
-        <p:spPr>
-          <a:xfrm>
-            <a:off x="4393581" y="3520440"/>
-            <a:ext cx="1828800" cy="256032"/>
-          </a:xfrm>
-          <a:prstGeom prst="rect">
-            <a:avLst/>
-          </a:prstGeom>
-          <a:noFill/>
-          <a:ln/>
-        </p:spPr>
-        <p:txBody>
-          <a:bodyPr wrap="square" rtlCol="0" anchor="ctr"/>
-          <a:lstStyle/>
-          <a:p>
-            <a:pPr marL="0" indent="0" algn="ctr">
-              <a:buNone/>
-            </a:pPr>
-            <a:r>
-              <a:rPr lang="en-US" sz="900" kern="0" spc="100" dirty="0">
-                <a:solidFill>
-                  <a:schemeClr val="bg1">
-                    <a:lumMod val="50000"/>
-                  </a:schemeClr>
-                </a:solidFill>
-                <a:latin typeface="Calibri" pitchFamily="34" charset="0"/>
-                <a:ea typeface="Calibri" pitchFamily="34" charset="-122"/>
-                <a:cs typeface="Calibri" pitchFamily="34" charset="-120"/>
-              </a:rPr>
-              <a:t>FastAPI backend</a:t>
-            </a:r>
-            <a:endParaRPr lang="en-US" sz="900" dirty="0">
-              <a:solidFill>
-                <a:schemeClr val="bg1">
-                  <a:lumMod val="50000"/>
-                </a:schemeClr>
-              </a:solidFill>
-            </a:endParaRPr>
-          </a:p>
-        </p:txBody>
-      </p:sp>
-      <p:sp>
-        <p:nvSpPr>
-          <p:cNvPr id="31" name="Shape 29"/>
-          <p:cNvSpPr/>
-          <p:nvPr/>
-        </p:nvSpPr>
-        <p:spPr>
-          <a:xfrm>
-            <a:off x="4389120" y="3749040"/>
-            <a:ext cx="3022724" cy="0"/>
-          </a:xfrm>
-          <a:prstGeom prst="line">
-            <a:avLst/>
-          </a:prstGeom>
-          <a:noFill/>
-          <a:ln w="6350">
-            <a:solidFill>
-              <a:schemeClr val="bg1">
-                <a:lumMod val="50000"/>
-              </a:schemeClr>
-            </a:solidFill>
-            <a:prstDash val="dash"/>
-          </a:ln>
-        </p:spPr>
-      </p:sp>
-      <p:pic>
-        <p:nvPicPr>
-          <p:cNvPr id="32" name="Picture 31">
-            <a:extLst>
-              <a:ext uri="{FF2B5EF4-FFF2-40B4-BE49-F238E27FC236}">
-                <a16:creationId xmlns:a16="http://schemas.microsoft.com/office/drawing/2014/main" id="{59C4F3BE-B3CA-43D8-8F62-1A6B21A69755}"/>
-              </a:ext>
-            </a:extLst>
-          </p:cNvPr>
-          <p:cNvPicPr>
-            <a:picLocks noChangeAspect="1"/>
-          </p:cNvPicPr>
-          <p:nvPr/>
-        </p:nvPicPr>
-        <p:blipFill>
-          <a:blip r:embed="rId3"/>
-          <a:stretch>
-            <a:fillRect/>
-          </a:stretch>
-        </p:blipFill>
-        <p:spPr>
-          <a:xfrm>
-            <a:off x="-37560428" y="578523"/>
-            <a:ext cx="5976004" cy="3993477"/>
-          </a:xfrm>
-          <a:prstGeom prst="rect">
-            <a:avLst/>
-          </a:prstGeom>
-        </p:spPr>
-      </p:pic>
-      <p:sp>
-        <p:nvSpPr>
-          <p:cNvPr id="34" name="Text 26">
-            <a:extLst>
-              <a:ext uri="{FF2B5EF4-FFF2-40B4-BE49-F238E27FC236}">
-                <a16:creationId xmlns:a16="http://schemas.microsoft.com/office/drawing/2014/main" id="{E8219526-4DB8-4BE3-9624-B6F02055BBDD}"/>
-              </a:ext>
-            </a:extLst>
-          </p:cNvPr>
-          <p:cNvSpPr/>
-          <p:nvPr/>
-        </p:nvSpPr>
-        <p:spPr>
-          <a:xfrm>
-            <a:off x="1916634" y="3812975"/>
-            <a:ext cx="5310731" cy="256032"/>
-          </a:xfrm>
-          <a:prstGeom prst="rect">
-            <a:avLst/>
-          </a:prstGeom>
-          <a:noFill/>
-          <a:ln/>
-        </p:spPr>
-        <p:txBody>
-          <a:bodyPr wrap="square" rtlCol="0" anchor="ctr"/>
-          <a:lstStyle/>
-          <a:p>
-            <a:pPr marL="0" indent="0" algn="ctr">
-              <a:buNone/>
-            </a:pPr>
-            <a:r>
-              <a:rPr lang="en-US" sz="900" kern="0" spc="100" dirty="0">
-                <a:solidFill>
-                  <a:schemeClr val="bg1">
-                    <a:lumMod val="50000"/>
-                  </a:schemeClr>
-                </a:solidFill>
-                <a:latin typeface="Calibri" pitchFamily="34" charset="0"/>
-                <a:ea typeface="Calibri" pitchFamily="34" charset="-122"/>
-                <a:cs typeface="Calibri" pitchFamily="34" charset="-120"/>
-              </a:rPr>
-              <a:t>ESP32 → WebSocket → FastAPI → MongoDB → distilGPT-2 → WebSocket → React → TTS</a:t>
-            </a:r>
-            <a:endParaRPr lang="en-US" sz="900" dirty="0">
-              <a:solidFill>
-                <a:schemeClr val="bg1">
-                  <a:lumMod val="50000"/>
-                </a:schemeClr>
-              </a:solidFill>
-            </a:endParaRPr>
           </a:p>
         </p:txBody>
       </p:sp>
@@ -7568,8 +6035,8 @@
         </p:nvSpPr>
         <p:spPr>
           <a:xfrm>
-            <a:off x="9207138" y="640080"/>
-            <a:ext cx="8229600" cy="548640"/>
+            <a:off x="457200" y="640080"/>
+            <a:ext cx="4572000" cy="548640"/>
           </a:xfrm>
           <a:prstGeom prst="rect">
             <a:avLst/>
@@ -7585,7 +6052,7 @@
               <a:buNone/>
             </a:pPr>
             <a:r>
-              <a:rPr lang="en-US" sz="3200" dirty="0">
+              <a:rPr lang="bg-BG" sz="3200" dirty="0">
                 <a:solidFill>
                   <a:srgbClr val="FFFFFF"/>
                 </a:solidFill>
@@ -7593,7 +6060,7 @@
                 <a:ea typeface="Calibri Light" pitchFamily="34" charset="-122"/>
                 <a:cs typeface="Calibri Light" pitchFamily="34" charset="-120"/>
               </a:rPr>
-              <a:t>Как работи?</a:t>
+              <a:t>С какво се отличаваме</a:t>
             </a:r>
             <a:endParaRPr lang="en-US" sz="3200" dirty="0"/>
           </a:p>
@@ -7601,14 +6068,14 @@
       </p:sp>
       <p:sp>
         <p:nvSpPr>
-          <p:cNvPr id="4" name="Shape 2"/>
-          <p:cNvSpPr/>
-          <p:nvPr/>
-        </p:nvSpPr>
-        <p:spPr>
-          <a:xfrm>
-            <a:off x="1129990" y="527821"/>
-            <a:ext cx="6889619" cy="4408448"/>
+          <p:cNvPr id="5" name="Shape 3"/>
+          <p:cNvSpPr/>
+          <p:nvPr/>
+        </p:nvSpPr>
+        <p:spPr>
+          <a:xfrm>
+            <a:off x="377280" y="2462535"/>
+            <a:ext cx="8389440" cy="2197413"/>
           </a:xfrm>
           <a:prstGeom prst="rect">
             <a:avLst/>
@@ -7633,14 +6100,14 @@
       </p:sp>
       <p:sp>
         <p:nvSpPr>
-          <p:cNvPr id="5" name="Text 3"/>
-          <p:cNvSpPr/>
-          <p:nvPr/>
-        </p:nvSpPr>
-        <p:spPr>
-          <a:xfrm>
-            <a:off x="9235761" y="1938528"/>
-            <a:ext cx="365760" cy="320040"/>
+          <p:cNvPr id="6" name="Text 4"/>
+          <p:cNvSpPr/>
+          <p:nvPr/>
+        </p:nvSpPr>
+        <p:spPr>
+          <a:xfrm>
+            <a:off x="637200" y="2603268"/>
+            <a:ext cx="3291840" cy="320040"/>
           </a:xfrm>
           <a:prstGeom prst="rect">
             <a:avLst/>
@@ -7656,15 +6123,15 @@
               <a:buNone/>
             </a:pPr>
             <a:r>
-              <a:rPr lang="en-US" sz="1100" dirty="0">
-                <a:solidFill>
-                  <a:srgbClr val="292929"/>
+              <a:rPr lang="bg-BG" sz="1100" kern="0" spc="200" dirty="0">
+                <a:solidFill>
+                  <a:srgbClr val="666666"/>
                 </a:solidFill>
                 <a:latin typeface="Calibri" pitchFamily="34" charset="0"/>
                 <a:ea typeface="Calibri" pitchFamily="34" charset="-122"/>
                 <a:cs typeface="Calibri" pitchFamily="34" charset="-120"/>
               </a:rPr>
-              <a:t>1</a:t>
+              <a:t>С какво се отличаваме</a:t>
             </a:r>
             <a:endParaRPr lang="en-US" sz="1100" dirty="0"/>
           </a:p>
@@ -7672,126 +6139,132 @@
       </p:sp>
       <p:sp>
         <p:nvSpPr>
-          <p:cNvPr id="6" name="Text 4"/>
-          <p:cNvSpPr/>
-          <p:nvPr/>
-        </p:nvSpPr>
-        <p:spPr>
-          <a:xfrm>
-            <a:off x="9208329" y="2304288"/>
-            <a:ext cx="1280160" cy="347472"/>
-          </a:xfrm>
-          <a:prstGeom prst="rect">
-            <a:avLst/>
-          </a:prstGeom>
-          <a:noFill/>
-          <a:ln/>
-        </p:spPr>
-        <p:txBody>
-          <a:bodyPr wrap="square" lIns="0" tIns="0" rIns="0" bIns="0" rtlCol="0" anchor="ctr"/>
-          <a:lstStyle/>
-          <a:p>
-            <a:pPr marL="0" indent="0">
-              <a:buNone/>
-            </a:pPr>
-            <a:r>
-              <a:rPr lang="en-US" sz="1300" b="1" dirty="0">
-                <a:solidFill>
-                  <a:srgbClr val="FFFFFF"/>
-                </a:solidFill>
-                <a:latin typeface="Calibri" pitchFamily="34" charset="0"/>
-                <a:ea typeface="Calibri" pitchFamily="34" charset="-122"/>
-                <a:cs typeface="Calibri" pitchFamily="34" charset="-120"/>
-              </a:rPr>
-              <a:t>Сензори</a:t>
-            </a:r>
-            <a:endParaRPr lang="en-US" sz="1300" dirty="0"/>
-          </a:p>
-        </p:txBody>
-      </p:sp>
-      <p:sp>
-        <p:nvSpPr>
-          <p:cNvPr id="7" name="Text 5"/>
-          <p:cNvSpPr/>
-          <p:nvPr/>
-        </p:nvSpPr>
-        <p:spPr>
-          <a:xfrm>
-            <a:off x="9208329" y="2679192"/>
-            <a:ext cx="1280160" cy="548640"/>
-          </a:xfrm>
-          <a:prstGeom prst="rect">
-            <a:avLst/>
-          </a:prstGeom>
-          <a:noFill/>
-          <a:ln/>
-        </p:spPr>
-        <p:txBody>
-          <a:bodyPr wrap="square" lIns="0" tIns="0" rIns="0" bIns="0" rtlCol="0" anchor="ctr"/>
-          <a:lstStyle/>
-          <a:p>
-            <a:pPr marL="0" indent="0">
-              <a:buNone/>
-            </a:pPr>
-            <a:r>
-              <a:rPr lang="en-US" sz="950" dirty="0">
-                <a:solidFill>
-                  <a:srgbClr val="666666"/>
+          <p:cNvPr id="7" name="Shape 5"/>
+          <p:cNvSpPr/>
+          <p:nvPr/>
+        </p:nvSpPr>
+        <p:spPr>
+          <a:xfrm>
+            <a:off x="662688" y="3198420"/>
+            <a:ext cx="64008" cy="64008"/>
+          </a:xfrm>
+          <a:prstGeom prst="ellipse">
+            <a:avLst/>
+          </a:prstGeom>
+          <a:solidFill>
+            <a:srgbClr val="444444"/>
+          </a:solidFill>
+          <a:ln w="12700">
+            <a:solidFill>
+              <a:srgbClr val="444444"/>
+            </a:solidFill>
+            <a:prstDash val="solid"/>
+          </a:ln>
+        </p:spPr>
+      </p:sp>
+      <p:sp>
+        <p:nvSpPr>
+          <p:cNvPr id="10" name="Text 8"/>
+          <p:cNvSpPr/>
+          <p:nvPr/>
+        </p:nvSpPr>
+        <p:spPr>
+          <a:xfrm>
+            <a:off x="820080" y="2851686"/>
+            <a:ext cx="7199541" cy="739647"/>
+          </a:xfrm>
+          <a:prstGeom prst="rect">
+            <a:avLst/>
+          </a:prstGeom>
+          <a:noFill/>
+          <a:ln/>
+        </p:spPr>
+        <p:txBody>
+          <a:bodyPr wrap="square" rtlCol="0" anchor="ctr"/>
+          <a:lstStyle/>
+          <a:p>
+            <a:pPr marL="0" indent="0">
+              <a:buNone/>
+            </a:pPr>
+            <a:r>
+              <a:rPr lang="ru-RU" sz="1200" dirty="0">
+                <a:solidFill>
+                  <a:srgbClr val="E8E8E8"/>
                 </a:solidFill>
                 <a:latin typeface="Calibri Light" pitchFamily="34" charset="0"/>
                 <a:ea typeface="Calibri Light" pitchFamily="34" charset="-122"/>
                 <a:cs typeface="Calibri Light" pitchFamily="34" charset="-120"/>
               </a:rPr>
-              <a:t>ESP32 чете eye tracking,</a:t>
-            </a:r>
-            <a:r>
-              <a:rPr lang="en-US" sz="950" dirty="0"/>
-              <a:t> </a:t>
-            </a:r>
-            <a:r>
-              <a:rPr lang="en-US" sz="950" dirty="0">
-                <a:solidFill>
-                  <a:srgbClr val="666666"/>
+              <a:t>Нашата система е като мултиизмерен език</a:t>
+            </a:r>
+            <a:r>
+              <a:rPr lang="en-US" sz="1200" dirty="0">
+                <a:solidFill>
+                  <a:srgbClr val="E8E8E8"/>
                 </a:solidFill>
                 <a:latin typeface="Calibri Light" pitchFamily="34" charset="0"/>
                 <a:ea typeface="Calibri Light" pitchFamily="34" charset="-122"/>
                 <a:cs typeface="Calibri Light" pitchFamily="34" charset="-120"/>
               </a:rPr>
-              <a:t>акселерометър</a:t>
-            </a:r>
-            <a:r>
-              <a:rPr lang="bg-BG" sz="950" dirty="0">
-                <a:solidFill>
-                  <a:srgbClr val="666666"/>
+              <a:t> </a:t>
+            </a:r>
+            <a:r>
+              <a:rPr lang="bg-BG" sz="1200" dirty="0">
+                <a:solidFill>
+                  <a:srgbClr val="E8E8E8"/>
                 </a:solidFill>
                 <a:latin typeface="Calibri Light" pitchFamily="34" charset="0"/>
                 <a:ea typeface="Calibri Light" pitchFamily="34" charset="-122"/>
                 <a:cs typeface="Calibri Light" pitchFamily="34" charset="-120"/>
               </a:rPr>
-              <a:t> и сензора за допир</a:t>
-            </a:r>
-            <a:endParaRPr lang="en-US" sz="950" dirty="0"/>
-          </a:p>
-        </p:txBody>
-      </p:sp>
-      <p:sp>
-        <p:nvSpPr>
-          <p:cNvPr id="8" name="Shape 6"/>
-          <p:cNvSpPr/>
-          <p:nvPr/>
-        </p:nvSpPr>
-        <p:spPr>
-          <a:xfrm>
-            <a:off x="10598217" y="2560320"/>
-            <a:ext cx="182880" cy="0"/>
-          </a:xfrm>
-          <a:prstGeom prst="line">
-            <a:avLst/>
-          </a:prstGeom>
-          <a:noFill/>
+              <a:t>и в същото време е </a:t>
+            </a:r>
+            <a:r>
+              <a:rPr lang="ru-RU" sz="1200" dirty="0">
+                <a:solidFill>
+                  <a:srgbClr val="E8E8E8"/>
+                </a:solidFill>
+                <a:latin typeface="Calibri Light" pitchFamily="34" charset="0"/>
+                <a:ea typeface="Calibri Light" pitchFamily="34" charset="-122"/>
+                <a:cs typeface="Calibri Light" pitchFamily="34" charset="-120"/>
+              </a:rPr>
+              <a:t>адаптивна, гъвкава и достъпна</a:t>
+            </a:r>
+            <a:r>
+              <a:rPr lang="en-US" sz="1200" dirty="0">
+                <a:solidFill>
+                  <a:srgbClr val="E8E8E8"/>
+                </a:solidFill>
+                <a:latin typeface="Calibri Light" pitchFamily="34" charset="0"/>
+                <a:ea typeface="Calibri Light" pitchFamily="34" charset="-122"/>
+                <a:cs typeface="Calibri Light" pitchFamily="34" charset="-120"/>
+              </a:rPr>
+              <a:t>.</a:t>
+            </a:r>
+            <a:endParaRPr lang="en-US" sz="1200" dirty="0"/>
+          </a:p>
+        </p:txBody>
+      </p:sp>
+      <p:sp>
+        <p:nvSpPr>
+          <p:cNvPr id="11" name="Shape 9"/>
+          <p:cNvSpPr/>
+          <p:nvPr/>
+        </p:nvSpPr>
+        <p:spPr>
+          <a:xfrm>
+            <a:off x="662688" y="3668148"/>
+            <a:ext cx="64008" cy="64008"/>
+          </a:xfrm>
+          <a:prstGeom prst="ellipse">
+            <a:avLst/>
+          </a:prstGeom>
+          <a:solidFill>
+            <a:srgbClr val="444444"/>
+          </a:solidFill>
           <a:ln w="12700">
             <a:solidFill>
-              <a:srgbClr val="282828"/>
+              <a:srgbClr val="444444"/>
             </a:solidFill>
             <a:prstDash val="solid"/>
           </a:ln>
@@ -7799,14 +6272,70 @@
       </p:sp>
       <p:sp>
         <p:nvSpPr>
-          <p:cNvPr id="9" name="Shape 7"/>
-          <p:cNvSpPr/>
-          <p:nvPr/>
-        </p:nvSpPr>
-        <p:spPr>
-          <a:xfrm>
-            <a:off x="10817673" y="1828800"/>
-            <a:ext cx="1463040" cy="1463040"/>
+          <p:cNvPr id="12" name="Text 10"/>
+          <p:cNvSpPr/>
+          <p:nvPr/>
+        </p:nvSpPr>
+        <p:spPr>
+          <a:xfrm>
+            <a:off x="805680" y="3396663"/>
+            <a:ext cx="7128332" cy="597609"/>
+          </a:xfrm>
+          <a:prstGeom prst="rect">
+            <a:avLst/>
+          </a:prstGeom>
+          <a:noFill/>
+          <a:ln/>
+        </p:spPr>
+        <p:txBody>
+          <a:bodyPr wrap="square" rtlCol="0" anchor="ctr"/>
+          <a:lstStyle/>
+          <a:p>
+            <a:pPr marL="0" indent="0">
+              <a:buNone/>
+            </a:pPr>
+            <a:r>
+              <a:rPr lang="ru-RU" sz="1200" dirty="0">
+                <a:solidFill>
+                  <a:srgbClr val="E8E8E8"/>
+                </a:solidFill>
+                <a:latin typeface="Calibri Light" pitchFamily="34" charset="0"/>
+                <a:ea typeface="Calibri Light" pitchFamily="34" charset="-122"/>
+                <a:cs typeface="Calibri Light" pitchFamily="34" charset="-120"/>
+              </a:rPr>
+              <a:t>Системата е модулна, което позволява лесна замяна на входните методи</a:t>
+            </a:r>
+            <a:r>
+              <a:rPr lang="en-US" sz="1200" dirty="0">
+                <a:solidFill>
+                  <a:srgbClr val="E8E8E8"/>
+                </a:solidFill>
+                <a:latin typeface="Calibri Light" pitchFamily="34" charset="0"/>
+                <a:ea typeface="Calibri Light" pitchFamily="34" charset="-122"/>
+                <a:cs typeface="Calibri Light" pitchFamily="34" charset="-120"/>
+              </a:rPr>
+              <a:t> (EEG, EMG).</a:t>
+            </a:r>
+            <a:endParaRPr lang="en-US" sz="1200" dirty="0"/>
+          </a:p>
+        </p:txBody>
+      </p:sp>
+      <p:sp>
+        <p:nvSpPr>
+          <p:cNvPr id="26" name="Shape 3">
+            <a:extLst>
+              <a:ext uri="{FF2B5EF4-FFF2-40B4-BE49-F238E27FC236}">
+                <a16:creationId xmlns:a16="http://schemas.microsoft.com/office/drawing/2014/main" id="{CCD066B9-DECD-49FA-84C5-297B514556A4}"/>
+              </a:ext>
+            </a:extLst>
+          </p:cNvPr>
+          <p:cNvSpPr/>
+          <p:nvPr/>
+        </p:nvSpPr>
+        <p:spPr>
+          <a:xfrm>
+            <a:off x="370080" y="1601847"/>
+            <a:ext cx="8389440" cy="757512"/>
           </a:xfrm>
           <a:prstGeom prst="rect">
             <a:avLst/>
@@ -7831,14 +6360,51 @@
       </p:sp>
       <p:sp>
         <p:nvSpPr>
-          <p:cNvPr id="10" name="Text 8"/>
-          <p:cNvSpPr/>
-          <p:nvPr/>
-        </p:nvSpPr>
-        <p:spPr>
-          <a:xfrm>
-            <a:off x="10954833" y="1938528"/>
-            <a:ext cx="365760" cy="320040"/>
+          <p:cNvPr id="27" name="Shape 5">
+            <a:extLst>
+              <a:ext uri="{FF2B5EF4-FFF2-40B4-BE49-F238E27FC236}">
+                <a16:creationId xmlns:a16="http://schemas.microsoft.com/office/drawing/2014/main" id="{D485E91F-615A-45C8-9A19-A82A7767FE84}"/>
+              </a:ext>
+            </a:extLst>
+          </p:cNvPr>
+          <p:cNvSpPr/>
+          <p:nvPr/>
+        </p:nvSpPr>
+        <p:spPr>
+          <a:xfrm>
+            <a:off x="638675" y="2027016"/>
+            <a:ext cx="76731" cy="64008"/>
+          </a:xfrm>
+          <a:prstGeom prst="ellipse">
+            <a:avLst/>
+          </a:prstGeom>
+          <a:solidFill>
+            <a:srgbClr val="444444"/>
+          </a:solidFill>
+          <a:ln w="12700">
+            <a:solidFill>
+              <a:srgbClr val="444444"/>
+            </a:solidFill>
+            <a:prstDash val="solid"/>
+          </a:ln>
+        </p:spPr>
+      </p:sp>
+      <p:sp>
+        <p:nvSpPr>
+          <p:cNvPr id="28" name="Text 4">
+            <a:extLst>
+              <a:ext uri="{FF2B5EF4-FFF2-40B4-BE49-F238E27FC236}">
+                <a16:creationId xmlns:a16="http://schemas.microsoft.com/office/drawing/2014/main" id="{09485891-9319-44AA-AFF7-13FAF9191BBE}"/>
+              </a:ext>
+            </a:extLst>
+          </p:cNvPr>
+          <p:cNvSpPr/>
+          <p:nvPr/>
+        </p:nvSpPr>
+        <p:spPr>
+          <a:xfrm>
+            <a:off x="610560" y="1653372"/>
+            <a:ext cx="3946144" cy="320040"/>
           </a:xfrm>
           <a:prstGeom prst="rect">
             <a:avLst/>
@@ -7854,15 +6420,15 @@
               <a:buNone/>
             </a:pPr>
             <a:r>
-              <a:rPr lang="en-US" sz="1100" dirty="0">
-                <a:solidFill>
-                  <a:srgbClr val="292929"/>
+              <a:rPr lang="bg-BG" sz="1100" kern="0" spc="200" dirty="0">
+                <a:solidFill>
+                  <a:srgbClr val="666666"/>
                 </a:solidFill>
                 <a:latin typeface="Calibri" pitchFamily="34" charset="0"/>
                 <a:ea typeface="Calibri" pitchFamily="34" charset="-122"/>
                 <a:cs typeface="Calibri" pitchFamily="34" charset="-120"/>
               </a:rPr>
-              <a:t>2</a:t>
+              <a:t>Ключова идея</a:t>
             </a:r>
             <a:endParaRPr lang="en-US" sz="1100" dirty="0"/>
           </a:p>
@@ -7870,835 +6436,129 @@
       </p:sp>
       <p:sp>
         <p:nvSpPr>
-          <p:cNvPr id="11" name="Text 9"/>
-          <p:cNvSpPr/>
-          <p:nvPr/>
-        </p:nvSpPr>
-        <p:spPr>
-          <a:xfrm>
-            <a:off x="10927401" y="2304288"/>
-            <a:ext cx="1280160" cy="347472"/>
-          </a:xfrm>
-          <a:prstGeom prst="rect">
-            <a:avLst/>
-          </a:prstGeom>
-          <a:noFill/>
-          <a:ln/>
-        </p:spPr>
-        <p:txBody>
-          <a:bodyPr wrap="square" lIns="0" tIns="0" rIns="0" bIns="0" rtlCol="0" anchor="ctr"/>
-          <a:lstStyle/>
-          <a:p>
-            <a:pPr marL="0" indent="0">
-              <a:buNone/>
-            </a:pPr>
-            <a:r>
-              <a:rPr lang="en-US" sz="1300" b="1" dirty="0">
-                <a:solidFill>
-                  <a:srgbClr val="FFFFFF"/>
-                </a:solidFill>
-                <a:latin typeface="Calibri" pitchFamily="34" charset="0"/>
-                <a:ea typeface="Calibri" pitchFamily="34" charset="-122"/>
-                <a:cs typeface="Calibri" pitchFamily="34" charset="-120"/>
-              </a:rPr>
-              <a:t>Интерфейс</a:t>
-            </a:r>
-            <a:endParaRPr lang="en-US" sz="1300" dirty="0"/>
-          </a:p>
-        </p:txBody>
-      </p:sp>
-      <p:sp>
-        <p:nvSpPr>
-          <p:cNvPr id="12" name="Text 10"/>
-          <p:cNvSpPr/>
-          <p:nvPr/>
-        </p:nvSpPr>
-        <p:spPr>
-          <a:xfrm>
-            <a:off x="10927401" y="2679192"/>
-            <a:ext cx="1280160" cy="548640"/>
-          </a:xfrm>
-          <a:prstGeom prst="rect">
-            <a:avLst/>
-          </a:prstGeom>
-          <a:noFill/>
-          <a:ln/>
-        </p:spPr>
-        <p:txBody>
-          <a:bodyPr wrap="square" lIns="0" tIns="0" rIns="0" bIns="0" rtlCol="0" anchor="ctr"/>
-          <a:lstStyle/>
-          <a:p>
-            <a:pPr marL="0" indent="0">
-              <a:buNone/>
-            </a:pPr>
-            <a:r>
-              <a:rPr lang="en-US" sz="950" dirty="0">
-                <a:solidFill>
-                  <a:srgbClr val="666666"/>
+          <p:cNvPr id="29" name="Text 6">
+            <a:extLst>
+              <a:ext uri="{FF2B5EF4-FFF2-40B4-BE49-F238E27FC236}">
+                <a16:creationId xmlns:a16="http://schemas.microsoft.com/office/drawing/2014/main" id="{4832CADF-66A1-48DA-9911-2AF167CAD2A6}"/>
+              </a:ext>
+            </a:extLst>
+          </p:cNvPr>
+          <p:cNvSpPr/>
+          <p:nvPr/>
+        </p:nvSpPr>
+        <p:spPr>
+          <a:xfrm>
+            <a:off x="809892" y="1857348"/>
+            <a:ext cx="7332129" cy="411480"/>
+          </a:xfrm>
+          <a:prstGeom prst="rect">
+            <a:avLst/>
+          </a:prstGeom>
+          <a:noFill/>
+          <a:ln/>
+        </p:spPr>
+        <p:txBody>
+          <a:bodyPr wrap="square" rtlCol="0" anchor="ctr"/>
+          <a:lstStyle/>
+          <a:p>
+            <a:pPr marL="0" indent="0">
+              <a:buNone/>
+            </a:pPr>
+            <a:r>
+              <a:rPr lang="ru-RU" sz="1200" dirty="0">
+                <a:solidFill>
+                  <a:srgbClr val="E8E8E8"/>
                 </a:solidFill>
                 <a:latin typeface="Calibri Light" pitchFamily="34" charset="0"/>
                 <a:ea typeface="Calibri Light" pitchFamily="34" charset="-122"/>
                 <a:cs typeface="Calibri Light" pitchFamily="34" charset="-120"/>
               </a:rPr>
-              <a:t>React показва думи,</a:t>
-            </a:r>
-            <a:endParaRPr lang="en-US" sz="950" dirty="0"/>
-          </a:p>
-          <a:p>
-            <a:pPr marL="0" indent="0">
-              <a:buNone/>
-            </a:pPr>
-            <a:r>
-              <a:rPr lang="en-US" sz="950" dirty="0">
-                <a:solidFill>
-                  <a:srgbClr val="666666"/>
+              <a:t>Технологията трябва да се адаптира към потребителя, вместо потребителят да се адаптира към технологията.</a:t>
+            </a:r>
+            <a:endParaRPr lang="en-US" sz="1200" dirty="0"/>
+          </a:p>
+        </p:txBody>
+      </p:sp>
+      <p:sp>
+        <p:nvSpPr>
+          <p:cNvPr id="30" name="Shape 9">
+            <a:extLst>
+              <a:ext uri="{FF2B5EF4-FFF2-40B4-BE49-F238E27FC236}">
+                <a16:creationId xmlns:a16="http://schemas.microsoft.com/office/drawing/2014/main" id="{9E352E93-9E22-4611-9A30-6B0009F4A3F4}"/>
+              </a:ext>
+            </a:extLst>
+          </p:cNvPr>
+          <p:cNvSpPr/>
+          <p:nvPr/>
+        </p:nvSpPr>
+        <p:spPr>
+          <a:xfrm>
+            <a:off x="671088" y="4158948"/>
+            <a:ext cx="64008" cy="64008"/>
+          </a:xfrm>
+          <a:prstGeom prst="ellipse">
+            <a:avLst/>
+          </a:prstGeom>
+          <a:solidFill>
+            <a:srgbClr val="444444"/>
+          </a:solidFill>
+          <a:ln w="12700">
+            <a:solidFill>
+              <a:srgbClr val="444444"/>
+            </a:solidFill>
+            <a:prstDash val="solid"/>
+          </a:ln>
+        </p:spPr>
+      </p:sp>
+      <p:sp>
+        <p:nvSpPr>
+          <p:cNvPr id="35" name="Text 10">
+            <a:extLst>
+              <a:ext uri="{FF2B5EF4-FFF2-40B4-BE49-F238E27FC236}">
+                <a16:creationId xmlns:a16="http://schemas.microsoft.com/office/drawing/2014/main" id="{6AAE4E18-6555-4889-AAFF-555B8C32EA96}"/>
+              </a:ext>
+            </a:extLst>
+          </p:cNvPr>
+          <p:cNvSpPr/>
+          <p:nvPr/>
+        </p:nvSpPr>
+        <p:spPr>
+          <a:xfrm>
+            <a:off x="805680" y="3923474"/>
+            <a:ext cx="7128332" cy="597609"/>
+          </a:xfrm>
+          <a:prstGeom prst="rect">
+            <a:avLst/>
+          </a:prstGeom>
+          <a:noFill/>
+          <a:ln/>
+        </p:spPr>
+        <p:txBody>
+          <a:bodyPr wrap="square" rtlCol="0" anchor="ctr"/>
+          <a:lstStyle/>
+          <a:p>
+            <a:pPr marL="0" indent="0">
+              <a:buNone/>
+            </a:pPr>
+            <a:r>
+              <a:rPr lang="ru-RU" sz="1200" dirty="0">
+                <a:solidFill>
+                  <a:srgbClr val="E8E8E8"/>
                 </a:solidFill>
                 <a:latin typeface="Calibri Light" pitchFamily="34" charset="0"/>
                 <a:ea typeface="Calibri Light" pitchFamily="34" charset="-122"/>
                 <a:cs typeface="Calibri Light" pitchFamily="34" charset="-120"/>
               </a:rPr>
-              <a:t>потребителят избира</a:t>
-            </a:r>
-            <a:endParaRPr lang="en-US" sz="950" dirty="0"/>
-          </a:p>
-        </p:txBody>
-      </p:sp>
-      <p:sp>
-        <p:nvSpPr>
-          <p:cNvPr id="13" name="Shape 11"/>
-          <p:cNvSpPr/>
-          <p:nvPr/>
-        </p:nvSpPr>
-        <p:spPr>
-          <a:xfrm>
-            <a:off x="12317289" y="2560320"/>
-            <a:ext cx="182880" cy="0"/>
-          </a:xfrm>
-          <a:prstGeom prst="line">
-            <a:avLst/>
-          </a:prstGeom>
-          <a:noFill/>
-          <a:ln w="12700">
-            <a:solidFill>
-              <a:srgbClr val="282828"/>
-            </a:solidFill>
-            <a:prstDash val="solid"/>
-          </a:ln>
-        </p:spPr>
-      </p:sp>
-      <p:sp>
-        <p:nvSpPr>
-          <p:cNvPr id="14" name="Shape 12"/>
-          <p:cNvSpPr/>
-          <p:nvPr/>
-        </p:nvSpPr>
-        <p:spPr>
-          <a:xfrm>
-            <a:off x="12536745" y="1828800"/>
-            <a:ext cx="1463040" cy="1463040"/>
-          </a:xfrm>
-          <a:prstGeom prst="rect">
-            <a:avLst/>
-          </a:prstGeom>
-          <a:solidFill>
-            <a:srgbClr val="111111"/>
-          </a:solidFill>
-          <a:ln w="6350">
-            <a:solidFill>
-              <a:srgbClr val="333333"/>
-            </a:solidFill>
-            <a:prstDash val="solid"/>
-          </a:ln>
-          <a:effectLst>
-            <a:outerShdw blurRad="254000" dist="50800" dir="8100000" algn="bl" rotWithShape="0">
-              <a:srgbClr val="000000">
-                <a:alpha val="50000"/>
-              </a:srgbClr>
-            </a:outerShdw>
-          </a:effectLst>
-        </p:spPr>
-      </p:sp>
-      <p:sp>
-        <p:nvSpPr>
-          <p:cNvPr id="15" name="Text 13"/>
-          <p:cNvSpPr/>
-          <p:nvPr/>
-        </p:nvSpPr>
-        <p:spPr>
-          <a:xfrm>
-            <a:off x="12673905" y="1938528"/>
-            <a:ext cx="365760" cy="320040"/>
-          </a:xfrm>
-          <a:prstGeom prst="rect">
-            <a:avLst/>
-          </a:prstGeom>
-          <a:noFill/>
-          <a:ln/>
-        </p:spPr>
-        <p:txBody>
-          <a:bodyPr wrap="square" lIns="0" tIns="0" rIns="0" bIns="0" rtlCol="0" anchor="ctr"/>
-          <a:lstStyle/>
-          <a:p>
-            <a:pPr marL="0" indent="0">
-              <a:buNone/>
-            </a:pPr>
-            <a:r>
-              <a:rPr lang="en-US" sz="1100" dirty="0">
-                <a:solidFill>
-                  <a:srgbClr val="292929"/>
-                </a:solidFill>
-                <a:latin typeface="Calibri" pitchFamily="34" charset="0"/>
-                <a:ea typeface="Calibri" pitchFamily="34" charset="-122"/>
-                <a:cs typeface="Calibri" pitchFamily="34" charset="-120"/>
-              </a:rPr>
-              <a:t>3</a:t>
-            </a:r>
-            <a:endParaRPr lang="en-US" sz="1100" dirty="0"/>
-          </a:p>
-        </p:txBody>
-      </p:sp>
-      <p:sp>
-        <p:nvSpPr>
-          <p:cNvPr id="16" name="Text 14"/>
-          <p:cNvSpPr/>
-          <p:nvPr/>
-        </p:nvSpPr>
-        <p:spPr>
-          <a:xfrm>
-            <a:off x="12646473" y="2304288"/>
-            <a:ext cx="1280160" cy="347472"/>
-          </a:xfrm>
-          <a:prstGeom prst="rect">
-            <a:avLst/>
-          </a:prstGeom>
-          <a:noFill/>
-          <a:ln/>
-        </p:spPr>
-        <p:txBody>
-          <a:bodyPr wrap="square" lIns="0" tIns="0" rIns="0" bIns="0" rtlCol="0" anchor="ctr"/>
-          <a:lstStyle/>
-          <a:p>
-            <a:pPr marL="0" indent="0">
-              <a:buNone/>
-            </a:pPr>
-            <a:r>
-              <a:rPr lang="en-US" sz="1300" b="1" dirty="0">
-                <a:solidFill>
-                  <a:srgbClr val="FFFFFF"/>
-                </a:solidFill>
-                <a:latin typeface="Calibri" pitchFamily="34" charset="0"/>
-                <a:ea typeface="Calibri" pitchFamily="34" charset="-122"/>
-                <a:cs typeface="Calibri" pitchFamily="34" charset="-120"/>
-              </a:rPr>
-              <a:t>ИИ модел</a:t>
-            </a:r>
-            <a:endParaRPr lang="en-US" sz="1300" dirty="0"/>
-          </a:p>
-        </p:txBody>
-      </p:sp>
-      <p:sp>
-        <p:nvSpPr>
-          <p:cNvPr id="17" name="Text 15"/>
-          <p:cNvSpPr/>
-          <p:nvPr/>
-        </p:nvSpPr>
-        <p:spPr>
-          <a:xfrm>
-            <a:off x="12646473" y="2679192"/>
-            <a:ext cx="1280160" cy="548640"/>
-          </a:xfrm>
-          <a:prstGeom prst="rect">
-            <a:avLst/>
-          </a:prstGeom>
-          <a:noFill/>
-          <a:ln/>
-        </p:spPr>
-        <p:txBody>
-          <a:bodyPr wrap="square" lIns="0" tIns="0" rIns="0" bIns="0" rtlCol="0" anchor="ctr"/>
-          <a:lstStyle/>
-          <a:p>
-            <a:pPr marL="0" indent="0">
-              <a:buNone/>
-            </a:pPr>
-            <a:r>
-              <a:rPr lang="en-US" sz="950" dirty="0">
-                <a:solidFill>
-                  <a:srgbClr val="666666"/>
-                </a:solidFill>
-                <a:latin typeface="Calibri Light" pitchFamily="34" charset="0"/>
-                <a:ea typeface="Calibri Light" pitchFamily="34" charset="-122"/>
-                <a:cs typeface="Calibri Light" pitchFamily="34" charset="-120"/>
-              </a:rPr>
-              <a:t>distilGPT-2 дава </a:t>
-            </a:r>
-            <a:r>
-              <a:rPr lang="bg-BG" sz="950" dirty="0">
-                <a:solidFill>
-                  <a:srgbClr val="666666"/>
-                </a:solidFill>
-                <a:latin typeface="Calibri Light" pitchFamily="34" charset="0"/>
-                <a:ea typeface="Calibri Light" pitchFamily="34" charset="-122"/>
-                <a:cs typeface="Calibri Light" pitchFamily="34" charset="-120"/>
-              </a:rPr>
-              <a:t>предложения</a:t>
-            </a:r>
-            <a:endParaRPr lang="en-US" sz="950" dirty="0"/>
-          </a:p>
-          <a:p>
-            <a:pPr marL="0" indent="0">
-              <a:buNone/>
-            </a:pPr>
-            <a:r>
-              <a:rPr lang="en-US" sz="950" dirty="0">
-                <a:solidFill>
-                  <a:srgbClr val="666666"/>
-                </a:solidFill>
-                <a:latin typeface="Calibri Light" pitchFamily="34" charset="0"/>
-                <a:ea typeface="Calibri Light" pitchFamily="34" charset="-122"/>
-                <a:cs typeface="Calibri Light" pitchFamily="34" charset="-120"/>
-              </a:rPr>
-              <a:t>за следваща дума</a:t>
-            </a:r>
-            <a:endParaRPr lang="en-US" sz="950" dirty="0"/>
-          </a:p>
-        </p:txBody>
-      </p:sp>
-      <p:sp>
-        <p:nvSpPr>
-          <p:cNvPr id="18" name="Shape 16"/>
-          <p:cNvSpPr/>
-          <p:nvPr/>
-        </p:nvSpPr>
-        <p:spPr>
-          <a:xfrm>
-            <a:off x="14036361" y="2560320"/>
-            <a:ext cx="182880" cy="0"/>
-          </a:xfrm>
-          <a:prstGeom prst="line">
-            <a:avLst/>
-          </a:prstGeom>
-          <a:noFill/>
-          <a:ln w="12700">
-            <a:solidFill>
-              <a:srgbClr val="282828"/>
-            </a:solidFill>
-            <a:prstDash val="solid"/>
-          </a:ln>
-        </p:spPr>
-      </p:sp>
-      <p:sp>
-        <p:nvSpPr>
-          <p:cNvPr id="19" name="Shape 17"/>
-          <p:cNvSpPr/>
-          <p:nvPr/>
-        </p:nvSpPr>
-        <p:spPr>
-          <a:xfrm>
-            <a:off x="14255817" y="1828800"/>
-            <a:ext cx="1463040" cy="1463040"/>
-          </a:xfrm>
-          <a:prstGeom prst="rect">
-            <a:avLst/>
-          </a:prstGeom>
-          <a:solidFill>
-            <a:srgbClr val="111111"/>
-          </a:solidFill>
-          <a:ln w="6350">
-            <a:solidFill>
-              <a:srgbClr val="333333"/>
-            </a:solidFill>
-            <a:prstDash val="solid"/>
-          </a:ln>
-          <a:effectLst>
-            <a:outerShdw blurRad="254000" dist="50800" dir="8100000" algn="bl" rotWithShape="0">
-              <a:srgbClr val="000000">
-                <a:alpha val="50000"/>
-              </a:srgbClr>
-            </a:outerShdw>
-          </a:effectLst>
-        </p:spPr>
-      </p:sp>
-      <p:sp>
-        <p:nvSpPr>
-          <p:cNvPr id="20" name="Text 18"/>
-          <p:cNvSpPr/>
-          <p:nvPr/>
-        </p:nvSpPr>
-        <p:spPr>
-          <a:xfrm>
-            <a:off x="14392977" y="1938528"/>
-            <a:ext cx="365760" cy="320040"/>
-          </a:xfrm>
-          <a:prstGeom prst="rect">
-            <a:avLst/>
-          </a:prstGeom>
-          <a:noFill/>
-          <a:ln/>
-        </p:spPr>
-        <p:txBody>
-          <a:bodyPr wrap="square" lIns="0" tIns="0" rIns="0" bIns="0" rtlCol="0" anchor="ctr"/>
-          <a:lstStyle/>
-          <a:p>
-            <a:pPr marL="0" indent="0">
-              <a:buNone/>
-            </a:pPr>
-            <a:r>
-              <a:rPr lang="en-US" sz="1100" dirty="0">
-                <a:solidFill>
-                  <a:srgbClr val="292929"/>
-                </a:solidFill>
-                <a:latin typeface="Calibri" pitchFamily="34" charset="0"/>
-                <a:ea typeface="Calibri" pitchFamily="34" charset="-122"/>
-                <a:cs typeface="Calibri" pitchFamily="34" charset="-120"/>
-              </a:rPr>
-              <a:t>4</a:t>
-            </a:r>
-            <a:endParaRPr lang="en-US" sz="1100" dirty="0"/>
-          </a:p>
-        </p:txBody>
-      </p:sp>
-      <p:sp>
-        <p:nvSpPr>
-          <p:cNvPr id="21" name="Text 19"/>
-          <p:cNvSpPr/>
-          <p:nvPr/>
-        </p:nvSpPr>
-        <p:spPr>
-          <a:xfrm>
-            <a:off x="14365545" y="2304288"/>
-            <a:ext cx="1280160" cy="347472"/>
-          </a:xfrm>
-          <a:prstGeom prst="rect">
-            <a:avLst/>
-          </a:prstGeom>
-          <a:noFill/>
-          <a:ln/>
-        </p:spPr>
-        <p:txBody>
-          <a:bodyPr wrap="square" lIns="0" tIns="0" rIns="0" bIns="0" rtlCol="0" anchor="ctr"/>
-          <a:lstStyle/>
-          <a:p>
-            <a:pPr marL="0" indent="0">
-              <a:buNone/>
-            </a:pPr>
-            <a:r>
-              <a:rPr lang="en-US" sz="1300" b="1" dirty="0">
-                <a:solidFill>
-                  <a:srgbClr val="FFFFFF"/>
-                </a:solidFill>
-                <a:latin typeface="Calibri" pitchFamily="34" charset="0"/>
-                <a:ea typeface="Calibri" pitchFamily="34" charset="-122"/>
-                <a:cs typeface="Calibri" pitchFamily="34" charset="-120"/>
-              </a:rPr>
-              <a:t>MongoDB</a:t>
-            </a:r>
-            <a:endParaRPr lang="en-US" sz="1300" dirty="0"/>
-          </a:p>
-        </p:txBody>
-      </p:sp>
-      <p:sp>
-        <p:nvSpPr>
-          <p:cNvPr id="22" name="Text 20"/>
-          <p:cNvSpPr/>
-          <p:nvPr/>
-        </p:nvSpPr>
-        <p:spPr>
-          <a:xfrm>
-            <a:off x="14365545" y="2679192"/>
-            <a:ext cx="1280160" cy="548640"/>
-          </a:xfrm>
-          <a:prstGeom prst="rect">
-            <a:avLst/>
-          </a:prstGeom>
-          <a:noFill/>
-          <a:ln/>
-        </p:spPr>
-        <p:txBody>
-          <a:bodyPr wrap="square" lIns="0" tIns="0" rIns="0" bIns="0" rtlCol="0" anchor="ctr"/>
-          <a:lstStyle/>
-          <a:p>
-            <a:pPr marL="0" indent="0">
-              <a:buNone/>
-            </a:pPr>
-            <a:r>
-              <a:rPr lang="en-US" sz="950" dirty="0">
-                <a:solidFill>
-                  <a:srgbClr val="666666"/>
-                </a:solidFill>
-                <a:latin typeface="Calibri Light" pitchFamily="34" charset="0"/>
-                <a:ea typeface="Calibri Light" pitchFamily="34" charset="-122"/>
-                <a:cs typeface="Calibri Light" pitchFamily="34" charset="-120"/>
-              </a:rPr>
-              <a:t>Лична база данни</a:t>
-            </a:r>
-            <a:endParaRPr lang="en-US" sz="950" dirty="0"/>
-          </a:p>
-          <a:p>
-            <a:pPr marL="0" indent="0">
-              <a:buNone/>
-            </a:pPr>
-            <a:r>
-              <a:rPr lang="en-US" sz="950" dirty="0">
-                <a:solidFill>
-                  <a:srgbClr val="666666"/>
-                </a:solidFill>
-                <a:latin typeface="Calibri Light" pitchFamily="34" charset="0"/>
-                <a:ea typeface="Calibri Light" pitchFamily="34" charset="-122"/>
-                <a:cs typeface="Calibri Light" pitchFamily="34" charset="-120"/>
-              </a:rPr>
-              <a:t>филтрира + буства</a:t>
-            </a:r>
-            <a:endParaRPr lang="en-US" sz="950" dirty="0"/>
-          </a:p>
-        </p:txBody>
-      </p:sp>
-      <p:sp>
-        <p:nvSpPr>
-          <p:cNvPr id="23" name="Shape 21"/>
-          <p:cNvSpPr/>
-          <p:nvPr/>
-        </p:nvSpPr>
-        <p:spPr>
-          <a:xfrm>
-            <a:off x="15755433" y="2560320"/>
-            <a:ext cx="182880" cy="0"/>
-          </a:xfrm>
-          <a:prstGeom prst="line">
-            <a:avLst/>
-          </a:prstGeom>
-          <a:noFill/>
-          <a:ln w="12700">
-            <a:solidFill>
-              <a:srgbClr val="282828"/>
-            </a:solidFill>
-            <a:prstDash val="solid"/>
-          </a:ln>
-        </p:spPr>
-      </p:sp>
-      <p:sp>
-        <p:nvSpPr>
-          <p:cNvPr id="24" name="Shape 22"/>
-          <p:cNvSpPr/>
-          <p:nvPr/>
-        </p:nvSpPr>
-        <p:spPr>
-          <a:xfrm>
-            <a:off x="15974889" y="1828800"/>
-            <a:ext cx="1463040" cy="1463040"/>
-          </a:xfrm>
-          <a:prstGeom prst="rect">
-            <a:avLst/>
-          </a:prstGeom>
-          <a:solidFill>
-            <a:srgbClr val="111111"/>
-          </a:solidFill>
-          <a:ln w="6350">
-            <a:solidFill>
-              <a:srgbClr val="333333"/>
-            </a:solidFill>
-            <a:prstDash val="solid"/>
-          </a:ln>
-          <a:effectLst>
-            <a:outerShdw blurRad="254000" dist="50800" dir="8100000" algn="bl" rotWithShape="0">
-              <a:srgbClr val="000000">
-                <a:alpha val="50000"/>
-              </a:srgbClr>
-            </a:outerShdw>
-          </a:effectLst>
-        </p:spPr>
-      </p:sp>
-      <p:sp>
-        <p:nvSpPr>
-          <p:cNvPr id="25" name="Text 23"/>
-          <p:cNvSpPr/>
-          <p:nvPr/>
-        </p:nvSpPr>
-        <p:spPr>
-          <a:xfrm>
-            <a:off x="16112049" y="1938528"/>
-            <a:ext cx="365760" cy="320040"/>
-          </a:xfrm>
-          <a:prstGeom prst="rect">
-            <a:avLst/>
-          </a:prstGeom>
-          <a:noFill/>
-          <a:ln/>
-        </p:spPr>
-        <p:txBody>
-          <a:bodyPr wrap="square" lIns="0" tIns="0" rIns="0" bIns="0" rtlCol="0" anchor="ctr"/>
-          <a:lstStyle/>
-          <a:p>
-            <a:pPr marL="0" indent="0">
-              <a:buNone/>
-            </a:pPr>
-            <a:r>
-              <a:rPr lang="en-US" sz="1100" dirty="0">
-                <a:solidFill>
-                  <a:srgbClr val="292929"/>
-                </a:solidFill>
-                <a:latin typeface="Calibri" pitchFamily="34" charset="0"/>
-                <a:ea typeface="Calibri" pitchFamily="34" charset="-122"/>
-                <a:cs typeface="Calibri" pitchFamily="34" charset="-120"/>
-              </a:rPr>
-              <a:t>5</a:t>
-            </a:r>
-            <a:endParaRPr lang="en-US" sz="1100" dirty="0"/>
-          </a:p>
-        </p:txBody>
-      </p:sp>
-      <p:sp>
-        <p:nvSpPr>
-          <p:cNvPr id="26" name="Text 24"/>
-          <p:cNvSpPr/>
-          <p:nvPr/>
-        </p:nvSpPr>
-        <p:spPr>
-          <a:xfrm>
-            <a:off x="16084617" y="2304288"/>
-            <a:ext cx="1280160" cy="347472"/>
-          </a:xfrm>
-          <a:prstGeom prst="rect">
-            <a:avLst/>
-          </a:prstGeom>
-          <a:noFill/>
-          <a:ln/>
-        </p:spPr>
-        <p:txBody>
-          <a:bodyPr wrap="square" lIns="0" tIns="0" rIns="0" bIns="0" rtlCol="0" anchor="ctr"/>
-          <a:lstStyle/>
-          <a:p>
-            <a:pPr marL="0" indent="0">
-              <a:buNone/>
-            </a:pPr>
-            <a:r>
-              <a:rPr lang="en-US" sz="1300" b="1" dirty="0">
-                <a:solidFill>
-                  <a:srgbClr val="FFFFFF"/>
-                </a:solidFill>
-                <a:latin typeface="Calibri" pitchFamily="34" charset="0"/>
-                <a:ea typeface="Calibri" pitchFamily="34" charset="-122"/>
-                <a:cs typeface="Calibri" pitchFamily="34" charset="-120"/>
-              </a:rPr>
-              <a:t>Изход</a:t>
-            </a:r>
-            <a:endParaRPr lang="en-US" sz="1300" dirty="0"/>
-          </a:p>
-        </p:txBody>
-      </p:sp>
-      <p:sp>
-        <p:nvSpPr>
-          <p:cNvPr id="27" name="Text 25"/>
-          <p:cNvSpPr/>
-          <p:nvPr/>
-        </p:nvSpPr>
-        <p:spPr>
-          <a:xfrm>
-            <a:off x="16084617" y="2679192"/>
-            <a:ext cx="1280160" cy="548640"/>
-          </a:xfrm>
-          <a:prstGeom prst="rect">
-            <a:avLst/>
-          </a:prstGeom>
-          <a:noFill/>
-          <a:ln/>
-        </p:spPr>
-        <p:txBody>
-          <a:bodyPr wrap="square" lIns="0" tIns="0" rIns="0" bIns="0" rtlCol="0" anchor="ctr"/>
-          <a:lstStyle/>
-          <a:p>
-            <a:pPr marL="0" indent="0">
-              <a:buNone/>
-            </a:pPr>
-            <a:r>
-              <a:rPr lang="en-US" sz="950" dirty="0">
-                <a:solidFill>
-                  <a:srgbClr val="666666"/>
-                </a:solidFill>
-                <a:latin typeface="Calibri Light" pitchFamily="34" charset="0"/>
-                <a:ea typeface="Calibri Light" pitchFamily="34" charset="-122"/>
-                <a:cs typeface="Calibri Light" pitchFamily="34" charset="-120"/>
-              </a:rPr>
-              <a:t>TTS или действие</a:t>
-            </a:r>
-            <a:endParaRPr lang="en-US" sz="950" dirty="0"/>
-          </a:p>
-          <a:p>
-            <a:pPr marL="0" indent="0">
-              <a:buNone/>
-            </a:pPr>
-            <a:r>
-              <a:rPr lang="en-US" sz="950" dirty="0">
-                <a:solidFill>
-                  <a:srgbClr val="666666"/>
-                </a:solidFill>
-                <a:latin typeface="Calibri Light" pitchFamily="34" charset="0"/>
-                <a:ea typeface="Calibri Light" pitchFamily="34" charset="-122"/>
-                <a:cs typeface="Calibri Light" pitchFamily="34" charset="-120"/>
-              </a:rPr>
-              <a:t>се изпълнява</a:t>
-            </a:r>
-            <a:endParaRPr lang="en-US" sz="950" dirty="0"/>
-          </a:p>
-        </p:txBody>
-      </p:sp>
-      <p:sp>
-        <p:nvSpPr>
-          <p:cNvPr id="28" name="Text 26"/>
-          <p:cNvSpPr/>
-          <p:nvPr/>
-        </p:nvSpPr>
-        <p:spPr>
-          <a:xfrm>
-            <a:off x="10959374" y="3520440"/>
-            <a:ext cx="1463040" cy="256032"/>
-          </a:xfrm>
-          <a:prstGeom prst="rect">
-            <a:avLst/>
-          </a:prstGeom>
-          <a:noFill/>
-          <a:ln/>
-        </p:spPr>
-        <p:txBody>
-          <a:bodyPr wrap="square" rtlCol="0" anchor="ctr"/>
-          <a:lstStyle/>
-          <a:p>
-            <a:pPr marL="0" indent="0" algn="ctr">
-              <a:buNone/>
-            </a:pPr>
-            <a:r>
-              <a:rPr lang="en-US" sz="900" kern="0" spc="100" dirty="0">
-                <a:solidFill>
-                  <a:srgbClr val="2C2C2C"/>
-                </a:solidFill>
-                <a:latin typeface="Calibri" pitchFamily="34" charset="0"/>
-                <a:ea typeface="Calibri" pitchFamily="34" charset="-122"/>
-                <a:cs typeface="Calibri" pitchFamily="34" charset="-120"/>
-              </a:rPr>
-              <a:t>WebSocket</a:t>
-            </a:r>
-            <a:endParaRPr lang="en-US" sz="900" dirty="0"/>
-          </a:p>
-        </p:txBody>
-      </p:sp>
-      <p:sp>
-        <p:nvSpPr>
-          <p:cNvPr id="29" name="Shape 27"/>
-          <p:cNvSpPr/>
-          <p:nvPr/>
-        </p:nvSpPr>
-        <p:spPr>
-          <a:xfrm>
-            <a:off x="9313454" y="3749040"/>
-            <a:ext cx="2926080" cy="0"/>
-          </a:xfrm>
-          <a:prstGeom prst="line">
-            <a:avLst/>
-          </a:prstGeom>
-          <a:noFill/>
-          <a:ln w="6350">
-            <a:solidFill>
-              <a:srgbClr val="222222"/>
-            </a:solidFill>
-            <a:prstDash val="dash"/>
-          </a:ln>
-        </p:spPr>
-      </p:sp>
-      <p:sp>
-        <p:nvSpPr>
-          <p:cNvPr id="30" name="Text 28"/>
-          <p:cNvSpPr/>
-          <p:nvPr/>
-        </p:nvSpPr>
-        <p:spPr>
-          <a:xfrm>
-            <a:off x="12422414" y="3520440"/>
-            <a:ext cx="1828800" cy="256032"/>
-          </a:xfrm>
-          <a:prstGeom prst="rect">
-            <a:avLst/>
-          </a:prstGeom>
-          <a:noFill/>
-          <a:ln/>
-        </p:spPr>
-        <p:txBody>
-          <a:bodyPr wrap="square" rtlCol="0" anchor="ctr"/>
-          <a:lstStyle/>
-          <a:p>
-            <a:pPr marL="0" indent="0" algn="ctr">
-              <a:buNone/>
-            </a:pPr>
-            <a:r>
-              <a:rPr lang="en-US" sz="900" kern="0" spc="100" dirty="0">
-                <a:solidFill>
-                  <a:srgbClr val="2C2C2C"/>
-                </a:solidFill>
-                <a:latin typeface="Calibri" pitchFamily="34" charset="0"/>
-                <a:ea typeface="Calibri" pitchFamily="34" charset="-122"/>
-                <a:cs typeface="Calibri" pitchFamily="34" charset="-120"/>
-              </a:rPr>
-              <a:t>FastAPI backend</a:t>
-            </a:r>
-            <a:endParaRPr lang="en-US" sz="900" dirty="0"/>
-          </a:p>
-        </p:txBody>
-      </p:sp>
-      <p:sp>
-        <p:nvSpPr>
-          <p:cNvPr id="31" name="Shape 29"/>
-          <p:cNvSpPr/>
-          <p:nvPr/>
-        </p:nvSpPr>
-        <p:spPr>
-          <a:xfrm>
-            <a:off x="12239534" y="3749040"/>
-            <a:ext cx="2926080" cy="0"/>
-          </a:xfrm>
-          <a:prstGeom prst="line">
-            <a:avLst/>
-          </a:prstGeom>
-          <a:noFill/>
-          <a:ln w="6350">
-            <a:solidFill>
-              <a:srgbClr val="222222"/>
-            </a:solidFill>
-            <a:prstDash val="dash"/>
-          </a:ln>
-        </p:spPr>
-      </p:sp>
-      <p:pic>
-        <p:nvPicPr>
-          <p:cNvPr id="32" name="Picture 31">
-            <a:extLst>
-              <a:ext uri="{FF2B5EF4-FFF2-40B4-BE49-F238E27FC236}">
-                <a16:creationId xmlns:a16="http://schemas.microsoft.com/office/drawing/2014/main" id="{59C4F3BE-B3CA-43D8-8F62-1A6B21A69755}"/>
-              </a:ext>
-            </a:extLst>
-          </p:cNvPr>
-          <p:cNvPicPr>
-            <a:picLocks noChangeAspect="1"/>
-          </p:cNvPicPr>
-          <p:nvPr/>
-        </p:nvPicPr>
-        <p:blipFill>
-          <a:blip r:embed="rId3"/>
-          <a:stretch>
-            <a:fillRect/>
-          </a:stretch>
-        </p:blipFill>
-        <p:spPr>
-          <a:xfrm>
-            <a:off x="1583998" y="734637"/>
-            <a:ext cx="5976004" cy="3993477"/>
-          </a:xfrm>
-          <a:prstGeom prst="rect">
-            <a:avLst/>
-          </a:prstGeom>
-        </p:spPr>
-      </p:pic>
+              <a:t>Основното ни предимство е, че системата се персонализира за всеки човек, вместо да предлага еднакво решение за всички.</a:t>
+            </a:r>
+            <a:endParaRPr lang="en-US" sz="1200" dirty="0"/>
+          </a:p>
+        </p:txBody>
+      </p:sp>
     </p:spTree>
     <p:extLst>
       <p:ext uri="{BB962C8B-B14F-4D97-AF65-F5344CB8AC3E}">
-        <p14:creationId xmlns:p14="http://schemas.microsoft.com/office/powerpoint/2010/main" val="2177828950"/>
+        <p14:creationId xmlns:p14="http://schemas.microsoft.com/office/powerpoint/2010/main" val="1342048130"/>
       </p:ext>
     </p:extLst>
   </p:cSld>
@@ -8792,6 +6652,2558 @@
         </p:nvSpPr>
         <p:spPr>
           <a:xfrm>
+            <a:off x="9207138" y="640080"/>
+            <a:ext cx="8229600" cy="548640"/>
+          </a:xfrm>
+          <a:prstGeom prst="rect">
+            <a:avLst/>
+          </a:prstGeom>
+          <a:noFill/>
+          <a:ln/>
+        </p:spPr>
+        <p:txBody>
+          <a:bodyPr wrap="square" rtlCol="0" anchor="ctr"/>
+          <a:lstStyle/>
+          <a:p>
+            <a:pPr marL="0" indent="0">
+              <a:buNone/>
+            </a:pPr>
+            <a:r>
+              <a:rPr lang="en-US" sz="3200" dirty="0">
+                <a:solidFill>
+                  <a:srgbClr val="FFFFFF"/>
+                </a:solidFill>
+                <a:latin typeface="Calibri Light" pitchFamily="34" charset="0"/>
+                <a:ea typeface="Calibri Light" pitchFamily="34" charset="-122"/>
+                <a:cs typeface="Calibri Light" pitchFamily="34" charset="-120"/>
+              </a:rPr>
+              <a:t>Как работи?</a:t>
+            </a:r>
+            <a:endParaRPr lang="en-US" sz="3200" dirty="0"/>
+          </a:p>
+        </p:txBody>
+      </p:sp>
+      <p:sp>
+        <p:nvSpPr>
+          <p:cNvPr id="5" name="Text 3"/>
+          <p:cNvSpPr/>
+          <p:nvPr/>
+        </p:nvSpPr>
+        <p:spPr>
+          <a:xfrm>
+            <a:off x="9235761" y="1938528"/>
+            <a:ext cx="365760" cy="320040"/>
+          </a:xfrm>
+          <a:prstGeom prst="rect">
+            <a:avLst/>
+          </a:prstGeom>
+          <a:noFill/>
+          <a:ln/>
+        </p:spPr>
+        <p:txBody>
+          <a:bodyPr wrap="square" lIns="0" tIns="0" rIns="0" bIns="0" rtlCol="0" anchor="ctr"/>
+          <a:lstStyle/>
+          <a:p>
+            <a:pPr marL="0" indent="0">
+              <a:buNone/>
+            </a:pPr>
+            <a:r>
+              <a:rPr lang="en-US" sz="1100" dirty="0">
+                <a:solidFill>
+                  <a:srgbClr val="292929"/>
+                </a:solidFill>
+                <a:latin typeface="Calibri" pitchFamily="34" charset="0"/>
+                <a:ea typeface="Calibri" pitchFamily="34" charset="-122"/>
+                <a:cs typeface="Calibri" pitchFamily="34" charset="-120"/>
+              </a:rPr>
+              <a:t>1</a:t>
+            </a:r>
+            <a:endParaRPr lang="en-US" sz="1100" dirty="0"/>
+          </a:p>
+        </p:txBody>
+      </p:sp>
+      <p:sp>
+        <p:nvSpPr>
+          <p:cNvPr id="6" name="Text 4"/>
+          <p:cNvSpPr/>
+          <p:nvPr/>
+        </p:nvSpPr>
+        <p:spPr>
+          <a:xfrm>
+            <a:off x="9208329" y="2304288"/>
+            <a:ext cx="1280160" cy="347472"/>
+          </a:xfrm>
+          <a:prstGeom prst="rect">
+            <a:avLst/>
+          </a:prstGeom>
+          <a:noFill/>
+          <a:ln/>
+        </p:spPr>
+        <p:txBody>
+          <a:bodyPr wrap="square" lIns="0" tIns="0" rIns="0" bIns="0" rtlCol="0" anchor="ctr"/>
+          <a:lstStyle/>
+          <a:p>
+            <a:pPr marL="0" indent="0">
+              <a:buNone/>
+            </a:pPr>
+            <a:r>
+              <a:rPr lang="en-US" sz="1300" b="1" dirty="0">
+                <a:solidFill>
+                  <a:srgbClr val="FFFFFF"/>
+                </a:solidFill>
+                <a:latin typeface="Calibri" pitchFamily="34" charset="0"/>
+                <a:ea typeface="Calibri" pitchFamily="34" charset="-122"/>
+                <a:cs typeface="Calibri" pitchFamily="34" charset="-120"/>
+              </a:rPr>
+              <a:t>Сензори</a:t>
+            </a:r>
+            <a:endParaRPr lang="en-US" sz="1300" dirty="0"/>
+          </a:p>
+        </p:txBody>
+      </p:sp>
+      <p:sp>
+        <p:nvSpPr>
+          <p:cNvPr id="7" name="Text 5"/>
+          <p:cNvSpPr/>
+          <p:nvPr/>
+        </p:nvSpPr>
+        <p:spPr>
+          <a:xfrm>
+            <a:off x="9208329" y="2679192"/>
+            <a:ext cx="1280160" cy="548640"/>
+          </a:xfrm>
+          <a:prstGeom prst="rect">
+            <a:avLst/>
+          </a:prstGeom>
+          <a:noFill/>
+          <a:ln/>
+        </p:spPr>
+        <p:txBody>
+          <a:bodyPr wrap="square" lIns="0" tIns="0" rIns="0" bIns="0" rtlCol="0" anchor="ctr"/>
+          <a:lstStyle/>
+          <a:p>
+            <a:pPr marL="0" indent="0">
+              <a:buNone/>
+            </a:pPr>
+            <a:r>
+              <a:rPr lang="en-US" sz="950" dirty="0">
+                <a:solidFill>
+                  <a:srgbClr val="666666"/>
+                </a:solidFill>
+                <a:latin typeface="Calibri Light" pitchFamily="34" charset="0"/>
+                <a:ea typeface="Calibri Light" pitchFamily="34" charset="-122"/>
+                <a:cs typeface="Calibri Light" pitchFamily="34" charset="-120"/>
+              </a:rPr>
+              <a:t>ESP32 чете eye tracking,</a:t>
+            </a:r>
+            <a:r>
+              <a:rPr lang="en-US" sz="950" dirty="0"/>
+              <a:t> </a:t>
+            </a:r>
+            <a:r>
+              <a:rPr lang="en-US" sz="950" dirty="0">
+                <a:solidFill>
+                  <a:srgbClr val="666666"/>
+                </a:solidFill>
+                <a:latin typeface="Calibri Light" pitchFamily="34" charset="0"/>
+                <a:ea typeface="Calibri Light" pitchFamily="34" charset="-122"/>
+                <a:cs typeface="Calibri Light" pitchFamily="34" charset="-120"/>
+              </a:rPr>
+              <a:t>акселерометър</a:t>
+            </a:r>
+            <a:r>
+              <a:rPr lang="bg-BG" sz="950" dirty="0">
+                <a:solidFill>
+                  <a:srgbClr val="666666"/>
+                </a:solidFill>
+                <a:latin typeface="Calibri Light" pitchFamily="34" charset="0"/>
+                <a:ea typeface="Calibri Light" pitchFamily="34" charset="-122"/>
+                <a:cs typeface="Calibri Light" pitchFamily="34" charset="-120"/>
+              </a:rPr>
+              <a:t> и сензора за допир</a:t>
+            </a:r>
+            <a:endParaRPr lang="en-US" sz="950" dirty="0"/>
+          </a:p>
+        </p:txBody>
+      </p:sp>
+      <p:sp>
+        <p:nvSpPr>
+          <p:cNvPr id="8" name="Shape 6"/>
+          <p:cNvSpPr/>
+          <p:nvPr/>
+        </p:nvSpPr>
+        <p:spPr>
+          <a:xfrm>
+            <a:off x="10598217" y="2560320"/>
+            <a:ext cx="182880" cy="0"/>
+          </a:xfrm>
+          <a:prstGeom prst="line">
+            <a:avLst/>
+          </a:prstGeom>
+          <a:noFill/>
+          <a:ln w="12700">
+            <a:solidFill>
+              <a:srgbClr val="282828"/>
+            </a:solidFill>
+            <a:prstDash val="solid"/>
+          </a:ln>
+        </p:spPr>
+      </p:sp>
+      <p:sp>
+        <p:nvSpPr>
+          <p:cNvPr id="9" name="Shape 7"/>
+          <p:cNvSpPr/>
+          <p:nvPr/>
+        </p:nvSpPr>
+        <p:spPr>
+          <a:xfrm>
+            <a:off x="10817673" y="1828800"/>
+            <a:ext cx="1463040" cy="1463040"/>
+          </a:xfrm>
+          <a:prstGeom prst="rect">
+            <a:avLst/>
+          </a:prstGeom>
+          <a:solidFill>
+            <a:srgbClr val="111111"/>
+          </a:solidFill>
+          <a:ln w="6350">
+            <a:solidFill>
+              <a:srgbClr val="333333"/>
+            </a:solidFill>
+            <a:prstDash val="solid"/>
+          </a:ln>
+          <a:effectLst>
+            <a:outerShdw blurRad="254000" dist="50800" dir="8100000" algn="bl" rotWithShape="0">
+              <a:srgbClr val="000000">
+                <a:alpha val="50000"/>
+              </a:srgbClr>
+            </a:outerShdw>
+          </a:effectLst>
+        </p:spPr>
+      </p:sp>
+      <p:sp>
+        <p:nvSpPr>
+          <p:cNvPr id="10" name="Text 8"/>
+          <p:cNvSpPr/>
+          <p:nvPr/>
+        </p:nvSpPr>
+        <p:spPr>
+          <a:xfrm>
+            <a:off x="10954833" y="1938528"/>
+            <a:ext cx="365760" cy="320040"/>
+          </a:xfrm>
+          <a:prstGeom prst="rect">
+            <a:avLst/>
+          </a:prstGeom>
+          <a:noFill/>
+          <a:ln/>
+        </p:spPr>
+        <p:txBody>
+          <a:bodyPr wrap="square" lIns="0" tIns="0" rIns="0" bIns="0" rtlCol="0" anchor="ctr"/>
+          <a:lstStyle/>
+          <a:p>
+            <a:pPr marL="0" indent="0">
+              <a:buNone/>
+            </a:pPr>
+            <a:r>
+              <a:rPr lang="en-US" sz="1100" dirty="0">
+                <a:solidFill>
+                  <a:srgbClr val="292929"/>
+                </a:solidFill>
+                <a:latin typeface="Calibri" pitchFamily="34" charset="0"/>
+                <a:ea typeface="Calibri" pitchFamily="34" charset="-122"/>
+                <a:cs typeface="Calibri" pitchFamily="34" charset="-120"/>
+              </a:rPr>
+              <a:t>2</a:t>
+            </a:r>
+            <a:endParaRPr lang="en-US" sz="1100" dirty="0"/>
+          </a:p>
+        </p:txBody>
+      </p:sp>
+      <p:sp>
+        <p:nvSpPr>
+          <p:cNvPr id="11" name="Text 9"/>
+          <p:cNvSpPr/>
+          <p:nvPr/>
+        </p:nvSpPr>
+        <p:spPr>
+          <a:xfrm>
+            <a:off x="10927401" y="2304288"/>
+            <a:ext cx="1280160" cy="347472"/>
+          </a:xfrm>
+          <a:prstGeom prst="rect">
+            <a:avLst/>
+          </a:prstGeom>
+          <a:noFill/>
+          <a:ln/>
+        </p:spPr>
+        <p:txBody>
+          <a:bodyPr wrap="square" lIns="0" tIns="0" rIns="0" bIns="0" rtlCol="0" anchor="ctr"/>
+          <a:lstStyle/>
+          <a:p>
+            <a:pPr marL="0" indent="0">
+              <a:buNone/>
+            </a:pPr>
+            <a:r>
+              <a:rPr lang="en-US" sz="1300" b="1" dirty="0">
+                <a:solidFill>
+                  <a:srgbClr val="FFFFFF"/>
+                </a:solidFill>
+                <a:latin typeface="Calibri" pitchFamily="34" charset="0"/>
+                <a:ea typeface="Calibri" pitchFamily="34" charset="-122"/>
+                <a:cs typeface="Calibri" pitchFamily="34" charset="-120"/>
+              </a:rPr>
+              <a:t>Интерфейс</a:t>
+            </a:r>
+            <a:endParaRPr lang="en-US" sz="1300" dirty="0"/>
+          </a:p>
+        </p:txBody>
+      </p:sp>
+      <p:sp>
+        <p:nvSpPr>
+          <p:cNvPr id="12" name="Text 10"/>
+          <p:cNvSpPr/>
+          <p:nvPr/>
+        </p:nvSpPr>
+        <p:spPr>
+          <a:xfrm>
+            <a:off x="10927401" y="2679192"/>
+            <a:ext cx="1280160" cy="548640"/>
+          </a:xfrm>
+          <a:prstGeom prst="rect">
+            <a:avLst/>
+          </a:prstGeom>
+          <a:noFill/>
+          <a:ln/>
+        </p:spPr>
+        <p:txBody>
+          <a:bodyPr wrap="square" lIns="0" tIns="0" rIns="0" bIns="0" rtlCol="0" anchor="ctr"/>
+          <a:lstStyle/>
+          <a:p>
+            <a:pPr marL="0" indent="0">
+              <a:buNone/>
+            </a:pPr>
+            <a:r>
+              <a:rPr lang="en-US" sz="950" dirty="0">
+                <a:solidFill>
+                  <a:srgbClr val="666666"/>
+                </a:solidFill>
+                <a:latin typeface="Calibri Light" pitchFamily="34" charset="0"/>
+                <a:ea typeface="Calibri Light" pitchFamily="34" charset="-122"/>
+                <a:cs typeface="Calibri Light" pitchFamily="34" charset="-120"/>
+              </a:rPr>
+              <a:t>React показва думи,</a:t>
+            </a:r>
+            <a:endParaRPr lang="en-US" sz="950" dirty="0"/>
+          </a:p>
+          <a:p>
+            <a:pPr marL="0" indent="0">
+              <a:buNone/>
+            </a:pPr>
+            <a:r>
+              <a:rPr lang="en-US" sz="950" dirty="0">
+                <a:solidFill>
+                  <a:srgbClr val="666666"/>
+                </a:solidFill>
+                <a:latin typeface="Calibri Light" pitchFamily="34" charset="0"/>
+                <a:ea typeface="Calibri Light" pitchFamily="34" charset="-122"/>
+                <a:cs typeface="Calibri Light" pitchFamily="34" charset="-120"/>
+              </a:rPr>
+              <a:t>потребителят избира</a:t>
+            </a:r>
+            <a:endParaRPr lang="en-US" sz="950" dirty="0"/>
+          </a:p>
+        </p:txBody>
+      </p:sp>
+      <p:sp>
+        <p:nvSpPr>
+          <p:cNvPr id="13" name="Shape 11"/>
+          <p:cNvSpPr/>
+          <p:nvPr/>
+        </p:nvSpPr>
+        <p:spPr>
+          <a:xfrm>
+            <a:off x="12317289" y="2560320"/>
+            <a:ext cx="182880" cy="0"/>
+          </a:xfrm>
+          <a:prstGeom prst="line">
+            <a:avLst/>
+          </a:prstGeom>
+          <a:noFill/>
+          <a:ln w="12700">
+            <a:solidFill>
+              <a:srgbClr val="282828"/>
+            </a:solidFill>
+            <a:prstDash val="solid"/>
+          </a:ln>
+        </p:spPr>
+      </p:sp>
+      <p:sp>
+        <p:nvSpPr>
+          <p:cNvPr id="14" name="Shape 12"/>
+          <p:cNvSpPr/>
+          <p:nvPr/>
+        </p:nvSpPr>
+        <p:spPr>
+          <a:xfrm>
+            <a:off x="12536745" y="1828800"/>
+            <a:ext cx="1463040" cy="1463040"/>
+          </a:xfrm>
+          <a:prstGeom prst="rect">
+            <a:avLst/>
+          </a:prstGeom>
+          <a:solidFill>
+            <a:srgbClr val="111111"/>
+          </a:solidFill>
+          <a:ln w="6350">
+            <a:solidFill>
+              <a:srgbClr val="333333"/>
+            </a:solidFill>
+            <a:prstDash val="solid"/>
+          </a:ln>
+          <a:effectLst>
+            <a:outerShdw blurRad="254000" dist="50800" dir="8100000" algn="bl" rotWithShape="0">
+              <a:srgbClr val="000000">
+                <a:alpha val="50000"/>
+              </a:srgbClr>
+            </a:outerShdw>
+          </a:effectLst>
+        </p:spPr>
+      </p:sp>
+      <p:sp>
+        <p:nvSpPr>
+          <p:cNvPr id="15" name="Text 13"/>
+          <p:cNvSpPr/>
+          <p:nvPr/>
+        </p:nvSpPr>
+        <p:spPr>
+          <a:xfrm>
+            <a:off x="12673905" y="1938528"/>
+            <a:ext cx="365760" cy="320040"/>
+          </a:xfrm>
+          <a:prstGeom prst="rect">
+            <a:avLst/>
+          </a:prstGeom>
+          <a:noFill/>
+          <a:ln/>
+        </p:spPr>
+        <p:txBody>
+          <a:bodyPr wrap="square" lIns="0" tIns="0" rIns="0" bIns="0" rtlCol="0" anchor="ctr"/>
+          <a:lstStyle/>
+          <a:p>
+            <a:pPr marL="0" indent="0">
+              <a:buNone/>
+            </a:pPr>
+            <a:r>
+              <a:rPr lang="en-US" sz="1100" dirty="0">
+                <a:solidFill>
+                  <a:srgbClr val="292929"/>
+                </a:solidFill>
+                <a:latin typeface="Calibri" pitchFamily="34" charset="0"/>
+                <a:ea typeface="Calibri" pitchFamily="34" charset="-122"/>
+                <a:cs typeface="Calibri" pitchFamily="34" charset="-120"/>
+              </a:rPr>
+              <a:t>3</a:t>
+            </a:r>
+            <a:endParaRPr lang="en-US" sz="1100" dirty="0"/>
+          </a:p>
+        </p:txBody>
+      </p:sp>
+      <p:sp>
+        <p:nvSpPr>
+          <p:cNvPr id="16" name="Text 14"/>
+          <p:cNvSpPr/>
+          <p:nvPr/>
+        </p:nvSpPr>
+        <p:spPr>
+          <a:xfrm>
+            <a:off x="12646473" y="2304288"/>
+            <a:ext cx="1280160" cy="347472"/>
+          </a:xfrm>
+          <a:prstGeom prst="rect">
+            <a:avLst/>
+          </a:prstGeom>
+          <a:noFill/>
+          <a:ln/>
+        </p:spPr>
+        <p:txBody>
+          <a:bodyPr wrap="square" lIns="0" tIns="0" rIns="0" bIns="0" rtlCol="0" anchor="ctr"/>
+          <a:lstStyle/>
+          <a:p>
+            <a:pPr marL="0" indent="0">
+              <a:buNone/>
+            </a:pPr>
+            <a:r>
+              <a:rPr lang="en-US" sz="1300" b="1" dirty="0">
+                <a:solidFill>
+                  <a:srgbClr val="FFFFFF"/>
+                </a:solidFill>
+                <a:latin typeface="Calibri" pitchFamily="34" charset="0"/>
+                <a:ea typeface="Calibri" pitchFamily="34" charset="-122"/>
+                <a:cs typeface="Calibri" pitchFamily="34" charset="-120"/>
+              </a:rPr>
+              <a:t>ИИ модел</a:t>
+            </a:r>
+            <a:endParaRPr lang="en-US" sz="1300" dirty="0"/>
+          </a:p>
+        </p:txBody>
+      </p:sp>
+      <p:sp>
+        <p:nvSpPr>
+          <p:cNvPr id="17" name="Text 15"/>
+          <p:cNvSpPr/>
+          <p:nvPr/>
+        </p:nvSpPr>
+        <p:spPr>
+          <a:xfrm>
+            <a:off x="12646473" y="2679192"/>
+            <a:ext cx="1280160" cy="548640"/>
+          </a:xfrm>
+          <a:prstGeom prst="rect">
+            <a:avLst/>
+          </a:prstGeom>
+          <a:noFill/>
+          <a:ln/>
+        </p:spPr>
+        <p:txBody>
+          <a:bodyPr wrap="square" lIns="0" tIns="0" rIns="0" bIns="0" rtlCol="0" anchor="ctr"/>
+          <a:lstStyle/>
+          <a:p>
+            <a:pPr marL="0" indent="0">
+              <a:buNone/>
+            </a:pPr>
+            <a:r>
+              <a:rPr lang="en-US" sz="950" dirty="0">
+                <a:solidFill>
+                  <a:srgbClr val="666666"/>
+                </a:solidFill>
+                <a:latin typeface="Calibri Light" pitchFamily="34" charset="0"/>
+                <a:ea typeface="Calibri Light" pitchFamily="34" charset="-122"/>
+                <a:cs typeface="Calibri Light" pitchFamily="34" charset="-120"/>
+              </a:rPr>
+              <a:t>distilGPT-2 дава </a:t>
+            </a:r>
+            <a:r>
+              <a:rPr lang="bg-BG" sz="950" dirty="0">
+                <a:solidFill>
+                  <a:srgbClr val="666666"/>
+                </a:solidFill>
+                <a:latin typeface="Calibri Light" pitchFamily="34" charset="0"/>
+                <a:ea typeface="Calibri Light" pitchFamily="34" charset="-122"/>
+                <a:cs typeface="Calibri Light" pitchFamily="34" charset="-120"/>
+              </a:rPr>
+              <a:t>предложения</a:t>
+            </a:r>
+            <a:endParaRPr lang="en-US" sz="950" dirty="0"/>
+          </a:p>
+          <a:p>
+            <a:pPr marL="0" indent="0">
+              <a:buNone/>
+            </a:pPr>
+            <a:r>
+              <a:rPr lang="en-US" sz="950" dirty="0">
+                <a:solidFill>
+                  <a:srgbClr val="666666"/>
+                </a:solidFill>
+                <a:latin typeface="Calibri Light" pitchFamily="34" charset="0"/>
+                <a:ea typeface="Calibri Light" pitchFamily="34" charset="-122"/>
+                <a:cs typeface="Calibri Light" pitchFamily="34" charset="-120"/>
+              </a:rPr>
+              <a:t>за следваща дума</a:t>
+            </a:r>
+            <a:endParaRPr lang="en-US" sz="950" dirty="0"/>
+          </a:p>
+        </p:txBody>
+      </p:sp>
+      <p:sp>
+        <p:nvSpPr>
+          <p:cNvPr id="18" name="Shape 16"/>
+          <p:cNvSpPr/>
+          <p:nvPr/>
+        </p:nvSpPr>
+        <p:spPr>
+          <a:xfrm>
+            <a:off x="14036361" y="2560320"/>
+            <a:ext cx="182880" cy="0"/>
+          </a:xfrm>
+          <a:prstGeom prst="line">
+            <a:avLst/>
+          </a:prstGeom>
+          <a:noFill/>
+          <a:ln w="12700">
+            <a:solidFill>
+              <a:srgbClr val="282828"/>
+            </a:solidFill>
+            <a:prstDash val="solid"/>
+          </a:ln>
+        </p:spPr>
+      </p:sp>
+      <p:sp>
+        <p:nvSpPr>
+          <p:cNvPr id="19" name="Shape 17"/>
+          <p:cNvSpPr/>
+          <p:nvPr/>
+        </p:nvSpPr>
+        <p:spPr>
+          <a:xfrm>
+            <a:off x="14255817" y="1828800"/>
+            <a:ext cx="1463040" cy="1463040"/>
+          </a:xfrm>
+          <a:prstGeom prst="rect">
+            <a:avLst/>
+          </a:prstGeom>
+          <a:solidFill>
+            <a:srgbClr val="111111"/>
+          </a:solidFill>
+          <a:ln w="6350">
+            <a:solidFill>
+              <a:srgbClr val="333333"/>
+            </a:solidFill>
+            <a:prstDash val="solid"/>
+          </a:ln>
+          <a:effectLst>
+            <a:outerShdw blurRad="254000" dist="50800" dir="8100000" algn="bl" rotWithShape="0">
+              <a:srgbClr val="000000">
+                <a:alpha val="50000"/>
+              </a:srgbClr>
+            </a:outerShdw>
+          </a:effectLst>
+        </p:spPr>
+      </p:sp>
+      <p:sp>
+        <p:nvSpPr>
+          <p:cNvPr id="20" name="Text 18"/>
+          <p:cNvSpPr/>
+          <p:nvPr/>
+        </p:nvSpPr>
+        <p:spPr>
+          <a:xfrm>
+            <a:off x="14392977" y="1938528"/>
+            <a:ext cx="365760" cy="320040"/>
+          </a:xfrm>
+          <a:prstGeom prst="rect">
+            <a:avLst/>
+          </a:prstGeom>
+          <a:noFill/>
+          <a:ln/>
+        </p:spPr>
+        <p:txBody>
+          <a:bodyPr wrap="square" lIns="0" tIns="0" rIns="0" bIns="0" rtlCol="0" anchor="ctr"/>
+          <a:lstStyle/>
+          <a:p>
+            <a:pPr marL="0" indent="0">
+              <a:buNone/>
+            </a:pPr>
+            <a:r>
+              <a:rPr lang="en-US" sz="1100" dirty="0">
+                <a:solidFill>
+                  <a:srgbClr val="292929"/>
+                </a:solidFill>
+                <a:latin typeface="Calibri" pitchFamily="34" charset="0"/>
+                <a:ea typeface="Calibri" pitchFamily="34" charset="-122"/>
+                <a:cs typeface="Calibri" pitchFamily="34" charset="-120"/>
+              </a:rPr>
+              <a:t>4</a:t>
+            </a:r>
+            <a:endParaRPr lang="en-US" sz="1100" dirty="0"/>
+          </a:p>
+        </p:txBody>
+      </p:sp>
+      <p:sp>
+        <p:nvSpPr>
+          <p:cNvPr id="21" name="Text 19"/>
+          <p:cNvSpPr/>
+          <p:nvPr/>
+        </p:nvSpPr>
+        <p:spPr>
+          <a:xfrm>
+            <a:off x="14365545" y="2304288"/>
+            <a:ext cx="1280160" cy="347472"/>
+          </a:xfrm>
+          <a:prstGeom prst="rect">
+            <a:avLst/>
+          </a:prstGeom>
+          <a:noFill/>
+          <a:ln/>
+        </p:spPr>
+        <p:txBody>
+          <a:bodyPr wrap="square" lIns="0" tIns="0" rIns="0" bIns="0" rtlCol="0" anchor="ctr"/>
+          <a:lstStyle/>
+          <a:p>
+            <a:pPr marL="0" indent="0">
+              <a:buNone/>
+            </a:pPr>
+            <a:r>
+              <a:rPr lang="en-US" sz="1300" b="1" dirty="0">
+                <a:solidFill>
+                  <a:srgbClr val="FFFFFF"/>
+                </a:solidFill>
+                <a:latin typeface="Calibri" pitchFamily="34" charset="0"/>
+                <a:ea typeface="Calibri" pitchFamily="34" charset="-122"/>
+                <a:cs typeface="Calibri" pitchFamily="34" charset="-120"/>
+              </a:rPr>
+              <a:t>MongoDB</a:t>
+            </a:r>
+            <a:endParaRPr lang="en-US" sz="1300" dirty="0"/>
+          </a:p>
+        </p:txBody>
+      </p:sp>
+      <p:sp>
+        <p:nvSpPr>
+          <p:cNvPr id="22" name="Text 20"/>
+          <p:cNvSpPr/>
+          <p:nvPr/>
+        </p:nvSpPr>
+        <p:spPr>
+          <a:xfrm>
+            <a:off x="14365545" y="2679192"/>
+            <a:ext cx="1280160" cy="548640"/>
+          </a:xfrm>
+          <a:prstGeom prst="rect">
+            <a:avLst/>
+          </a:prstGeom>
+          <a:noFill/>
+          <a:ln/>
+        </p:spPr>
+        <p:txBody>
+          <a:bodyPr wrap="square" lIns="0" tIns="0" rIns="0" bIns="0" rtlCol="0" anchor="ctr"/>
+          <a:lstStyle/>
+          <a:p>
+            <a:pPr marL="0" indent="0">
+              <a:buNone/>
+            </a:pPr>
+            <a:r>
+              <a:rPr lang="en-US" sz="950" dirty="0">
+                <a:solidFill>
+                  <a:srgbClr val="666666"/>
+                </a:solidFill>
+                <a:latin typeface="Calibri Light" pitchFamily="34" charset="0"/>
+                <a:ea typeface="Calibri Light" pitchFamily="34" charset="-122"/>
+                <a:cs typeface="Calibri Light" pitchFamily="34" charset="-120"/>
+              </a:rPr>
+              <a:t>Лична база данни</a:t>
+            </a:r>
+            <a:endParaRPr lang="en-US" sz="950" dirty="0"/>
+          </a:p>
+          <a:p>
+            <a:pPr marL="0" indent="0">
+              <a:buNone/>
+            </a:pPr>
+            <a:r>
+              <a:rPr lang="en-US" sz="950" dirty="0">
+                <a:solidFill>
+                  <a:srgbClr val="666666"/>
+                </a:solidFill>
+                <a:latin typeface="Calibri Light" pitchFamily="34" charset="0"/>
+                <a:ea typeface="Calibri Light" pitchFamily="34" charset="-122"/>
+                <a:cs typeface="Calibri Light" pitchFamily="34" charset="-120"/>
+              </a:rPr>
+              <a:t>филтрира + буства</a:t>
+            </a:r>
+            <a:endParaRPr lang="en-US" sz="950" dirty="0"/>
+          </a:p>
+        </p:txBody>
+      </p:sp>
+      <p:sp>
+        <p:nvSpPr>
+          <p:cNvPr id="23" name="Shape 21"/>
+          <p:cNvSpPr/>
+          <p:nvPr/>
+        </p:nvSpPr>
+        <p:spPr>
+          <a:xfrm>
+            <a:off x="15755433" y="2560320"/>
+            <a:ext cx="182880" cy="0"/>
+          </a:xfrm>
+          <a:prstGeom prst="line">
+            <a:avLst/>
+          </a:prstGeom>
+          <a:noFill/>
+          <a:ln w="12700">
+            <a:solidFill>
+              <a:srgbClr val="282828"/>
+            </a:solidFill>
+            <a:prstDash val="solid"/>
+          </a:ln>
+        </p:spPr>
+      </p:sp>
+      <p:sp>
+        <p:nvSpPr>
+          <p:cNvPr id="24" name="Shape 22"/>
+          <p:cNvSpPr/>
+          <p:nvPr/>
+        </p:nvSpPr>
+        <p:spPr>
+          <a:xfrm>
+            <a:off x="15974889" y="1828800"/>
+            <a:ext cx="1463040" cy="1463040"/>
+          </a:xfrm>
+          <a:prstGeom prst="rect">
+            <a:avLst/>
+          </a:prstGeom>
+          <a:solidFill>
+            <a:srgbClr val="111111"/>
+          </a:solidFill>
+          <a:ln w="6350">
+            <a:solidFill>
+              <a:srgbClr val="333333"/>
+            </a:solidFill>
+            <a:prstDash val="solid"/>
+          </a:ln>
+          <a:effectLst>
+            <a:outerShdw blurRad="254000" dist="50800" dir="8100000" algn="bl" rotWithShape="0">
+              <a:srgbClr val="000000">
+                <a:alpha val="50000"/>
+              </a:srgbClr>
+            </a:outerShdw>
+          </a:effectLst>
+        </p:spPr>
+      </p:sp>
+      <p:sp>
+        <p:nvSpPr>
+          <p:cNvPr id="25" name="Text 23"/>
+          <p:cNvSpPr/>
+          <p:nvPr/>
+        </p:nvSpPr>
+        <p:spPr>
+          <a:xfrm>
+            <a:off x="16112049" y="1938528"/>
+            <a:ext cx="365760" cy="320040"/>
+          </a:xfrm>
+          <a:prstGeom prst="rect">
+            <a:avLst/>
+          </a:prstGeom>
+          <a:noFill/>
+          <a:ln/>
+        </p:spPr>
+        <p:txBody>
+          <a:bodyPr wrap="square" lIns="0" tIns="0" rIns="0" bIns="0" rtlCol="0" anchor="ctr"/>
+          <a:lstStyle/>
+          <a:p>
+            <a:pPr marL="0" indent="0">
+              <a:buNone/>
+            </a:pPr>
+            <a:r>
+              <a:rPr lang="en-US" sz="1100" dirty="0">
+                <a:solidFill>
+                  <a:srgbClr val="292929"/>
+                </a:solidFill>
+                <a:latin typeface="Calibri" pitchFamily="34" charset="0"/>
+                <a:ea typeface="Calibri" pitchFamily="34" charset="-122"/>
+                <a:cs typeface="Calibri" pitchFamily="34" charset="-120"/>
+              </a:rPr>
+              <a:t>5</a:t>
+            </a:r>
+            <a:endParaRPr lang="en-US" sz="1100" dirty="0"/>
+          </a:p>
+        </p:txBody>
+      </p:sp>
+      <p:sp>
+        <p:nvSpPr>
+          <p:cNvPr id="26" name="Text 24"/>
+          <p:cNvSpPr/>
+          <p:nvPr/>
+        </p:nvSpPr>
+        <p:spPr>
+          <a:xfrm>
+            <a:off x="16084617" y="2304288"/>
+            <a:ext cx="1280160" cy="347472"/>
+          </a:xfrm>
+          <a:prstGeom prst="rect">
+            <a:avLst/>
+          </a:prstGeom>
+          <a:noFill/>
+          <a:ln/>
+        </p:spPr>
+        <p:txBody>
+          <a:bodyPr wrap="square" lIns="0" tIns="0" rIns="0" bIns="0" rtlCol="0" anchor="ctr"/>
+          <a:lstStyle/>
+          <a:p>
+            <a:pPr marL="0" indent="0">
+              <a:buNone/>
+            </a:pPr>
+            <a:r>
+              <a:rPr lang="en-US" sz="1300" b="1" dirty="0">
+                <a:solidFill>
+                  <a:srgbClr val="FFFFFF"/>
+                </a:solidFill>
+                <a:latin typeface="Calibri" pitchFamily="34" charset="0"/>
+                <a:ea typeface="Calibri" pitchFamily="34" charset="-122"/>
+                <a:cs typeface="Calibri" pitchFamily="34" charset="-120"/>
+              </a:rPr>
+              <a:t>Изход</a:t>
+            </a:r>
+            <a:endParaRPr lang="en-US" sz="1300" dirty="0"/>
+          </a:p>
+        </p:txBody>
+      </p:sp>
+      <p:sp>
+        <p:nvSpPr>
+          <p:cNvPr id="27" name="Text 25"/>
+          <p:cNvSpPr/>
+          <p:nvPr/>
+        </p:nvSpPr>
+        <p:spPr>
+          <a:xfrm>
+            <a:off x="16084617" y="2679192"/>
+            <a:ext cx="1280160" cy="548640"/>
+          </a:xfrm>
+          <a:prstGeom prst="rect">
+            <a:avLst/>
+          </a:prstGeom>
+          <a:noFill/>
+          <a:ln/>
+        </p:spPr>
+        <p:txBody>
+          <a:bodyPr wrap="square" lIns="0" tIns="0" rIns="0" bIns="0" rtlCol="0" anchor="ctr"/>
+          <a:lstStyle/>
+          <a:p>
+            <a:pPr marL="0" indent="0">
+              <a:buNone/>
+            </a:pPr>
+            <a:r>
+              <a:rPr lang="en-US" sz="950" dirty="0">
+                <a:solidFill>
+                  <a:srgbClr val="666666"/>
+                </a:solidFill>
+                <a:latin typeface="Calibri Light" pitchFamily="34" charset="0"/>
+                <a:ea typeface="Calibri Light" pitchFamily="34" charset="-122"/>
+                <a:cs typeface="Calibri Light" pitchFamily="34" charset="-120"/>
+              </a:rPr>
+              <a:t>TTS или действие</a:t>
+            </a:r>
+            <a:endParaRPr lang="en-US" sz="950" dirty="0"/>
+          </a:p>
+          <a:p>
+            <a:pPr marL="0" indent="0">
+              <a:buNone/>
+            </a:pPr>
+            <a:r>
+              <a:rPr lang="en-US" sz="950" dirty="0">
+                <a:solidFill>
+                  <a:srgbClr val="666666"/>
+                </a:solidFill>
+                <a:latin typeface="Calibri Light" pitchFamily="34" charset="0"/>
+                <a:ea typeface="Calibri Light" pitchFamily="34" charset="-122"/>
+                <a:cs typeface="Calibri Light" pitchFamily="34" charset="-120"/>
+              </a:rPr>
+              <a:t>се изпълнява</a:t>
+            </a:r>
+            <a:endParaRPr lang="en-US" sz="950" dirty="0"/>
+          </a:p>
+        </p:txBody>
+      </p:sp>
+      <p:sp>
+        <p:nvSpPr>
+          <p:cNvPr id="28" name="Text 26"/>
+          <p:cNvSpPr/>
+          <p:nvPr/>
+        </p:nvSpPr>
+        <p:spPr>
+          <a:xfrm>
+            <a:off x="10959374" y="3520440"/>
+            <a:ext cx="1463040" cy="256032"/>
+          </a:xfrm>
+          <a:prstGeom prst="rect">
+            <a:avLst/>
+          </a:prstGeom>
+          <a:noFill/>
+          <a:ln/>
+        </p:spPr>
+        <p:txBody>
+          <a:bodyPr wrap="square" rtlCol="0" anchor="ctr"/>
+          <a:lstStyle/>
+          <a:p>
+            <a:pPr marL="0" indent="0" algn="ctr">
+              <a:buNone/>
+            </a:pPr>
+            <a:r>
+              <a:rPr lang="en-US" sz="900" kern="0" spc="100" dirty="0">
+                <a:solidFill>
+                  <a:srgbClr val="2C2C2C"/>
+                </a:solidFill>
+                <a:latin typeface="Calibri" pitchFamily="34" charset="0"/>
+                <a:ea typeface="Calibri" pitchFamily="34" charset="-122"/>
+                <a:cs typeface="Calibri" pitchFamily="34" charset="-120"/>
+              </a:rPr>
+              <a:t>WebSocket</a:t>
+            </a:r>
+            <a:endParaRPr lang="en-US" sz="900" dirty="0"/>
+          </a:p>
+        </p:txBody>
+      </p:sp>
+      <p:sp>
+        <p:nvSpPr>
+          <p:cNvPr id="29" name="Shape 27"/>
+          <p:cNvSpPr/>
+          <p:nvPr/>
+        </p:nvSpPr>
+        <p:spPr>
+          <a:xfrm>
+            <a:off x="9313454" y="3749040"/>
+            <a:ext cx="2926080" cy="0"/>
+          </a:xfrm>
+          <a:prstGeom prst="line">
+            <a:avLst/>
+          </a:prstGeom>
+          <a:noFill/>
+          <a:ln w="6350">
+            <a:solidFill>
+              <a:srgbClr val="222222"/>
+            </a:solidFill>
+            <a:prstDash val="dash"/>
+          </a:ln>
+        </p:spPr>
+      </p:sp>
+      <p:sp>
+        <p:nvSpPr>
+          <p:cNvPr id="30" name="Text 28"/>
+          <p:cNvSpPr/>
+          <p:nvPr/>
+        </p:nvSpPr>
+        <p:spPr>
+          <a:xfrm>
+            <a:off x="12422414" y="3520440"/>
+            <a:ext cx="1828800" cy="256032"/>
+          </a:xfrm>
+          <a:prstGeom prst="rect">
+            <a:avLst/>
+          </a:prstGeom>
+          <a:noFill/>
+          <a:ln/>
+        </p:spPr>
+        <p:txBody>
+          <a:bodyPr wrap="square" rtlCol="0" anchor="ctr"/>
+          <a:lstStyle/>
+          <a:p>
+            <a:pPr marL="0" indent="0" algn="ctr">
+              <a:buNone/>
+            </a:pPr>
+            <a:r>
+              <a:rPr lang="en-US" sz="900" kern="0" spc="100" dirty="0">
+                <a:solidFill>
+                  <a:srgbClr val="2C2C2C"/>
+                </a:solidFill>
+                <a:latin typeface="Calibri" pitchFamily="34" charset="0"/>
+                <a:ea typeface="Calibri" pitchFamily="34" charset="-122"/>
+                <a:cs typeface="Calibri" pitchFamily="34" charset="-120"/>
+              </a:rPr>
+              <a:t>FastAPI backend</a:t>
+            </a:r>
+            <a:endParaRPr lang="en-US" sz="900" dirty="0"/>
+          </a:p>
+        </p:txBody>
+      </p:sp>
+      <p:sp>
+        <p:nvSpPr>
+          <p:cNvPr id="31" name="Shape 29"/>
+          <p:cNvSpPr/>
+          <p:nvPr/>
+        </p:nvSpPr>
+        <p:spPr>
+          <a:xfrm>
+            <a:off x="12239534" y="3749040"/>
+            <a:ext cx="2926080" cy="0"/>
+          </a:xfrm>
+          <a:prstGeom prst="line">
+            <a:avLst/>
+          </a:prstGeom>
+          <a:noFill/>
+          <a:ln w="6350">
+            <a:solidFill>
+              <a:srgbClr val="222222"/>
+            </a:solidFill>
+            <a:prstDash val="dash"/>
+          </a:ln>
+        </p:spPr>
+      </p:sp>
+      <p:sp>
+        <p:nvSpPr>
+          <p:cNvPr id="33" name="Text 1">
+            <a:extLst>
+              <a:ext uri="{FF2B5EF4-FFF2-40B4-BE49-F238E27FC236}">
+                <a16:creationId xmlns:a16="http://schemas.microsoft.com/office/drawing/2014/main" id="{0DB9A64D-32CC-44EA-9137-D2E8CEFF4C51}"/>
+              </a:ext>
+            </a:extLst>
+          </p:cNvPr>
+          <p:cNvSpPr/>
+          <p:nvPr/>
+        </p:nvSpPr>
+        <p:spPr>
+          <a:xfrm>
+            <a:off x="457200" y="640080"/>
+            <a:ext cx="8229600" cy="548640"/>
+          </a:xfrm>
+          <a:prstGeom prst="rect">
+            <a:avLst/>
+          </a:prstGeom>
+          <a:noFill/>
+          <a:ln/>
+        </p:spPr>
+        <p:txBody>
+          <a:bodyPr wrap="square" rtlCol="0" anchor="ctr"/>
+          <a:lstStyle/>
+          <a:p>
+            <a:pPr marL="0" indent="0">
+              <a:buNone/>
+            </a:pPr>
+            <a:r>
+              <a:rPr lang="en-US" sz="3200" dirty="0">
+                <a:solidFill>
+                  <a:srgbClr val="FFFFFF"/>
+                </a:solidFill>
+                <a:latin typeface="Calibri Light" pitchFamily="34" charset="0"/>
+                <a:ea typeface="Calibri Light" pitchFamily="34" charset="-122"/>
+                <a:cs typeface="Calibri Light" pitchFamily="34" charset="-120"/>
+              </a:rPr>
+              <a:t>Как работи Voxen?</a:t>
+            </a:r>
+            <a:endParaRPr lang="en-US" sz="3200" dirty="0"/>
+          </a:p>
+        </p:txBody>
+      </p:sp>
+      <p:sp>
+        <p:nvSpPr>
+          <p:cNvPr id="34" name="Shape 2">
+            <a:extLst>
+              <a:ext uri="{FF2B5EF4-FFF2-40B4-BE49-F238E27FC236}">
+                <a16:creationId xmlns:a16="http://schemas.microsoft.com/office/drawing/2014/main" id="{62CA7FAD-B4BB-4289-8730-8EB1BB6EF56B}"/>
+              </a:ext>
+            </a:extLst>
+          </p:cNvPr>
+          <p:cNvSpPr/>
+          <p:nvPr/>
+        </p:nvSpPr>
+        <p:spPr>
+          <a:xfrm>
+            <a:off x="274320" y="1828800"/>
+            <a:ext cx="1463040" cy="1463040"/>
+          </a:xfrm>
+          <a:prstGeom prst="rect">
+            <a:avLst/>
+          </a:prstGeom>
+          <a:solidFill>
+            <a:srgbClr val="111111"/>
+          </a:solidFill>
+          <a:ln w="6350">
+            <a:solidFill>
+              <a:srgbClr val="333333"/>
+            </a:solidFill>
+            <a:prstDash val="solid"/>
+          </a:ln>
+          <a:effectLst>
+            <a:outerShdw blurRad="254000" dist="50800" dir="8100000" algn="bl" rotWithShape="0">
+              <a:srgbClr val="000000">
+                <a:alpha val="50000"/>
+              </a:srgbClr>
+            </a:outerShdw>
+          </a:effectLst>
+        </p:spPr>
+      </p:sp>
+      <p:sp>
+        <p:nvSpPr>
+          <p:cNvPr id="35" name="Text 3">
+            <a:extLst>
+              <a:ext uri="{FF2B5EF4-FFF2-40B4-BE49-F238E27FC236}">
+                <a16:creationId xmlns:a16="http://schemas.microsoft.com/office/drawing/2014/main" id="{B95DF1BE-A8EA-4977-8C5F-70C222B718E3}"/>
+              </a:ext>
+            </a:extLst>
+          </p:cNvPr>
+          <p:cNvSpPr/>
+          <p:nvPr/>
+        </p:nvSpPr>
+        <p:spPr>
+          <a:xfrm>
+            <a:off x="411480" y="1938528"/>
+            <a:ext cx="365760" cy="320040"/>
+          </a:xfrm>
+          <a:prstGeom prst="rect">
+            <a:avLst/>
+          </a:prstGeom>
+          <a:noFill/>
+          <a:ln/>
+        </p:spPr>
+        <p:txBody>
+          <a:bodyPr wrap="square" lIns="0" tIns="0" rIns="0" bIns="0" rtlCol="0" anchor="ctr"/>
+          <a:lstStyle/>
+          <a:p>
+            <a:pPr marL="0" indent="0">
+              <a:buNone/>
+            </a:pPr>
+            <a:r>
+              <a:rPr lang="en-US" sz="1100" dirty="0">
+                <a:solidFill>
+                  <a:srgbClr val="292929"/>
+                </a:solidFill>
+                <a:latin typeface="Calibri" pitchFamily="34" charset="0"/>
+                <a:ea typeface="Calibri" pitchFamily="34" charset="-122"/>
+                <a:cs typeface="Calibri" pitchFamily="34" charset="-120"/>
+              </a:rPr>
+              <a:t>1</a:t>
+            </a:r>
+            <a:endParaRPr lang="en-US" sz="1100" dirty="0"/>
+          </a:p>
+        </p:txBody>
+      </p:sp>
+      <p:sp>
+        <p:nvSpPr>
+          <p:cNvPr id="36" name="Text 4">
+            <a:extLst>
+              <a:ext uri="{FF2B5EF4-FFF2-40B4-BE49-F238E27FC236}">
+                <a16:creationId xmlns:a16="http://schemas.microsoft.com/office/drawing/2014/main" id="{9CB19C2D-E22A-4E40-BE8A-F5E2C4F09CDE}"/>
+              </a:ext>
+            </a:extLst>
+          </p:cNvPr>
+          <p:cNvSpPr/>
+          <p:nvPr/>
+        </p:nvSpPr>
+        <p:spPr>
+          <a:xfrm>
+            <a:off x="384048" y="2304288"/>
+            <a:ext cx="1280160" cy="347472"/>
+          </a:xfrm>
+          <a:prstGeom prst="rect">
+            <a:avLst/>
+          </a:prstGeom>
+          <a:noFill/>
+          <a:ln/>
+        </p:spPr>
+        <p:txBody>
+          <a:bodyPr wrap="square" lIns="0" tIns="0" rIns="0" bIns="0" rtlCol="0" anchor="ctr"/>
+          <a:lstStyle/>
+          <a:p>
+            <a:pPr marL="0" indent="0">
+              <a:buNone/>
+            </a:pPr>
+            <a:r>
+              <a:rPr lang="bg-BG" sz="1300" b="1" dirty="0">
+                <a:solidFill>
+                  <a:srgbClr val="FFFFFF"/>
+                </a:solidFill>
+                <a:latin typeface="Calibri" pitchFamily="34" charset="0"/>
+                <a:ea typeface="Calibri" pitchFamily="34" charset="-122"/>
+                <a:cs typeface="Calibri" pitchFamily="34" charset="-120"/>
+              </a:rPr>
+              <a:t>Входни данни</a:t>
+            </a:r>
+            <a:endParaRPr lang="en-US" sz="1300" dirty="0"/>
+          </a:p>
+        </p:txBody>
+      </p:sp>
+      <p:sp>
+        <p:nvSpPr>
+          <p:cNvPr id="37" name="Text 5">
+            <a:extLst>
+              <a:ext uri="{FF2B5EF4-FFF2-40B4-BE49-F238E27FC236}">
+                <a16:creationId xmlns:a16="http://schemas.microsoft.com/office/drawing/2014/main" id="{6DC8BD78-CCBD-407C-9B58-B8E8D0266C48}"/>
+              </a:ext>
+            </a:extLst>
+          </p:cNvPr>
+          <p:cNvSpPr/>
+          <p:nvPr/>
+        </p:nvSpPr>
+        <p:spPr>
+          <a:xfrm>
+            <a:off x="384048" y="2679192"/>
+            <a:ext cx="1280160" cy="548640"/>
+          </a:xfrm>
+          <a:prstGeom prst="rect">
+            <a:avLst/>
+          </a:prstGeom>
+          <a:noFill/>
+          <a:ln/>
+        </p:spPr>
+        <p:txBody>
+          <a:bodyPr wrap="square" lIns="0" tIns="0" rIns="0" bIns="0" rtlCol="0" anchor="ctr"/>
+          <a:lstStyle/>
+          <a:p>
+            <a:pPr marL="0" indent="0">
+              <a:buNone/>
+            </a:pPr>
+            <a:r>
+              <a:rPr lang="en-US" sz="950" dirty="0">
+                <a:solidFill>
+                  <a:srgbClr val="666666"/>
+                </a:solidFill>
+                <a:latin typeface="Calibri Light" pitchFamily="34" charset="0"/>
+                <a:ea typeface="Calibri Light" pitchFamily="34" charset="-122"/>
+                <a:cs typeface="Calibri Light" pitchFamily="34" charset="-120"/>
+              </a:rPr>
+              <a:t>ESP32 </a:t>
+            </a:r>
+            <a:r>
+              <a:rPr lang="bg-BG" sz="950" dirty="0">
+                <a:solidFill>
+                  <a:srgbClr val="666666"/>
+                </a:solidFill>
+                <a:latin typeface="Calibri Light" pitchFamily="34" charset="0"/>
+                <a:ea typeface="Calibri Light" pitchFamily="34" charset="-122"/>
+                <a:cs typeface="Calibri Light" pitchFamily="34" charset="-120"/>
+              </a:rPr>
+              <a:t>- </a:t>
+            </a:r>
+            <a:r>
+              <a:rPr lang="en-US" sz="950" dirty="0">
+                <a:solidFill>
+                  <a:srgbClr val="666666"/>
+                </a:solidFill>
+                <a:latin typeface="Calibri Light" pitchFamily="34" charset="0"/>
+                <a:ea typeface="Calibri Light" pitchFamily="34" charset="-122"/>
+                <a:cs typeface="Calibri Light" pitchFamily="34" charset="-120"/>
+              </a:rPr>
+              <a:t>акселерометър</a:t>
+            </a:r>
+            <a:br>
+              <a:rPr lang="en-US" sz="950" dirty="0">
+                <a:solidFill>
+                  <a:srgbClr val="666666"/>
+                </a:solidFill>
+                <a:latin typeface="Calibri Light" pitchFamily="34" charset="0"/>
+                <a:ea typeface="Calibri Light" pitchFamily="34" charset="-122"/>
+                <a:cs typeface="Calibri Light" pitchFamily="34" charset="-120"/>
+              </a:rPr>
+            </a:br>
+            <a:r>
+              <a:rPr lang="en-US" sz="950" dirty="0">
+                <a:solidFill>
+                  <a:srgbClr val="666666"/>
+                </a:solidFill>
+                <a:latin typeface="Calibri Light" pitchFamily="34" charset="0"/>
+                <a:ea typeface="Calibri Light" pitchFamily="34" charset="-122"/>
+                <a:cs typeface="Calibri Light" pitchFamily="34" charset="-120"/>
+              </a:rPr>
+              <a:t>Raspberry Pi, laptop camera - eye tracking</a:t>
+            </a:r>
+          </a:p>
+        </p:txBody>
+      </p:sp>
+      <p:sp>
+        <p:nvSpPr>
+          <p:cNvPr id="38" name="Shape 6">
+            <a:extLst>
+              <a:ext uri="{FF2B5EF4-FFF2-40B4-BE49-F238E27FC236}">
+                <a16:creationId xmlns:a16="http://schemas.microsoft.com/office/drawing/2014/main" id="{02577663-DE61-4FE5-AEF0-625B3F1BABEF}"/>
+              </a:ext>
+            </a:extLst>
+          </p:cNvPr>
+          <p:cNvSpPr/>
+          <p:nvPr/>
+        </p:nvSpPr>
+        <p:spPr>
+          <a:xfrm>
+            <a:off x="1773936" y="2560320"/>
+            <a:ext cx="182880" cy="0"/>
+          </a:xfrm>
+          <a:prstGeom prst="line">
+            <a:avLst/>
+          </a:prstGeom>
+          <a:noFill/>
+          <a:ln w="12700">
+            <a:solidFill>
+              <a:srgbClr val="282828"/>
+            </a:solidFill>
+            <a:prstDash val="solid"/>
+          </a:ln>
+        </p:spPr>
+      </p:sp>
+      <p:sp>
+        <p:nvSpPr>
+          <p:cNvPr id="39" name="Shape 7">
+            <a:extLst>
+              <a:ext uri="{FF2B5EF4-FFF2-40B4-BE49-F238E27FC236}">
+                <a16:creationId xmlns:a16="http://schemas.microsoft.com/office/drawing/2014/main" id="{BFDBA172-02C7-4DE0-B44F-297410924E96}"/>
+              </a:ext>
+            </a:extLst>
+          </p:cNvPr>
+          <p:cNvSpPr/>
+          <p:nvPr/>
+        </p:nvSpPr>
+        <p:spPr>
+          <a:xfrm>
+            <a:off x="1993392" y="1828800"/>
+            <a:ext cx="1463040" cy="1463040"/>
+          </a:xfrm>
+          <a:prstGeom prst="rect">
+            <a:avLst/>
+          </a:prstGeom>
+          <a:solidFill>
+            <a:srgbClr val="111111"/>
+          </a:solidFill>
+          <a:ln w="6350">
+            <a:solidFill>
+              <a:srgbClr val="333333"/>
+            </a:solidFill>
+            <a:prstDash val="solid"/>
+          </a:ln>
+          <a:effectLst>
+            <a:outerShdw blurRad="254000" dist="50800" dir="8100000" algn="bl" rotWithShape="0">
+              <a:srgbClr val="000000">
+                <a:alpha val="50000"/>
+              </a:srgbClr>
+            </a:outerShdw>
+          </a:effectLst>
+        </p:spPr>
+      </p:sp>
+      <p:sp>
+        <p:nvSpPr>
+          <p:cNvPr id="40" name="Text 8">
+            <a:extLst>
+              <a:ext uri="{FF2B5EF4-FFF2-40B4-BE49-F238E27FC236}">
+                <a16:creationId xmlns:a16="http://schemas.microsoft.com/office/drawing/2014/main" id="{1950F78D-1249-4779-9AAF-8BA421935FA8}"/>
+              </a:ext>
+            </a:extLst>
+          </p:cNvPr>
+          <p:cNvSpPr/>
+          <p:nvPr/>
+        </p:nvSpPr>
+        <p:spPr>
+          <a:xfrm>
+            <a:off x="2130552" y="1938528"/>
+            <a:ext cx="365760" cy="320040"/>
+          </a:xfrm>
+          <a:prstGeom prst="rect">
+            <a:avLst/>
+          </a:prstGeom>
+          <a:noFill/>
+          <a:ln/>
+        </p:spPr>
+        <p:txBody>
+          <a:bodyPr wrap="square" lIns="0" tIns="0" rIns="0" bIns="0" rtlCol="0" anchor="ctr"/>
+          <a:lstStyle/>
+          <a:p>
+            <a:pPr marL="0" indent="0">
+              <a:buNone/>
+            </a:pPr>
+            <a:r>
+              <a:rPr lang="en-US" sz="1100" dirty="0">
+                <a:solidFill>
+                  <a:srgbClr val="292929"/>
+                </a:solidFill>
+                <a:latin typeface="Calibri" pitchFamily="34" charset="0"/>
+                <a:ea typeface="Calibri" pitchFamily="34" charset="-122"/>
+                <a:cs typeface="Calibri" pitchFamily="34" charset="-120"/>
+              </a:rPr>
+              <a:t>2</a:t>
+            </a:r>
+            <a:endParaRPr lang="en-US" sz="1100" dirty="0"/>
+          </a:p>
+        </p:txBody>
+      </p:sp>
+      <p:sp>
+        <p:nvSpPr>
+          <p:cNvPr id="41" name="Text 9">
+            <a:extLst>
+              <a:ext uri="{FF2B5EF4-FFF2-40B4-BE49-F238E27FC236}">
+                <a16:creationId xmlns:a16="http://schemas.microsoft.com/office/drawing/2014/main" id="{0EDE36D8-BE33-4FE2-91CB-2ABE6549BDBB}"/>
+              </a:ext>
+            </a:extLst>
+          </p:cNvPr>
+          <p:cNvSpPr/>
+          <p:nvPr/>
+        </p:nvSpPr>
+        <p:spPr>
+          <a:xfrm>
+            <a:off x="2103120" y="2304288"/>
+            <a:ext cx="1280160" cy="347472"/>
+          </a:xfrm>
+          <a:prstGeom prst="rect">
+            <a:avLst/>
+          </a:prstGeom>
+          <a:noFill/>
+          <a:ln/>
+        </p:spPr>
+        <p:txBody>
+          <a:bodyPr wrap="square" lIns="0" tIns="0" rIns="0" bIns="0" rtlCol="0" anchor="ctr"/>
+          <a:lstStyle/>
+          <a:p>
+            <a:pPr marL="0" indent="0">
+              <a:buNone/>
+            </a:pPr>
+            <a:r>
+              <a:rPr lang="en-US" sz="1300" b="1" dirty="0">
+                <a:solidFill>
+                  <a:srgbClr val="FFFFFF"/>
+                </a:solidFill>
+                <a:latin typeface="Calibri" pitchFamily="34" charset="0"/>
+                <a:ea typeface="Calibri" pitchFamily="34" charset="-122"/>
+                <a:cs typeface="Calibri" pitchFamily="34" charset="-120"/>
+              </a:rPr>
+              <a:t>Интерфейс</a:t>
+            </a:r>
+            <a:endParaRPr lang="en-US" sz="1300" dirty="0"/>
+          </a:p>
+        </p:txBody>
+      </p:sp>
+      <p:sp>
+        <p:nvSpPr>
+          <p:cNvPr id="42" name="Text 10">
+            <a:extLst>
+              <a:ext uri="{FF2B5EF4-FFF2-40B4-BE49-F238E27FC236}">
+                <a16:creationId xmlns:a16="http://schemas.microsoft.com/office/drawing/2014/main" id="{C8374CAC-CCE2-4B0B-9801-29CFFD3F29B2}"/>
+              </a:ext>
+            </a:extLst>
+          </p:cNvPr>
+          <p:cNvSpPr/>
+          <p:nvPr/>
+        </p:nvSpPr>
+        <p:spPr>
+          <a:xfrm>
+            <a:off x="2103120" y="2679192"/>
+            <a:ext cx="1280160" cy="548640"/>
+          </a:xfrm>
+          <a:prstGeom prst="rect">
+            <a:avLst/>
+          </a:prstGeom>
+          <a:noFill/>
+          <a:ln/>
+        </p:spPr>
+        <p:txBody>
+          <a:bodyPr wrap="square" lIns="0" tIns="0" rIns="0" bIns="0" rtlCol="0" anchor="ctr"/>
+          <a:lstStyle/>
+          <a:p>
+            <a:pPr marL="0" indent="0">
+              <a:buNone/>
+            </a:pPr>
+            <a:r>
+              <a:rPr lang="en-US" sz="950" dirty="0">
+                <a:solidFill>
+                  <a:srgbClr val="666666"/>
+                </a:solidFill>
+                <a:latin typeface="Calibri Light" pitchFamily="34" charset="0"/>
+                <a:ea typeface="Calibri Light" pitchFamily="34" charset="-122"/>
+                <a:cs typeface="Calibri Light" pitchFamily="34" charset="-120"/>
+              </a:rPr>
+              <a:t>React показва думи,</a:t>
+            </a:r>
+            <a:endParaRPr lang="en-US" sz="950" dirty="0"/>
+          </a:p>
+          <a:p>
+            <a:pPr marL="0" indent="0">
+              <a:buNone/>
+            </a:pPr>
+            <a:r>
+              <a:rPr lang="en-US" sz="950" dirty="0">
+                <a:solidFill>
+                  <a:srgbClr val="666666"/>
+                </a:solidFill>
+                <a:latin typeface="Calibri Light" pitchFamily="34" charset="0"/>
+                <a:ea typeface="Calibri Light" pitchFamily="34" charset="-122"/>
+                <a:cs typeface="Calibri Light" pitchFamily="34" charset="-120"/>
+              </a:rPr>
+              <a:t>потребителят избира</a:t>
+            </a:r>
+            <a:endParaRPr lang="en-US" sz="950" dirty="0"/>
+          </a:p>
+        </p:txBody>
+      </p:sp>
+      <p:sp>
+        <p:nvSpPr>
+          <p:cNvPr id="43" name="Shape 11">
+            <a:extLst>
+              <a:ext uri="{FF2B5EF4-FFF2-40B4-BE49-F238E27FC236}">
+                <a16:creationId xmlns:a16="http://schemas.microsoft.com/office/drawing/2014/main" id="{7934574D-9196-4E33-ABEA-D735D0CD0DEA}"/>
+              </a:ext>
+            </a:extLst>
+          </p:cNvPr>
+          <p:cNvSpPr/>
+          <p:nvPr/>
+        </p:nvSpPr>
+        <p:spPr>
+          <a:xfrm>
+            <a:off x="3493008" y="2560320"/>
+            <a:ext cx="182880" cy="0"/>
+          </a:xfrm>
+          <a:prstGeom prst="line">
+            <a:avLst/>
+          </a:prstGeom>
+          <a:noFill/>
+          <a:ln w="12700">
+            <a:solidFill>
+              <a:srgbClr val="282828"/>
+            </a:solidFill>
+            <a:prstDash val="solid"/>
+          </a:ln>
+        </p:spPr>
+      </p:sp>
+      <p:sp>
+        <p:nvSpPr>
+          <p:cNvPr id="44" name="Shape 12">
+            <a:extLst>
+              <a:ext uri="{FF2B5EF4-FFF2-40B4-BE49-F238E27FC236}">
+                <a16:creationId xmlns:a16="http://schemas.microsoft.com/office/drawing/2014/main" id="{C4DDA5C4-05E6-4B02-B6F3-174A5147829F}"/>
+              </a:ext>
+            </a:extLst>
+          </p:cNvPr>
+          <p:cNvSpPr/>
+          <p:nvPr/>
+        </p:nvSpPr>
+        <p:spPr>
+          <a:xfrm>
+            <a:off x="3712464" y="1828800"/>
+            <a:ext cx="1463040" cy="1463040"/>
+          </a:xfrm>
+          <a:prstGeom prst="rect">
+            <a:avLst/>
+          </a:prstGeom>
+          <a:solidFill>
+            <a:srgbClr val="111111"/>
+          </a:solidFill>
+          <a:ln w="6350">
+            <a:solidFill>
+              <a:srgbClr val="333333"/>
+            </a:solidFill>
+            <a:prstDash val="solid"/>
+          </a:ln>
+          <a:effectLst>
+            <a:outerShdw blurRad="254000" dist="50800" dir="8100000" algn="bl" rotWithShape="0">
+              <a:srgbClr val="000000">
+                <a:alpha val="50000"/>
+              </a:srgbClr>
+            </a:outerShdw>
+          </a:effectLst>
+        </p:spPr>
+      </p:sp>
+      <p:sp>
+        <p:nvSpPr>
+          <p:cNvPr id="45" name="Text 13">
+            <a:extLst>
+              <a:ext uri="{FF2B5EF4-FFF2-40B4-BE49-F238E27FC236}">
+                <a16:creationId xmlns:a16="http://schemas.microsoft.com/office/drawing/2014/main" id="{24E93824-6A54-496E-9ECC-E7E228271576}"/>
+              </a:ext>
+            </a:extLst>
+          </p:cNvPr>
+          <p:cNvSpPr/>
+          <p:nvPr/>
+        </p:nvSpPr>
+        <p:spPr>
+          <a:xfrm>
+            <a:off x="3849624" y="1938528"/>
+            <a:ext cx="365760" cy="320040"/>
+          </a:xfrm>
+          <a:prstGeom prst="rect">
+            <a:avLst/>
+          </a:prstGeom>
+          <a:noFill/>
+          <a:ln/>
+        </p:spPr>
+        <p:txBody>
+          <a:bodyPr wrap="square" lIns="0" tIns="0" rIns="0" bIns="0" rtlCol="0" anchor="ctr"/>
+          <a:lstStyle/>
+          <a:p>
+            <a:pPr marL="0" indent="0">
+              <a:buNone/>
+            </a:pPr>
+            <a:r>
+              <a:rPr lang="en-US" sz="1100" dirty="0">
+                <a:solidFill>
+                  <a:srgbClr val="292929"/>
+                </a:solidFill>
+                <a:latin typeface="Calibri" pitchFamily="34" charset="0"/>
+                <a:ea typeface="Calibri" pitchFamily="34" charset="-122"/>
+                <a:cs typeface="Calibri" pitchFamily="34" charset="-120"/>
+              </a:rPr>
+              <a:t>3</a:t>
+            </a:r>
+            <a:endParaRPr lang="en-US" sz="1100" dirty="0"/>
+          </a:p>
+        </p:txBody>
+      </p:sp>
+      <p:sp>
+        <p:nvSpPr>
+          <p:cNvPr id="46" name="Text 14">
+            <a:extLst>
+              <a:ext uri="{FF2B5EF4-FFF2-40B4-BE49-F238E27FC236}">
+                <a16:creationId xmlns:a16="http://schemas.microsoft.com/office/drawing/2014/main" id="{A0EA364E-F4F2-4657-A41D-0521CDF2BC90}"/>
+              </a:ext>
+            </a:extLst>
+          </p:cNvPr>
+          <p:cNvSpPr/>
+          <p:nvPr/>
+        </p:nvSpPr>
+        <p:spPr>
+          <a:xfrm>
+            <a:off x="3822192" y="2304288"/>
+            <a:ext cx="1280160" cy="347472"/>
+          </a:xfrm>
+          <a:prstGeom prst="rect">
+            <a:avLst/>
+          </a:prstGeom>
+          <a:noFill/>
+          <a:ln/>
+        </p:spPr>
+        <p:txBody>
+          <a:bodyPr wrap="square" lIns="0" tIns="0" rIns="0" bIns="0" rtlCol="0" anchor="ctr"/>
+          <a:lstStyle/>
+          <a:p>
+            <a:pPr marL="0" indent="0">
+              <a:buNone/>
+            </a:pPr>
+            <a:r>
+              <a:rPr lang="en-US" sz="1300" b="1" dirty="0">
+                <a:solidFill>
+                  <a:srgbClr val="FFFFFF"/>
+                </a:solidFill>
+                <a:latin typeface="Calibri" pitchFamily="34" charset="0"/>
+                <a:ea typeface="Calibri" pitchFamily="34" charset="-122"/>
+                <a:cs typeface="Calibri" pitchFamily="34" charset="-120"/>
+              </a:rPr>
+              <a:t>AI модел</a:t>
+            </a:r>
+            <a:endParaRPr lang="en-US" sz="1300" dirty="0"/>
+          </a:p>
+        </p:txBody>
+      </p:sp>
+      <p:sp>
+        <p:nvSpPr>
+          <p:cNvPr id="47" name="Text 15">
+            <a:extLst>
+              <a:ext uri="{FF2B5EF4-FFF2-40B4-BE49-F238E27FC236}">
+                <a16:creationId xmlns:a16="http://schemas.microsoft.com/office/drawing/2014/main" id="{D117B4F7-EE91-4DC7-97FD-202C43003688}"/>
+              </a:ext>
+            </a:extLst>
+          </p:cNvPr>
+          <p:cNvSpPr/>
+          <p:nvPr/>
+        </p:nvSpPr>
+        <p:spPr>
+          <a:xfrm>
+            <a:off x="3822192" y="2679192"/>
+            <a:ext cx="1280160" cy="548640"/>
+          </a:xfrm>
+          <a:prstGeom prst="rect">
+            <a:avLst/>
+          </a:prstGeom>
+          <a:noFill/>
+          <a:ln/>
+        </p:spPr>
+        <p:txBody>
+          <a:bodyPr wrap="square" lIns="0" tIns="0" rIns="0" bIns="0" rtlCol="0" anchor="ctr"/>
+          <a:lstStyle/>
+          <a:p>
+            <a:pPr marL="0" indent="0">
+              <a:buNone/>
+            </a:pPr>
+            <a:r>
+              <a:rPr lang="en-US" sz="950" dirty="0">
+                <a:solidFill>
+                  <a:srgbClr val="666666"/>
+                </a:solidFill>
+                <a:latin typeface="Calibri Light" pitchFamily="34" charset="0"/>
+                <a:ea typeface="Calibri Light" pitchFamily="34" charset="-122"/>
+                <a:cs typeface="Calibri Light" pitchFamily="34" charset="-120"/>
+              </a:rPr>
+              <a:t>distilGPT-2 дава </a:t>
+            </a:r>
+            <a:r>
+              <a:rPr lang="bg-BG" sz="950" dirty="0">
+                <a:solidFill>
+                  <a:srgbClr val="666666"/>
+                </a:solidFill>
+                <a:latin typeface="Calibri Light" pitchFamily="34" charset="0"/>
+                <a:ea typeface="Calibri Light" pitchFamily="34" charset="-122"/>
+                <a:cs typeface="Calibri Light" pitchFamily="34" charset="-120"/>
+              </a:rPr>
+              <a:t>предложения</a:t>
+            </a:r>
+            <a:endParaRPr lang="bg-BG" sz="950" dirty="0"/>
+          </a:p>
+          <a:p>
+            <a:pPr marL="0" indent="0">
+              <a:buNone/>
+            </a:pPr>
+            <a:r>
+              <a:rPr lang="ru-RU" sz="950" dirty="0">
+                <a:solidFill>
+                  <a:srgbClr val="666666"/>
+                </a:solidFill>
+                <a:latin typeface="Calibri Light" pitchFamily="34" charset="0"/>
+                <a:ea typeface="Calibri Light" pitchFamily="34" charset="-122"/>
+                <a:cs typeface="Calibri Light" pitchFamily="34" charset="-120"/>
+              </a:rPr>
+              <a:t>Engram - управл</a:t>
+            </a:r>
+            <a:r>
+              <a:rPr lang="bg-BG" sz="950" dirty="0">
+                <a:solidFill>
+                  <a:srgbClr val="666666"/>
+                </a:solidFill>
+                <a:latin typeface="Calibri Light" pitchFamily="34" charset="0"/>
+                <a:ea typeface="Calibri Light" pitchFamily="34" charset="-122"/>
+                <a:cs typeface="Calibri Light" pitchFamily="34" charset="-120"/>
+              </a:rPr>
+              <a:t>ява</a:t>
+            </a:r>
+            <a:r>
+              <a:rPr lang="ru-RU" sz="950" dirty="0">
+                <a:solidFill>
+                  <a:srgbClr val="666666"/>
+                </a:solidFill>
+                <a:latin typeface="Calibri Light" pitchFamily="34" charset="0"/>
+                <a:ea typeface="Calibri Light" pitchFamily="34" charset="-122"/>
+                <a:cs typeface="Calibri Light" pitchFamily="34" charset="-120"/>
+              </a:rPr>
+              <a:t> информацията</a:t>
+            </a:r>
+            <a:endParaRPr lang="en-US" sz="950" dirty="0"/>
+          </a:p>
+        </p:txBody>
+      </p:sp>
+      <p:sp>
+        <p:nvSpPr>
+          <p:cNvPr id="48" name="Shape 16">
+            <a:extLst>
+              <a:ext uri="{FF2B5EF4-FFF2-40B4-BE49-F238E27FC236}">
+                <a16:creationId xmlns:a16="http://schemas.microsoft.com/office/drawing/2014/main" id="{A0730996-E264-46EB-8B4B-FCF1C9B360AE}"/>
+              </a:ext>
+            </a:extLst>
+          </p:cNvPr>
+          <p:cNvSpPr/>
+          <p:nvPr/>
+        </p:nvSpPr>
+        <p:spPr>
+          <a:xfrm>
+            <a:off x="5212080" y="2560320"/>
+            <a:ext cx="182880" cy="0"/>
+          </a:xfrm>
+          <a:prstGeom prst="line">
+            <a:avLst/>
+          </a:prstGeom>
+          <a:noFill/>
+          <a:ln w="12700">
+            <a:solidFill>
+              <a:srgbClr val="282828"/>
+            </a:solidFill>
+            <a:prstDash val="solid"/>
+          </a:ln>
+        </p:spPr>
+      </p:sp>
+      <p:sp>
+        <p:nvSpPr>
+          <p:cNvPr id="49" name="Shape 17">
+            <a:extLst>
+              <a:ext uri="{FF2B5EF4-FFF2-40B4-BE49-F238E27FC236}">
+                <a16:creationId xmlns:a16="http://schemas.microsoft.com/office/drawing/2014/main" id="{E4ED292D-4401-41A2-82FC-1BFD3ED9F493}"/>
+              </a:ext>
+            </a:extLst>
+          </p:cNvPr>
+          <p:cNvSpPr/>
+          <p:nvPr/>
+        </p:nvSpPr>
+        <p:spPr>
+          <a:xfrm>
+            <a:off x="5431536" y="1828800"/>
+            <a:ext cx="1463040" cy="1463040"/>
+          </a:xfrm>
+          <a:prstGeom prst="rect">
+            <a:avLst/>
+          </a:prstGeom>
+          <a:solidFill>
+            <a:srgbClr val="111111"/>
+          </a:solidFill>
+          <a:ln w="6350">
+            <a:solidFill>
+              <a:srgbClr val="333333"/>
+            </a:solidFill>
+            <a:prstDash val="solid"/>
+          </a:ln>
+          <a:effectLst>
+            <a:outerShdw blurRad="254000" dist="50800" dir="8100000" algn="bl" rotWithShape="0">
+              <a:srgbClr val="000000">
+                <a:alpha val="50000"/>
+              </a:srgbClr>
+            </a:outerShdw>
+          </a:effectLst>
+        </p:spPr>
+      </p:sp>
+      <p:sp>
+        <p:nvSpPr>
+          <p:cNvPr id="50" name="Text 18">
+            <a:extLst>
+              <a:ext uri="{FF2B5EF4-FFF2-40B4-BE49-F238E27FC236}">
+                <a16:creationId xmlns:a16="http://schemas.microsoft.com/office/drawing/2014/main" id="{512347BE-F081-41FA-81D6-73F8C992C2FD}"/>
+              </a:ext>
+            </a:extLst>
+          </p:cNvPr>
+          <p:cNvSpPr/>
+          <p:nvPr/>
+        </p:nvSpPr>
+        <p:spPr>
+          <a:xfrm>
+            <a:off x="5568696" y="1938528"/>
+            <a:ext cx="365760" cy="320040"/>
+          </a:xfrm>
+          <a:prstGeom prst="rect">
+            <a:avLst/>
+          </a:prstGeom>
+          <a:noFill/>
+          <a:ln/>
+        </p:spPr>
+        <p:txBody>
+          <a:bodyPr wrap="square" lIns="0" tIns="0" rIns="0" bIns="0" rtlCol="0" anchor="ctr"/>
+          <a:lstStyle/>
+          <a:p>
+            <a:pPr marL="0" indent="0">
+              <a:buNone/>
+            </a:pPr>
+            <a:r>
+              <a:rPr lang="en-US" sz="1100" dirty="0">
+                <a:solidFill>
+                  <a:srgbClr val="292929"/>
+                </a:solidFill>
+                <a:latin typeface="Calibri" pitchFamily="34" charset="0"/>
+                <a:ea typeface="Calibri" pitchFamily="34" charset="-122"/>
+                <a:cs typeface="Calibri" pitchFamily="34" charset="-120"/>
+              </a:rPr>
+              <a:t>4</a:t>
+            </a:r>
+            <a:endParaRPr lang="en-US" sz="1100" dirty="0"/>
+          </a:p>
+        </p:txBody>
+      </p:sp>
+      <p:sp>
+        <p:nvSpPr>
+          <p:cNvPr id="51" name="Text 19">
+            <a:extLst>
+              <a:ext uri="{FF2B5EF4-FFF2-40B4-BE49-F238E27FC236}">
+                <a16:creationId xmlns:a16="http://schemas.microsoft.com/office/drawing/2014/main" id="{D67352B4-696E-4D0F-A48A-988EFF05A64C}"/>
+              </a:ext>
+            </a:extLst>
+          </p:cNvPr>
+          <p:cNvSpPr/>
+          <p:nvPr/>
+        </p:nvSpPr>
+        <p:spPr>
+          <a:xfrm>
+            <a:off x="5541264" y="2304288"/>
+            <a:ext cx="1280160" cy="347472"/>
+          </a:xfrm>
+          <a:prstGeom prst="rect">
+            <a:avLst/>
+          </a:prstGeom>
+          <a:noFill/>
+          <a:ln/>
+        </p:spPr>
+        <p:txBody>
+          <a:bodyPr wrap="square" lIns="0" tIns="0" rIns="0" bIns="0" rtlCol="0" anchor="ctr"/>
+          <a:lstStyle/>
+          <a:p>
+            <a:pPr marL="0" indent="0">
+              <a:buNone/>
+            </a:pPr>
+            <a:r>
+              <a:rPr lang="en-US" sz="1300" b="1" dirty="0">
+                <a:solidFill>
+                  <a:srgbClr val="FFFFFF"/>
+                </a:solidFill>
+                <a:latin typeface="Calibri" pitchFamily="34" charset="0"/>
+                <a:ea typeface="Calibri" pitchFamily="34" charset="-122"/>
+                <a:cs typeface="Calibri" pitchFamily="34" charset="-120"/>
+              </a:rPr>
+              <a:t>MongoDB</a:t>
+            </a:r>
+            <a:endParaRPr lang="en-US" sz="1300" dirty="0"/>
+          </a:p>
+        </p:txBody>
+      </p:sp>
+      <p:sp>
+        <p:nvSpPr>
+          <p:cNvPr id="52" name="Text 20">
+            <a:extLst>
+              <a:ext uri="{FF2B5EF4-FFF2-40B4-BE49-F238E27FC236}">
+                <a16:creationId xmlns:a16="http://schemas.microsoft.com/office/drawing/2014/main" id="{524F5842-2C3E-4FD7-99B1-94D7360301E0}"/>
+              </a:ext>
+            </a:extLst>
+          </p:cNvPr>
+          <p:cNvSpPr/>
+          <p:nvPr/>
+        </p:nvSpPr>
+        <p:spPr>
+          <a:xfrm>
+            <a:off x="5541264" y="2679192"/>
+            <a:ext cx="1280160" cy="548640"/>
+          </a:xfrm>
+          <a:prstGeom prst="rect">
+            <a:avLst/>
+          </a:prstGeom>
+          <a:noFill/>
+          <a:ln/>
+        </p:spPr>
+        <p:txBody>
+          <a:bodyPr wrap="square" lIns="0" tIns="0" rIns="0" bIns="0" rtlCol="0" anchor="ctr"/>
+          <a:lstStyle/>
+          <a:p>
+            <a:pPr marL="0" indent="0">
+              <a:buNone/>
+            </a:pPr>
+            <a:r>
+              <a:rPr lang="en-US" sz="950" dirty="0">
+                <a:solidFill>
+                  <a:srgbClr val="666666"/>
+                </a:solidFill>
+                <a:latin typeface="Calibri Light" pitchFamily="34" charset="0"/>
+                <a:ea typeface="Calibri Light" pitchFamily="34" charset="-122"/>
+                <a:cs typeface="Calibri Light" pitchFamily="34" charset="-120"/>
+              </a:rPr>
+              <a:t>Лична база данни</a:t>
+            </a:r>
+            <a:endParaRPr lang="en-US" sz="950" dirty="0"/>
+          </a:p>
+          <a:p>
+            <a:pPr marL="0" indent="0">
+              <a:buNone/>
+            </a:pPr>
+            <a:r>
+              <a:rPr lang="en-US" sz="950" dirty="0">
+                <a:solidFill>
+                  <a:srgbClr val="666666"/>
+                </a:solidFill>
+                <a:latin typeface="Calibri Light" pitchFamily="34" charset="0"/>
+                <a:ea typeface="Calibri Light" pitchFamily="34" charset="-122"/>
+                <a:cs typeface="Calibri Light" pitchFamily="34" charset="-120"/>
+              </a:rPr>
+              <a:t>филтрира</a:t>
+            </a:r>
+            <a:endParaRPr lang="en-US" sz="950" dirty="0"/>
+          </a:p>
+        </p:txBody>
+      </p:sp>
+      <p:sp>
+        <p:nvSpPr>
+          <p:cNvPr id="53" name="Shape 21">
+            <a:extLst>
+              <a:ext uri="{FF2B5EF4-FFF2-40B4-BE49-F238E27FC236}">
+                <a16:creationId xmlns:a16="http://schemas.microsoft.com/office/drawing/2014/main" id="{C5619D55-268A-4A91-AF3D-2229807CB8FA}"/>
+              </a:ext>
+            </a:extLst>
+          </p:cNvPr>
+          <p:cNvSpPr/>
+          <p:nvPr/>
+        </p:nvSpPr>
+        <p:spPr>
+          <a:xfrm>
+            <a:off x="6931152" y="2560320"/>
+            <a:ext cx="182880" cy="0"/>
+          </a:xfrm>
+          <a:prstGeom prst="line">
+            <a:avLst/>
+          </a:prstGeom>
+          <a:noFill/>
+          <a:ln w="12700">
+            <a:solidFill>
+              <a:srgbClr val="282828"/>
+            </a:solidFill>
+            <a:prstDash val="solid"/>
+          </a:ln>
+        </p:spPr>
+      </p:sp>
+      <p:sp>
+        <p:nvSpPr>
+          <p:cNvPr id="54" name="Shape 22">
+            <a:extLst>
+              <a:ext uri="{FF2B5EF4-FFF2-40B4-BE49-F238E27FC236}">
+                <a16:creationId xmlns:a16="http://schemas.microsoft.com/office/drawing/2014/main" id="{D5FBC90F-ACCE-4574-8555-1B0303BECA92}"/>
+              </a:ext>
+            </a:extLst>
+          </p:cNvPr>
+          <p:cNvSpPr/>
+          <p:nvPr/>
+        </p:nvSpPr>
+        <p:spPr>
+          <a:xfrm>
+            <a:off x="7150608" y="1828800"/>
+            <a:ext cx="1463040" cy="1463040"/>
+          </a:xfrm>
+          <a:prstGeom prst="rect">
+            <a:avLst/>
+          </a:prstGeom>
+          <a:solidFill>
+            <a:srgbClr val="111111"/>
+          </a:solidFill>
+          <a:ln w="6350">
+            <a:solidFill>
+              <a:srgbClr val="333333"/>
+            </a:solidFill>
+            <a:prstDash val="solid"/>
+          </a:ln>
+          <a:effectLst>
+            <a:outerShdw blurRad="254000" dist="50800" dir="8100000" algn="bl" rotWithShape="0">
+              <a:srgbClr val="000000">
+                <a:alpha val="50000"/>
+              </a:srgbClr>
+            </a:outerShdw>
+          </a:effectLst>
+        </p:spPr>
+      </p:sp>
+      <p:sp>
+        <p:nvSpPr>
+          <p:cNvPr id="55" name="Text 23">
+            <a:extLst>
+              <a:ext uri="{FF2B5EF4-FFF2-40B4-BE49-F238E27FC236}">
+                <a16:creationId xmlns:a16="http://schemas.microsoft.com/office/drawing/2014/main" id="{66EDDFAB-00AA-4827-84B5-219B9182395F}"/>
+              </a:ext>
+            </a:extLst>
+          </p:cNvPr>
+          <p:cNvSpPr/>
+          <p:nvPr/>
+        </p:nvSpPr>
+        <p:spPr>
+          <a:xfrm>
+            <a:off x="7287768" y="1938528"/>
+            <a:ext cx="365760" cy="320040"/>
+          </a:xfrm>
+          <a:prstGeom prst="rect">
+            <a:avLst/>
+          </a:prstGeom>
+          <a:noFill/>
+          <a:ln/>
+        </p:spPr>
+        <p:txBody>
+          <a:bodyPr wrap="square" lIns="0" tIns="0" rIns="0" bIns="0" rtlCol="0" anchor="ctr"/>
+          <a:lstStyle/>
+          <a:p>
+            <a:pPr marL="0" indent="0">
+              <a:buNone/>
+            </a:pPr>
+            <a:r>
+              <a:rPr lang="en-US" sz="1100" dirty="0">
+                <a:solidFill>
+                  <a:srgbClr val="292929"/>
+                </a:solidFill>
+                <a:latin typeface="Calibri" pitchFamily="34" charset="0"/>
+                <a:ea typeface="Calibri" pitchFamily="34" charset="-122"/>
+                <a:cs typeface="Calibri" pitchFamily="34" charset="-120"/>
+              </a:rPr>
+              <a:t>5</a:t>
+            </a:r>
+            <a:endParaRPr lang="en-US" sz="1100" dirty="0"/>
+          </a:p>
+        </p:txBody>
+      </p:sp>
+      <p:sp>
+        <p:nvSpPr>
+          <p:cNvPr id="56" name="Text 24">
+            <a:extLst>
+              <a:ext uri="{FF2B5EF4-FFF2-40B4-BE49-F238E27FC236}">
+                <a16:creationId xmlns:a16="http://schemas.microsoft.com/office/drawing/2014/main" id="{C9B515B7-A3F1-4682-AD5B-8E194396F625}"/>
+              </a:ext>
+            </a:extLst>
+          </p:cNvPr>
+          <p:cNvSpPr/>
+          <p:nvPr/>
+        </p:nvSpPr>
+        <p:spPr>
+          <a:xfrm>
+            <a:off x="7260336" y="2304288"/>
+            <a:ext cx="1280160" cy="347472"/>
+          </a:xfrm>
+          <a:prstGeom prst="rect">
+            <a:avLst/>
+          </a:prstGeom>
+          <a:noFill/>
+          <a:ln/>
+        </p:spPr>
+        <p:txBody>
+          <a:bodyPr wrap="square" lIns="0" tIns="0" rIns="0" bIns="0" rtlCol="0" anchor="ctr"/>
+          <a:lstStyle/>
+          <a:p>
+            <a:pPr marL="0" indent="0">
+              <a:buNone/>
+            </a:pPr>
+            <a:r>
+              <a:rPr lang="en-US" sz="1300" b="1" dirty="0">
+                <a:solidFill>
+                  <a:srgbClr val="FFFFFF"/>
+                </a:solidFill>
+                <a:latin typeface="Calibri" pitchFamily="34" charset="0"/>
+                <a:ea typeface="Calibri" pitchFamily="34" charset="-122"/>
+                <a:cs typeface="Calibri" pitchFamily="34" charset="-120"/>
+              </a:rPr>
+              <a:t>Изход</a:t>
+            </a:r>
+            <a:endParaRPr lang="en-US" sz="1300" dirty="0"/>
+          </a:p>
+        </p:txBody>
+      </p:sp>
+      <p:sp>
+        <p:nvSpPr>
+          <p:cNvPr id="57" name="Text 25">
+            <a:extLst>
+              <a:ext uri="{FF2B5EF4-FFF2-40B4-BE49-F238E27FC236}">
+                <a16:creationId xmlns:a16="http://schemas.microsoft.com/office/drawing/2014/main" id="{2508324A-744C-4E6E-BABF-B5FC45317043}"/>
+              </a:ext>
+            </a:extLst>
+          </p:cNvPr>
+          <p:cNvSpPr/>
+          <p:nvPr/>
+        </p:nvSpPr>
+        <p:spPr>
+          <a:xfrm>
+            <a:off x="7260336" y="2679192"/>
+            <a:ext cx="1280160" cy="548640"/>
+          </a:xfrm>
+          <a:prstGeom prst="rect">
+            <a:avLst/>
+          </a:prstGeom>
+          <a:noFill/>
+          <a:ln/>
+        </p:spPr>
+        <p:txBody>
+          <a:bodyPr wrap="square" lIns="0" tIns="0" rIns="0" bIns="0" rtlCol="0" anchor="ctr"/>
+          <a:lstStyle/>
+          <a:p>
+            <a:pPr marL="0" indent="0">
+              <a:buNone/>
+            </a:pPr>
+            <a:r>
+              <a:rPr lang="en-US" sz="950" dirty="0">
+                <a:solidFill>
+                  <a:srgbClr val="666666"/>
+                </a:solidFill>
+                <a:latin typeface="Calibri Light" pitchFamily="34" charset="0"/>
+                <a:ea typeface="Calibri Light" pitchFamily="34" charset="-122"/>
+                <a:cs typeface="Calibri Light" pitchFamily="34" charset="-120"/>
+              </a:rPr>
+              <a:t>TTS или действие</a:t>
+            </a:r>
+            <a:endParaRPr lang="en-US" sz="950" dirty="0"/>
+          </a:p>
+          <a:p>
+            <a:pPr marL="0" indent="0">
+              <a:buNone/>
+            </a:pPr>
+            <a:r>
+              <a:rPr lang="en-US" sz="950" dirty="0">
+                <a:solidFill>
+                  <a:srgbClr val="666666"/>
+                </a:solidFill>
+                <a:latin typeface="Calibri Light" pitchFamily="34" charset="0"/>
+                <a:ea typeface="Calibri Light" pitchFamily="34" charset="-122"/>
+                <a:cs typeface="Calibri Light" pitchFamily="34" charset="-120"/>
+              </a:rPr>
+              <a:t>се изпълнява</a:t>
+            </a:r>
+            <a:endParaRPr lang="en-US" sz="950" dirty="0"/>
+          </a:p>
+        </p:txBody>
+      </p:sp>
+      <p:sp>
+        <p:nvSpPr>
+          <p:cNvPr id="58" name="Text 26">
+            <a:extLst>
+              <a:ext uri="{FF2B5EF4-FFF2-40B4-BE49-F238E27FC236}">
+                <a16:creationId xmlns:a16="http://schemas.microsoft.com/office/drawing/2014/main" id="{61F92334-F90E-4A6A-8354-8880296B1CF1}"/>
+              </a:ext>
+            </a:extLst>
+          </p:cNvPr>
+          <p:cNvSpPr/>
+          <p:nvPr/>
+        </p:nvSpPr>
+        <p:spPr>
+          <a:xfrm>
+            <a:off x="2856204" y="3520440"/>
+            <a:ext cx="1463040" cy="256032"/>
+          </a:xfrm>
+          <a:prstGeom prst="rect">
+            <a:avLst/>
+          </a:prstGeom>
+          <a:noFill/>
+          <a:ln/>
+        </p:spPr>
+        <p:txBody>
+          <a:bodyPr wrap="square" rtlCol="0" anchor="ctr"/>
+          <a:lstStyle/>
+          <a:p>
+            <a:pPr marL="0" indent="0" algn="ctr">
+              <a:buNone/>
+            </a:pPr>
+            <a:r>
+              <a:rPr lang="en-US" sz="900" kern="0" spc="100" dirty="0">
+                <a:solidFill>
+                  <a:schemeClr val="bg1">
+                    <a:lumMod val="50000"/>
+                  </a:schemeClr>
+                </a:solidFill>
+                <a:latin typeface="Calibri" pitchFamily="34" charset="0"/>
+                <a:ea typeface="Calibri" pitchFamily="34" charset="-122"/>
+                <a:cs typeface="Calibri" pitchFamily="34" charset="-120"/>
+              </a:rPr>
+              <a:t>WebSocket</a:t>
+            </a:r>
+            <a:endParaRPr lang="en-US" sz="900" dirty="0">
+              <a:solidFill>
+                <a:schemeClr val="bg1">
+                  <a:lumMod val="50000"/>
+                </a:schemeClr>
+              </a:solidFill>
+            </a:endParaRPr>
+          </a:p>
+        </p:txBody>
+      </p:sp>
+      <p:sp>
+        <p:nvSpPr>
+          <p:cNvPr id="59" name="Shape 27">
+            <a:extLst>
+              <a:ext uri="{FF2B5EF4-FFF2-40B4-BE49-F238E27FC236}">
+                <a16:creationId xmlns:a16="http://schemas.microsoft.com/office/drawing/2014/main" id="{4581F5C7-8EFB-4B9D-BCEA-6F3AF2CF1838}"/>
+              </a:ext>
+            </a:extLst>
+          </p:cNvPr>
+          <p:cNvSpPr/>
+          <p:nvPr/>
+        </p:nvSpPr>
+        <p:spPr>
+          <a:xfrm>
+            <a:off x="1463040" y="3749040"/>
+            <a:ext cx="2926080" cy="0"/>
+          </a:xfrm>
+          <a:prstGeom prst="line">
+            <a:avLst/>
+          </a:prstGeom>
+          <a:noFill/>
+          <a:ln w="6350">
+            <a:solidFill>
+              <a:schemeClr val="bg1">
+                <a:lumMod val="50000"/>
+              </a:schemeClr>
+            </a:solidFill>
+            <a:prstDash val="dash"/>
+          </a:ln>
+        </p:spPr>
+      </p:sp>
+      <p:sp>
+        <p:nvSpPr>
+          <p:cNvPr id="60" name="Text 28">
+            <a:extLst>
+              <a:ext uri="{FF2B5EF4-FFF2-40B4-BE49-F238E27FC236}">
+                <a16:creationId xmlns:a16="http://schemas.microsoft.com/office/drawing/2014/main" id="{C2C10F93-175A-486C-B9A7-BA268768DF04}"/>
+              </a:ext>
+            </a:extLst>
+          </p:cNvPr>
+          <p:cNvSpPr/>
+          <p:nvPr/>
+        </p:nvSpPr>
+        <p:spPr>
+          <a:xfrm>
+            <a:off x="4393581" y="3520440"/>
+            <a:ext cx="1828800" cy="256032"/>
+          </a:xfrm>
+          <a:prstGeom prst="rect">
+            <a:avLst/>
+          </a:prstGeom>
+          <a:noFill/>
+          <a:ln/>
+        </p:spPr>
+        <p:txBody>
+          <a:bodyPr wrap="square" rtlCol="0" anchor="ctr"/>
+          <a:lstStyle/>
+          <a:p>
+            <a:pPr marL="0" indent="0" algn="ctr">
+              <a:buNone/>
+            </a:pPr>
+            <a:r>
+              <a:rPr lang="en-US" sz="900" kern="0" spc="100" dirty="0">
+                <a:solidFill>
+                  <a:schemeClr val="bg1">
+                    <a:lumMod val="50000"/>
+                  </a:schemeClr>
+                </a:solidFill>
+                <a:latin typeface="Calibri" pitchFamily="34" charset="0"/>
+                <a:ea typeface="Calibri" pitchFamily="34" charset="-122"/>
+                <a:cs typeface="Calibri" pitchFamily="34" charset="-120"/>
+              </a:rPr>
+              <a:t>FastAPI backend</a:t>
+            </a:r>
+            <a:endParaRPr lang="en-US" sz="900" dirty="0">
+              <a:solidFill>
+                <a:schemeClr val="bg1">
+                  <a:lumMod val="50000"/>
+                </a:schemeClr>
+              </a:solidFill>
+            </a:endParaRPr>
+          </a:p>
+        </p:txBody>
+      </p:sp>
+      <p:sp>
+        <p:nvSpPr>
+          <p:cNvPr id="61" name="Shape 29">
+            <a:extLst>
+              <a:ext uri="{FF2B5EF4-FFF2-40B4-BE49-F238E27FC236}">
+                <a16:creationId xmlns:a16="http://schemas.microsoft.com/office/drawing/2014/main" id="{62C883D7-9BDA-4602-8140-46C7AAD7521A}"/>
+              </a:ext>
+            </a:extLst>
+          </p:cNvPr>
+          <p:cNvSpPr/>
+          <p:nvPr/>
+        </p:nvSpPr>
+        <p:spPr>
+          <a:xfrm>
+            <a:off x="4389120" y="3749040"/>
+            <a:ext cx="3022724" cy="0"/>
+          </a:xfrm>
+          <a:prstGeom prst="line">
+            <a:avLst/>
+          </a:prstGeom>
+          <a:noFill/>
+          <a:ln w="6350">
+            <a:solidFill>
+              <a:schemeClr val="bg1">
+                <a:lumMod val="50000"/>
+              </a:schemeClr>
+            </a:solidFill>
+            <a:prstDash val="dash"/>
+          </a:ln>
+        </p:spPr>
+      </p:sp>
+      <p:sp>
+        <p:nvSpPr>
+          <p:cNvPr id="62" name="Text 26">
+            <a:extLst>
+              <a:ext uri="{FF2B5EF4-FFF2-40B4-BE49-F238E27FC236}">
+                <a16:creationId xmlns:a16="http://schemas.microsoft.com/office/drawing/2014/main" id="{1A4010C5-C6EB-4183-8F36-9979900E13E2}"/>
+              </a:ext>
+            </a:extLst>
+          </p:cNvPr>
+          <p:cNvSpPr/>
+          <p:nvPr/>
+        </p:nvSpPr>
+        <p:spPr>
+          <a:xfrm>
+            <a:off x="1916634" y="3812975"/>
+            <a:ext cx="5310731" cy="256032"/>
+          </a:xfrm>
+          <a:prstGeom prst="rect">
+            <a:avLst/>
+          </a:prstGeom>
+          <a:noFill/>
+          <a:ln/>
+        </p:spPr>
+        <p:txBody>
+          <a:bodyPr wrap="square" rtlCol="0" anchor="ctr"/>
+          <a:lstStyle/>
+          <a:p>
+            <a:pPr marL="0" indent="0" algn="ctr">
+              <a:buNone/>
+            </a:pPr>
+            <a:r>
+              <a:rPr lang="en-US" sz="900" kern="0" spc="100" dirty="0">
+                <a:solidFill>
+                  <a:schemeClr val="bg1">
+                    <a:lumMod val="50000"/>
+                  </a:schemeClr>
+                </a:solidFill>
+                <a:latin typeface="Calibri" pitchFamily="34" charset="0"/>
+                <a:ea typeface="Calibri" pitchFamily="34" charset="-122"/>
+                <a:cs typeface="Calibri" pitchFamily="34" charset="-120"/>
+              </a:rPr>
+              <a:t>ESP32 → WebSocket → FastAPI → MongoDB → distilGPT-2 → WebSocket → React → TTS</a:t>
+            </a:r>
+            <a:endParaRPr lang="en-US" sz="900" dirty="0">
+              <a:solidFill>
+                <a:schemeClr val="bg1">
+                  <a:lumMod val="50000"/>
+                </a:schemeClr>
+              </a:solidFill>
+            </a:endParaRPr>
+          </a:p>
+        </p:txBody>
+      </p:sp>
+    </p:spTree>
+    <p:extLst>
+      <p:ext uri="{BB962C8B-B14F-4D97-AF65-F5344CB8AC3E}">
+        <p14:creationId xmlns:p14="http://schemas.microsoft.com/office/powerpoint/2010/main" val="2177828950"/>
+      </p:ext>
+    </p:extLst>
+  </p:cSld>
+  <p:clrMapOvr>
+    <a:masterClrMapping/>
+  </p:clrMapOvr>
+  <mc:AlternateContent xmlns:mc="http://schemas.openxmlformats.org/markup-compatibility/2006" xmlns:p159="http://schemas.microsoft.com/office/powerpoint/2015/09/main">
+    <mc:Choice Requires="p159">
+      <p:transition xmlns:p14="http://schemas.microsoft.com/office/powerpoint/2010/main" spd="slow" p14:dur="2000">
+        <p159:morph option="byObject"/>
+      </p:transition>
+    </mc:Choice>
+    <mc:Fallback xmlns="">
+      <p:transition spd="slow">
+        <p:fade/>
+      </p:transition>
+    </mc:Fallback>
+  </mc:AlternateContent>
+</p:sld>
+</file>
+
+<file path=ppt/slides/slide8.xml><?xml version="1.0" encoding="utf-8"?>
+<p:sld xmlns:a="http://schemas.openxmlformats.org/drawingml/2006/main" xmlns:r="http://schemas.openxmlformats.org/officeDocument/2006/relationships" xmlns:p="http://schemas.openxmlformats.org/presentationml/2006/main">
+  <p:cSld>
+    <p:bg>
+      <p:bgPr>
+        <a:solidFill>
+          <a:srgbClr val="080808"/>
+        </a:solidFill>
+        <a:effectLst/>
+      </p:bgPr>
+    </p:bg>
+    <p:spTree>
+      <p:nvGrpSpPr>
+        <p:cNvPr id="1" name=""/>
+        <p:cNvGrpSpPr/>
+        <p:nvPr/>
+      </p:nvGrpSpPr>
+      <p:grpSpPr>
+        <a:xfrm>
+          <a:off x="0" y="0"/>
+          <a:ext cx="0" cy="0"/>
+          <a:chOff x="0" y="0"/>
+          <a:chExt cx="0" cy="0"/>
+        </a:xfrm>
+      </p:grpSpPr>
+      <p:sp>
+        <p:nvSpPr>
+          <p:cNvPr id="2" name="Text 0"/>
+          <p:cNvSpPr/>
+          <p:nvPr/>
+        </p:nvSpPr>
+        <p:spPr>
+          <a:xfrm>
+            <a:off x="411480" y="256032"/>
+            <a:ext cx="1828800" cy="228600"/>
+          </a:xfrm>
+          <a:prstGeom prst="rect">
+            <a:avLst/>
+          </a:prstGeom>
+          <a:noFill/>
+          <a:ln/>
+        </p:spPr>
+        <p:txBody>
+          <a:bodyPr wrap="square" lIns="0" tIns="0" rIns="0" bIns="0" rtlCol="0" anchor="ctr"/>
+          <a:lstStyle/>
+          <a:p>
+            <a:pPr marL="0" indent="0">
+              <a:buNone/>
+            </a:pPr>
+            <a:r>
+              <a:rPr lang="en-US" sz="900" kern="0" spc="600" dirty="0">
+                <a:solidFill>
+                  <a:srgbClr val="AAAAAA"/>
+                </a:solidFill>
+                <a:latin typeface="Calibri" pitchFamily="34" charset="0"/>
+                <a:ea typeface="Calibri" pitchFamily="34" charset="-122"/>
+                <a:cs typeface="Calibri" pitchFamily="34" charset="-120"/>
+              </a:rPr>
+              <a:t>VOXEN</a:t>
+            </a:r>
+            <a:endParaRPr lang="en-US" sz="900" dirty="0"/>
+          </a:p>
+        </p:txBody>
+      </p:sp>
+      <p:sp>
+        <p:nvSpPr>
+          <p:cNvPr id="3" name="Text 1"/>
+          <p:cNvSpPr/>
+          <p:nvPr/>
+        </p:nvSpPr>
+        <p:spPr>
+          <a:xfrm>
             <a:off x="457200" y="640080"/>
             <a:ext cx="8229600" cy="548640"/>
           </a:xfrm>
@@ -9083,7 +9495,7 @@
 </p:sld>
 </file>
 
-<file path=ppt/slides/slide8.xml><?xml version="1.0" encoding="utf-8"?>
+<file path=ppt/slides/slide9.xml><?xml version="1.0" encoding="utf-8"?>
 <p:sld xmlns:a="http://schemas.openxmlformats.org/drawingml/2006/main" xmlns:r="http://schemas.openxmlformats.org/officeDocument/2006/relationships" xmlns:p="http://schemas.openxmlformats.org/presentationml/2006/main">
   <p:cSld name="Slide 6">
     <p:bg>
@@ -9183,800 +9595,6 @@
               <a:t>Демо</a:t>
             </a:r>
             <a:endParaRPr lang="en-US" sz="5600" dirty="0"/>
-          </a:p>
-        </p:txBody>
-      </p:sp>
-    </p:spTree>
-  </p:cSld>
-  <p:clrMapOvr>
-    <a:masterClrMapping/>
-  </p:clrMapOvr>
-  <mc:AlternateContent xmlns:mc="http://schemas.openxmlformats.org/markup-compatibility/2006" xmlns:p159="http://schemas.microsoft.com/office/powerpoint/2015/09/main">
-    <mc:Choice Requires="p159">
-      <p:transition xmlns:p14="http://schemas.microsoft.com/office/powerpoint/2010/main" spd="slow" p14:dur="2000">
-        <p159:morph option="byObject"/>
-      </p:transition>
-    </mc:Choice>
-    <mc:Fallback xmlns="">
-      <p:transition spd="slow">
-        <p:fade/>
-      </p:transition>
-    </mc:Fallback>
-  </mc:AlternateContent>
-</p:sld>
-</file>
-
-<file path=ppt/slides/slide9.xml><?xml version="1.0" encoding="utf-8"?>
-<p:sld xmlns:a="http://schemas.openxmlformats.org/drawingml/2006/main" xmlns:r="http://schemas.openxmlformats.org/officeDocument/2006/relationships" xmlns:p="http://schemas.openxmlformats.org/presentationml/2006/main">
-  <p:cSld name="Slide 7">
-    <p:bg>
-      <p:bgPr>
-        <a:solidFill>
-          <a:srgbClr val="080808"/>
-        </a:solidFill>
-        <a:effectLst/>
-      </p:bgPr>
-    </p:bg>
-    <p:spTree>
-      <p:nvGrpSpPr>
-        <p:cNvPr id="1" name=""/>
-        <p:cNvGrpSpPr/>
-        <p:nvPr/>
-      </p:nvGrpSpPr>
-      <p:grpSpPr>
-        <a:xfrm>
-          <a:off x="0" y="0"/>
-          <a:ext cx="0" cy="0"/>
-          <a:chOff x="0" y="0"/>
-          <a:chExt cx="0" cy="0"/>
-        </a:xfrm>
-      </p:grpSpPr>
-      <p:sp>
-        <p:nvSpPr>
-          <p:cNvPr id="2" name="Text 0"/>
-          <p:cNvSpPr/>
-          <p:nvPr/>
-        </p:nvSpPr>
-        <p:spPr>
-          <a:xfrm>
-            <a:off x="411480" y="256032"/>
-            <a:ext cx="1828800" cy="228600"/>
-          </a:xfrm>
-          <a:prstGeom prst="rect">
-            <a:avLst/>
-          </a:prstGeom>
-          <a:noFill/>
-          <a:ln/>
-        </p:spPr>
-        <p:txBody>
-          <a:bodyPr wrap="square" lIns="0" tIns="0" rIns="0" bIns="0" rtlCol="0" anchor="ctr"/>
-          <a:lstStyle/>
-          <a:p>
-            <a:pPr marL="0" indent="0">
-              <a:buNone/>
-            </a:pPr>
-            <a:r>
-              <a:rPr lang="en-US" sz="900" kern="0" spc="600" dirty="0">
-                <a:solidFill>
-                  <a:srgbClr val="AAAAAA"/>
-                </a:solidFill>
-                <a:latin typeface="Calibri" pitchFamily="34" charset="0"/>
-                <a:ea typeface="Calibri" pitchFamily="34" charset="-122"/>
-                <a:cs typeface="Calibri" pitchFamily="34" charset="-120"/>
-              </a:rPr>
-              <a:t>VOXEN</a:t>
-            </a:r>
-            <a:endParaRPr lang="en-US" sz="900" dirty="0"/>
-          </a:p>
-        </p:txBody>
-      </p:sp>
-      <p:sp>
-        <p:nvSpPr>
-          <p:cNvPr id="3" name="Text 1"/>
-          <p:cNvSpPr/>
-          <p:nvPr/>
-        </p:nvSpPr>
-        <p:spPr>
-          <a:xfrm>
-            <a:off x="457200" y="640080"/>
-            <a:ext cx="8229600" cy="548640"/>
-          </a:xfrm>
-          <a:prstGeom prst="rect">
-            <a:avLst/>
-          </a:prstGeom>
-          <a:noFill/>
-          <a:ln/>
-        </p:spPr>
-        <p:txBody>
-          <a:bodyPr wrap="square" rtlCol="0" anchor="ctr"/>
-          <a:lstStyle/>
-          <a:p>
-            <a:pPr marL="0" indent="0">
-              <a:buNone/>
-            </a:pPr>
-            <a:r>
-              <a:rPr lang="en-US" sz="3200" dirty="0">
-                <a:solidFill>
-                  <a:srgbClr val="FFFFFF"/>
-                </a:solidFill>
-                <a:latin typeface="Calibri Light" pitchFamily="34" charset="0"/>
-                <a:ea typeface="Calibri Light" pitchFamily="34" charset="-122"/>
-                <a:cs typeface="Calibri Light" pitchFamily="34" charset="-120"/>
-              </a:rPr>
-              <a:t>Технологии</a:t>
-            </a:r>
-            <a:endParaRPr lang="en-US" sz="3200" dirty="0"/>
-          </a:p>
-        </p:txBody>
-      </p:sp>
-      <p:sp>
-        <p:nvSpPr>
-          <p:cNvPr id="4" name="Shape 2"/>
-          <p:cNvSpPr/>
-          <p:nvPr/>
-        </p:nvSpPr>
-        <p:spPr>
-          <a:xfrm>
-            <a:off x="365760" y="1508760"/>
-            <a:ext cx="4114800" cy="914400"/>
-          </a:xfrm>
-          <a:prstGeom prst="rect">
-            <a:avLst/>
-          </a:prstGeom>
-          <a:solidFill>
-            <a:srgbClr val="111111"/>
-          </a:solidFill>
-          <a:ln w="6350">
-            <a:solidFill>
-              <a:srgbClr val="333333"/>
-            </a:solidFill>
-            <a:prstDash val="solid"/>
-          </a:ln>
-          <a:effectLst>
-            <a:outerShdw blurRad="254000" dist="50800" dir="8100000" algn="bl" rotWithShape="0">
-              <a:srgbClr val="000000">
-                <a:alpha val="50000"/>
-              </a:srgbClr>
-            </a:outerShdw>
-          </a:effectLst>
-        </p:spPr>
-      </p:sp>
-      <p:sp>
-        <p:nvSpPr>
-          <p:cNvPr id="5" name="Text 3"/>
-          <p:cNvSpPr/>
-          <p:nvPr/>
-        </p:nvSpPr>
-        <p:spPr>
-          <a:xfrm>
-            <a:off x="594360" y="1627632"/>
-            <a:ext cx="3474720" cy="256032"/>
-          </a:xfrm>
-          <a:prstGeom prst="rect">
-            <a:avLst/>
-          </a:prstGeom>
-          <a:noFill/>
-          <a:ln/>
-        </p:spPr>
-        <p:txBody>
-          <a:bodyPr wrap="square" lIns="0" tIns="0" rIns="0" bIns="0" rtlCol="0" anchor="ctr"/>
-          <a:lstStyle/>
-          <a:p>
-            <a:pPr marL="0" indent="0">
-              <a:buNone/>
-            </a:pPr>
-            <a:r>
-              <a:rPr lang="en-US" sz="900" kern="0" spc="200" dirty="0">
-                <a:solidFill>
-                  <a:srgbClr val="666666"/>
-                </a:solidFill>
-                <a:latin typeface="Calibri" pitchFamily="34" charset="0"/>
-                <a:ea typeface="Calibri" pitchFamily="34" charset="-122"/>
-                <a:cs typeface="Calibri" pitchFamily="34" charset="-120"/>
-              </a:rPr>
-              <a:t>HARDWARE</a:t>
-            </a:r>
-            <a:endParaRPr lang="en-US" sz="900" dirty="0"/>
-          </a:p>
-        </p:txBody>
-      </p:sp>
-      <p:sp>
-        <p:nvSpPr>
-          <p:cNvPr id="6" name="Text 4"/>
-          <p:cNvSpPr/>
-          <p:nvPr/>
-        </p:nvSpPr>
-        <p:spPr>
-          <a:xfrm>
-            <a:off x="594360" y="1911096"/>
-            <a:ext cx="3657600" cy="384048"/>
-          </a:xfrm>
-          <a:prstGeom prst="rect">
-            <a:avLst/>
-          </a:prstGeom>
-          <a:noFill/>
-          <a:ln/>
-        </p:spPr>
-        <p:txBody>
-          <a:bodyPr wrap="square" lIns="0" tIns="0" rIns="0" bIns="0" rtlCol="0" anchor="ctr"/>
-          <a:lstStyle/>
-          <a:p>
-            <a:pPr marL="0" indent="0">
-              <a:buNone/>
-            </a:pPr>
-            <a:r>
-              <a:rPr lang="en-US" sz="1200" dirty="0">
-                <a:solidFill>
-                  <a:srgbClr val="FFFFFF"/>
-                </a:solidFill>
-                <a:latin typeface="Calibri Light" pitchFamily="34" charset="0"/>
-                <a:ea typeface="Calibri Light" pitchFamily="34" charset="-122"/>
-                <a:cs typeface="Calibri Light" pitchFamily="34" charset="-120"/>
-              </a:rPr>
-              <a:t>ESP32 · Raspberry Pi · Eye Tracker · </a:t>
-            </a:r>
-            <a:r>
-              <a:rPr lang="bg-BG" sz="1200" dirty="0">
-                <a:solidFill>
-                  <a:srgbClr val="FFFFFF"/>
-                </a:solidFill>
-                <a:latin typeface="Calibri Light" pitchFamily="34" charset="0"/>
-                <a:ea typeface="Calibri Light" pitchFamily="34" charset="-122"/>
-                <a:cs typeface="Calibri Light" pitchFamily="34" charset="-120"/>
-              </a:rPr>
-              <a:t>Акселерометър</a:t>
-            </a:r>
-            <a:endParaRPr lang="en-US" sz="1200" dirty="0"/>
-          </a:p>
-        </p:txBody>
-      </p:sp>
-      <p:sp>
-        <p:nvSpPr>
-          <p:cNvPr id="7" name="Shape 5"/>
-          <p:cNvSpPr/>
-          <p:nvPr/>
-        </p:nvSpPr>
-        <p:spPr>
-          <a:xfrm>
-            <a:off x="4754880" y="1508760"/>
-            <a:ext cx="4114800" cy="914400"/>
-          </a:xfrm>
-          <a:prstGeom prst="rect">
-            <a:avLst/>
-          </a:prstGeom>
-          <a:solidFill>
-            <a:srgbClr val="111111"/>
-          </a:solidFill>
-          <a:ln w="6350">
-            <a:solidFill>
-              <a:srgbClr val="333333"/>
-            </a:solidFill>
-            <a:prstDash val="solid"/>
-          </a:ln>
-          <a:effectLst>
-            <a:outerShdw blurRad="254000" dist="50800" dir="8100000" algn="bl" rotWithShape="0">
-              <a:srgbClr val="000000">
-                <a:alpha val="50000"/>
-              </a:srgbClr>
-            </a:outerShdw>
-          </a:effectLst>
-        </p:spPr>
-      </p:sp>
-      <p:sp>
-        <p:nvSpPr>
-          <p:cNvPr id="8" name="Text 6"/>
-          <p:cNvSpPr/>
-          <p:nvPr/>
-        </p:nvSpPr>
-        <p:spPr>
-          <a:xfrm>
-            <a:off x="4983480" y="1627632"/>
-            <a:ext cx="3474720" cy="256032"/>
-          </a:xfrm>
-          <a:prstGeom prst="rect">
-            <a:avLst/>
-          </a:prstGeom>
-          <a:noFill/>
-          <a:ln/>
-        </p:spPr>
-        <p:txBody>
-          <a:bodyPr wrap="square" lIns="0" tIns="0" rIns="0" bIns="0" rtlCol="0" anchor="ctr"/>
-          <a:lstStyle/>
-          <a:p>
-            <a:pPr marL="0" indent="0">
-              <a:buNone/>
-            </a:pPr>
-            <a:r>
-              <a:rPr lang="en-US" sz="900" kern="0" spc="200" dirty="0">
-                <a:solidFill>
-                  <a:srgbClr val="666666"/>
-                </a:solidFill>
-                <a:latin typeface="Calibri" pitchFamily="34" charset="0"/>
-                <a:ea typeface="Calibri" pitchFamily="34" charset="-122"/>
-                <a:cs typeface="Calibri" pitchFamily="34" charset="-120"/>
-              </a:rPr>
-              <a:t>ИИ / ML</a:t>
-            </a:r>
-            <a:endParaRPr lang="en-US" sz="900" dirty="0"/>
-          </a:p>
-        </p:txBody>
-      </p:sp>
-      <p:sp>
-        <p:nvSpPr>
-          <p:cNvPr id="9" name="Text 7"/>
-          <p:cNvSpPr/>
-          <p:nvPr/>
-        </p:nvSpPr>
-        <p:spPr>
-          <a:xfrm>
-            <a:off x="4983480" y="1911096"/>
-            <a:ext cx="3657600" cy="384048"/>
-          </a:xfrm>
-          <a:prstGeom prst="rect">
-            <a:avLst/>
-          </a:prstGeom>
-          <a:noFill/>
-          <a:ln/>
-        </p:spPr>
-        <p:txBody>
-          <a:bodyPr wrap="square" lIns="0" tIns="0" rIns="0" bIns="0" rtlCol="0" anchor="ctr"/>
-          <a:lstStyle/>
-          <a:p>
-            <a:pPr marL="0" indent="0">
-              <a:buNone/>
-            </a:pPr>
-            <a:r>
-              <a:rPr lang="en-US" sz="1200" dirty="0">
-                <a:solidFill>
-                  <a:srgbClr val="FFFFFF"/>
-                </a:solidFill>
-                <a:latin typeface="Calibri Light" pitchFamily="34" charset="0"/>
-                <a:ea typeface="Calibri Light" pitchFamily="34" charset="-122"/>
-                <a:cs typeface="Calibri Light" pitchFamily="34" charset="-120"/>
-              </a:rPr>
-              <a:t>distilGPT-2 · HuggingFace Transformers · Logit re-ranking</a:t>
-            </a:r>
-            <a:endParaRPr lang="en-US" sz="1200" dirty="0"/>
-          </a:p>
-        </p:txBody>
-      </p:sp>
-      <p:sp>
-        <p:nvSpPr>
-          <p:cNvPr id="10" name="Shape 8"/>
-          <p:cNvSpPr/>
-          <p:nvPr/>
-        </p:nvSpPr>
-        <p:spPr>
-          <a:xfrm>
-            <a:off x="365760" y="2606040"/>
-            <a:ext cx="4114800" cy="914400"/>
-          </a:xfrm>
-          <a:prstGeom prst="rect">
-            <a:avLst/>
-          </a:prstGeom>
-          <a:solidFill>
-            <a:srgbClr val="111111"/>
-          </a:solidFill>
-          <a:ln w="6350">
-            <a:solidFill>
-              <a:srgbClr val="333333"/>
-            </a:solidFill>
-            <a:prstDash val="solid"/>
-          </a:ln>
-          <a:effectLst>
-            <a:outerShdw blurRad="254000" dist="50800" dir="8100000" algn="bl" rotWithShape="0">
-              <a:srgbClr val="000000">
-                <a:alpha val="50000"/>
-              </a:srgbClr>
-            </a:outerShdw>
-          </a:effectLst>
-        </p:spPr>
-      </p:sp>
-      <p:sp>
-        <p:nvSpPr>
-          <p:cNvPr id="11" name="Text 9"/>
-          <p:cNvSpPr/>
-          <p:nvPr/>
-        </p:nvSpPr>
-        <p:spPr>
-          <a:xfrm>
-            <a:off x="594360" y="2724912"/>
-            <a:ext cx="3474720" cy="256032"/>
-          </a:xfrm>
-          <a:prstGeom prst="rect">
-            <a:avLst/>
-          </a:prstGeom>
-          <a:noFill/>
-          <a:ln/>
-        </p:spPr>
-        <p:txBody>
-          <a:bodyPr wrap="square" lIns="0" tIns="0" rIns="0" bIns="0" rtlCol="0" anchor="ctr"/>
-          <a:lstStyle/>
-          <a:p>
-            <a:pPr marL="0" indent="0">
-              <a:buNone/>
-            </a:pPr>
-            <a:r>
-              <a:rPr lang="en-US" sz="900" kern="0" spc="200" dirty="0">
-                <a:solidFill>
-                  <a:srgbClr val="666666"/>
-                </a:solidFill>
-                <a:latin typeface="Calibri" pitchFamily="34" charset="0"/>
-                <a:ea typeface="Calibri" pitchFamily="34" charset="-122"/>
-                <a:cs typeface="Calibri" pitchFamily="34" charset="-120"/>
-              </a:rPr>
-              <a:t>BACKEND</a:t>
-            </a:r>
-            <a:endParaRPr lang="en-US" sz="900" dirty="0"/>
-          </a:p>
-        </p:txBody>
-      </p:sp>
-      <p:sp>
-        <p:nvSpPr>
-          <p:cNvPr id="12" name="Text 10"/>
-          <p:cNvSpPr/>
-          <p:nvPr/>
-        </p:nvSpPr>
-        <p:spPr>
-          <a:xfrm>
-            <a:off x="594360" y="3008376"/>
-            <a:ext cx="3657600" cy="384048"/>
-          </a:xfrm>
-          <a:prstGeom prst="rect">
-            <a:avLst/>
-          </a:prstGeom>
-          <a:noFill/>
-          <a:ln/>
-        </p:spPr>
-        <p:txBody>
-          <a:bodyPr wrap="square" lIns="0" tIns="0" rIns="0" bIns="0" rtlCol="0" anchor="ctr"/>
-          <a:lstStyle/>
-          <a:p>
-            <a:pPr marL="0" indent="0">
-              <a:buNone/>
-            </a:pPr>
-            <a:r>
-              <a:rPr lang="en-US" sz="1200" dirty="0">
-                <a:solidFill>
-                  <a:srgbClr val="FFFFFF"/>
-                </a:solidFill>
-                <a:latin typeface="Calibri Light" pitchFamily="34" charset="0"/>
-                <a:ea typeface="Calibri Light" pitchFamily="34" charset="-122"/>
-                <a:cs typeface="Calibri Light" pitchFamily="34" charset="-120"/>
-              </a:rPr>
-              <a:t>FastAPI · Python · WebSockets · pymongo</a:t>
-            </a:r>
-            <a:endParaRPr lang="en-US" sz="1200" dirty="0"/>
-          </a:p>
-        </p:txBody>
-      </p:sp>
-      <p:sp>
-        <p:nvSpPr>
-          <p:cNvPr id="13" name="Shape 11"/>
-          <p:cNvSpPr/>
-          <p:nvPr/>
-        </p:nvSpPr>
-        <p:spPr>
-          <a:xfrm>
-            <a:off x="4754880" y="2606040"/>
-            <a:ext cx="4114800" cy="914400"/>
-          </a:xfrm>
-          <a:prstGeom prst="rect">
-            <a:avLst/>
-          </a:prstGeom>
-          <a:solidFill>
-            <a:srgbClr val="111111"/>
-          </a:solidFill>
-          <a:ln w="6350">
-            <a:solidFill>
-              <a:srgbClr val="333333"/>
-            </a:solidFill>
-            <a:prstDash val="solid"/>
-          </a:ln>
-          <a:effectLst>
-            <a:outerShdw blurRad="254000" dist="50800" dir="8100000" algn="bl" rotWithShape="0">
-              <a:srgbClr val="000000">
-                <a:alpha val="50000"/>
-              </a:srgbClr>
-            </a:outerShdw>
-          </a:effectLst>
-        </p:spPr>
-      </p:sp>
-      <p:sp>
-        <p:nvSpPr>
-          <p:cNvPr id="14" name="Text 12"/>
-          <p:cNvSpPr/>
-          <p:nvPr/>
-        </p:nvSpPr>
-        <p:spPr>
-          <a:xfrm>
-            <a:off x="4983480" y="2724912"/>
-            <a:ext cx="3474720" cy="256032"/>
-          </a:xfrm>
-          <a:prstGeom prst="rect">
-            <a:avLst/>
-          </a:prstGeom>
-          <a:noFill/>
-          <a:ln/>
-        </p:spPr>
-        <p:txBody>
-          <a:bodyPr wrap="square" lIns="0" tIns="0" rIns="0" bIns="0" rtlCol="0" anchor="ctr"/>
-          <a:lstStyle/>
-          <a:p>
-            <a:pPr marL="0" indent="0">
-              <a:buNone/>
-            </a:pPr>
-            <a:r>
-              <a:rPr lang="en-US" sz="900" kern="0" spc="200" dirty="0">
-                <a:solidFill>
-                  <a:srgbClr val="666666"/>
-                </a:solidFill>
-                <a:latin typeface="Calibri" pitchFamily="34" charset="0"/>
-                <a:ea typeface="Calibri" pitchFamily="34" charset="-122"/>
-                <a:cs typeface="Calibri" pitchFamily="34" charset="-120"/>
-              </a:rPr>
-              <a:t>БАЗА ДАННИ</a:t>
-            </a:r>
-            <a:endParaRPr lang="en-US" sz="900" dirty="0"/>
-          </a:p>
-        </p:txBody>
-      </p:sp>
-      <p:sp>
-        <p:nvSpPr>
-          <p:cNvPr id="15" name="Text 13"/>
-          <p:cNvSpPr/>
-          <p:nvPr/>
-        </p:nvSpPr>
-        <p:spPr>
-          <a:xfrm>
-            <a:off x="4983480" y="3008376"/>
-            <a:ext cx="3657600" cy="384048"/>
-          </a:xfrm>
-          <a:prstGeom prst="rect">
-            <a:avLst/>
-          </a:prstGeom>
-          <a:noFill/>
-          <a:ln/>
-        </p:spPr>
-        <p:txBody>
-          <a:bodyPr wrap="square" lIns="0" tIns="0" rIns="0" bIns="0" rtlCol="0" anchor="ctr"/>
-          <a:lstStyle/>
-          <a:p>
-            <a:pPr marL="0" indent="0">
-              <a:buNone/>
-            </a:pPr>
-            <a:r>
-              <a:rPr lang="en-US" sz="1200" dirty="0">
-                <a:solidFill>
-                  <a:srgbClr val="FFFFFF"/>
-                </a:solidFill>
-                <a:latin typeface="Calibri Light" pitchFamily="34" charset="0"/>
-                <a:ea typeface="Calibri Light" pitchFamily="34" charset="-122"/>
-                <a:cs typeface="Calibri Light" pitchFamily="34" charset="-120"/>
-              </a:rPr>
-              <a:t>MongoDB · Pydantic схеми · JSON персистиране</a:t>
-            </a:r>
-            <a:endParaRPr lang="en-US" sz="1200" dirty="0"/>
-          </a:p>
-        </p:txBody>
-      </p:sp>
-      <p:sp>
-        <p:nvSpPr>
-          <p:cNvPr id="16" name="Shape 14"/>
-          <p:cNvSpPr/>
-          <p:nvPr/>
-        </p:nvSpPr>
-        <p:spPr>
-          <a:xfrm>
-            <a:off x="365760" y="3703320"/>
-            <a:ext cx="4114800" cy="914400"/>
-          </a:xfrm>
-          <a:prstGeom prst="rect">
-            <a:avLst/>
-          </a:prstGeom>
-          <a:solidFill>
-            <a:srgbClr val="111111"/>
-          </a:solidFill>
-          <a:ln w="6350">
-            <a:solidFill>
-              <a:srgbClr val="333333"/>
-            </a:solidFill>
-            <a:prstDash val="solid"/>
-          </a:ln>
-          <a:effectLst>
-            <a:outerShdw blurRad="254000" dist="50800" dir="8100000" algn="bl" rotWithShape="0">
-              <a:srgbClr val="000000">
-                <a:alpha val="50000"/>
-              </a:srgbClr>
-            </a:outerShdw>
-          </a:effectLst>
-        </p:spPr>
-      </p:sp>
-      <p:sp>
-        <p:nvSpPr>
-          <p:cNvPr id="17" name="Text 15"/>
-          <p:cNvSpPr/>
-          <p:nvPr/>
-        </p:nvSpPr>
-        <p:spPr>
-          <a:xfrm>
-            <a:off x="594360" y="3822192"/>
-            <a:ext cx="3474720" cy="256032"/>
-          </a:xfrm>
-          <a:prstGeom prst="rect">
-            <a:avLst/>
-          </a:prstGeom>
-          <a:noFill/>
-          <a:ln/>
-        </p:spPr>
-        <p:txBody>
-          <a:bodyPr wrap="square" lIns="0" tIns="0" rIns="0" bIns="0" rtlCol="0" anchor="ctr"/>
-          <a:lstStyle/>
-          <a:p>
-            <a:pPr marL="0" indent="0">
-              <a:buNone/>
-            </a:pPr>
-            <a:r>
-              <a:rPr lang="en-US" sz="900" kern="0" spc="200" dirty="0">
-                <a:solidFill>
-                  <a:srgbClr val="666666"/>
-                </a:solidFill>
-                <a:latin typeface="Calibri" pitchFamily="34" charset="0"/>
-                <a:ea typeface="Calibri" pitchFamily="34" charset="-122"/>
-                <a:cs typeface="Calibri" pitchFamily="34" charset="-120"/>
-              </a:rPr>
-              <a:t>FRONTEND</a:t>
-            </a:r>
-            <a:endParaRPr lang="en-US" sz="900" dirty="0"/>
-          </a:p>
-        </p:txBody>
-      </p:sp>
-      <p:sp>
-        <p:nvSpPr>
-          <p:cNvPr id="18" name="Text 16"/>
-          <p:cNvSpPr/>
-          <p:nvPr/>
-        </p:nvSpPr>
-        <p:spPr>
-          <a:xfrm>
-            <a:off x="594360" y="4105656"/>
-            <a:ext cx="3657600" cy="384048"/>
-          </a:xfrm>
-          <a:prstGeom prst="rect">
-            <a:avLst/>
-          </a:prstGeom>
-          <a:noFill/>
-          <a:ln/>
-        </p:spPr>
-        <p:txBody>
-          <a:bodyPr wrap="square" lIns="0" tIns="0" rIns="0" bIns="0" rtlCol="0" anchor="ctr"/>
-          <a:lstStyle/>
-          <a:p>
-            <a:pPr marL="0" indent="0">
-              <a:buNone/>
-            </a:pPr>
-            <a:r>
-              <a:rPr lang="en-US" sz="1200" dirty="0">
-                <a:solidFill>
-                  <a:srgbClr val="FFFFFF"/>
-                </a:solidFill>
-                <a:latin typeface="Calibri Light" pitchFamily="34" charset="0"/>
-                <a:ea typeface="Calibri Light" pitchFamily="34" charset="-122"/>
-                <a:cs typeface="Calibri Light" pitchFamily="34" charset="-120"/>
-              </a:rPr>
-              <a:t>React · Vite · WebSocket hook</a:t>
-            </a:r>
-            <a:endParaRPr lang="en-US" sz="1200" dirty="0"/>
-          </a:p>
-        </p:txBody>
-      </p:sp>
-      <p:sp>
-        <p:nvSpPr>
-          <p:cNvPr id="19" name="Shape 17"/>
-          <p:cNvSpPr/>
-          <p:nvPr/>
-        </p:nvSpPr>
-        <p:spPr>
-          <a:xfrm>
-            <a:off x="4754880" y="3703320"/>
-            <a:ext cx="4114800" cy="914400"/>
-          </a:xfrm>
-          <a:prstGeom prst="rect">
-            <a:avLst/>
-          </a:prstGeom>
-          <a:solidFill>
-            <a:srgbClr val="111111"/>
-          </a:solidFill>
-          <a:ln w="6350">
-            <a:solidFill>
-              <a:srgbClr val="333333"/>
-            </a:solidFill>
-            <a:prstDash val="solid"/>
-          </a:ln>
-          <a:effectLst>
-            <a:outerShdw blurRad="254000" dist="50800" dir="8100000" algn="bl" rotWithShape="0">
-              <a:srgbClr val="000000">
-                <a:alpha val="50000"/>
-              </a:srgbClr>
-            </a:outerShdw>
-          </a:effectLst>
-        </p:spPr>
-      </p:sp>
-      <p:sp>
-        <p:nvSpPr>
-          <p:cNvPr id="20" name="Text 18"/>
-          <p:cNvSpPr/>
-          <p:nvPr/>
-        </p:nvSpPr>
-        <p:spPr>
-          <a:xfrm>
-            <a:off x="4983480" y="3822192"/>
-            <a:ext cx="3474720" cy="256032"/>
-          </a:xfrm>
-          <a:prstGeom prst="rect">
-            <a:avLst/>
-          </a:prstGeom>
-          <a:noFill/>
-          <a:ln/>
-        </p:spPr>
-        <p:txBody>
-          <a:bodyPr wrap="square" lIns="0" tIns="0" rIns="0" bIns="0" rtlCol="0" anchor="ctr"/>
-          <a:lstStyle/>
-          <a:p>
-            <a:pPr marL="0" indent="0">
-              <a:buNone/>
-            </a:pPr>
-            <a:r>
-              <a:rPr lang="en-US" sz="900" kern="0" spc="200" dirty="0">
-                <a:solidFill>
-                  <a:srgbClr val="666666"/>
-                </a:solidFill>
-                <a:latin typeface="Calibri" pitchFamily="34" charset="0"/>
-                <a:ea typeface="Calibri" pitchFamily="34" charset="-122"/>
-                <a:cs typeface="Calibri" pitchFamily="34" charset="-120"/>
-              </a:rPr>
-              <a:t>КОМУНИКАЦИЯ</a:t>
-            </a:r>
-            <a:endParaRPr lang="en-US" sz="900" dirty="0"/>
-          </a:p>
-        </p:txBody>
-      </p:sp>
-      <p:sp>
-        <p:nvSpPr>
-          <p:cNvPr id="21" name="Text 19"/>
-          <p:cNvSpPr/>
-          <p:nvPr/>
-        </p:nvSpPr>
-        <p:spPr>
-          <a:xfrm>
-            <a:off x="4983480" y="4105656"/>
-            <a:ext cx="3657600" cy="384048"/>
-          </a:xfrm>
-          <a:prstGeom prst="rect">
-            <a:avLst/>
-          </a:prstGeom>
-          <a:noFill/>
-          <a:ln/>
-        </p:spPr>
-        <p:txBody>
-          <a:bodyPr wrap="square" lIns="0" tIns="0" rIns="0" bIns="0" rtlCol="0" anchor="ctr"/>
-          <a:lstStyle/>
-          <a:p>
-            <a:pPr marL="0" indent="0">
-              <a:buNone/>
-            </a:pPr>
-            <a:r>
-              <a:rPr lang="en-US" sz="1200" dirty="0">
-                <a:solidFill>
-                  <a:srgbClr val="FFFFFF"/>
-                </a:solidFill>
-                <a:latin typeface="Calibri Light" pitchFamily="34" charset="0"/>
-                <a:ea typeface="Calibri Light" pitchFamily="34" charset="-122"/>
-                <a:cs typeface="Calibri Light" pitchFamily="34" charset="-120"/>
-              </a:rPr>
-              <a:t>ESP32 WebSocket сървър · Serial / WiFi</a:t>
-            </a:r>
-            <a:endParaRPr lang="en-US" sz="1200" dirty="0"/>
           </a:p>
         </p:txBody>
       </p:sp>
